--- a/design/templates/nile-night/template.pptx
+++ b/design/templates/nile-night/template.pptx
@@ -126,7 +126,7 @@
           <p:cNvPr id="9" name="creative_background">
             <a:extLst>
               <a:ext uri="{FF2B5EF4-FFF2-40B4-BE49-F238E27FC236}">
-                <a16:creationId xmlns:a16="http://schemas.microsoft.com/office/drawing/2014/main" id="{E78D0440-B7E3-CDDC-1CAC-76B778F07486}"/>
+                <a16:creationId xmlns:a16="http://schemas.microsoft.com/office/drawing/2014/main" id="{177F16A3-334B-F725-A2C6-AC6B9C86A46A}"/>
               </a:ext>
             </a:extLst>
           </p:cNvPr>
@@ -290,7 +290,7 @@
             </a:lvl1pPr>
           </a:lstStyle>
           <a:p>
-            <a:fld id="{F38275E8-7EFC-4FEA-BF4C-11F280B3D894}" type="datetimeFigureOut">
+            <a:fld id="{C5143365-16B3-4FD5-8BF7-F05E2AA1930B}" type="datetimeFigureOut">
               <a:rPr lang="en-US" smtClean="0"/>
               <a:t>10/3/2026</a:t>
             </a:fld>
@@ -332,7 +332,7 @@
           <a:bodyPr/>
           <a:lstStyle/>
           <a:p>
-            <a:fld id="{460DAC5E-8076-4A1F-9E2B-43FC1CE1F208}" type="slidenum">
+            <a:fld id="{4562F234-49D9-48C6-80E0-9B9318BCC5E8}" type="slidenum">
               <a:rPr lang="en-US" smtClean="0"/>
               <a:t>‹#›</a:t>
             </a:fld>
@@ -343,7 +343,7 @@
     </p:spTree>
     <p:extLst>
       <p:ext uri="{BB962C8B-B14F-4D97-AF65-F5344CB8AC3E}">
-        <p14:creationId xmlns:p14="http://schemas.microsoft.com/office/powerpoint/2010/main" val="3441964318"/>
+        <p14:creationId xmlns:p14="http://schemas.microsoft.com/office/powerpoint/2010/main" val="794032755"/>
       </p:ext>
     </p:extLst>
   </p:cSld>
@@ -375,7 +375,7 @@
           <p:cNvPr id="7" name="creative_background">
             <a:extLst>
               <a:ext uri="{FF2B5EF4-FFF2-40B4-BE49-F238E27FC236}">
-                <a16:creationId xmlns:a16="http://schemas.microsoft.com/office/drawing/2014/main" id="{3807F622-2913-FF7A-F009-03C36D0308DC}"/>
+                <a16:creationId xmlns:a16="http://schemas.microsoft.com/office/drawing/2014/main" id="{67BDFCF1-3463-345E-1F75-8F167570B53A}"/>
               </a:ext>
             </a:extLst>
           </p:cNvPr>
@@ -448,7 +448,7 @@
           <a:bodyPr/>
           <a:lstStyle/>
           <a:p>
-            <a:fld id="{F38275E8-7EFC-4FEA-BF4C-11F280B3D894}" type="datetimeFigureOut">
+            <a:fld id="{C5143365-16B3-4FD5-8BF7-F05E2AA1930B}" type="datetimeFigureOut">
               <a:rPr lang="en-US" smtClean="0"/>
               <a:t>10/3/2026</a:t>
             </a:fld>
@@ -490,7 +490,7 @@
           <a:bodyPr/>
           <a:lstStyle/>
           <a:p>
-            <a:fld id="{460DAC5E-8076-4A1F-9E2B-43FC1CE1F208}" type="slidenum">
+            <a:fld id="{4562F234-49D9-48C6-80E0-9B9318BCC5E8}" type="slidenum">
               <a:rPr lang="en-US" smtClean="0"/>
               <a:t>‹#›</a:t>
             </a:fld>
@@ -503,7 +503,7 @@
           <p:cNvPr id="8" name="body">
             <a:extLst>
               <a:ext uri="{FF2B5EF4-FFF2-40B4-BE49-F238E27FC236}">
-                <a16:creationId xmlns:a16="http://schemas.microsoft.com/office/drawing/2014/main" id="{2107EFB1-E846-D4B8-85B1-B703A955A690}"/>
+                <a16:creationId xmlns:a16="http://schemas.microsoft.com/office/drawing/2014/main" id="{7F4E0C13-B48C-086A-2F5C-DF3FFF8F52FD}"/>
               </a:ext>
             </a:extLst>
           </p:cNvPr>
@@ -543,7 +543,7 @@
           <p:cNvPr id="9" name="source">
             <a:extLst>
               <a:ext uri="{FF2B5EF4-FFF2-40B4-BE49-F238E27FC236}">
-                <a16:creationId xmlns:a16="http://schemas.microsoft.com/office/drawing/2014/main" id="{E79B2FCD-2512-A195-9A1D-819E383A66CF}"/>
+                <a16:creationId xmlns:a16="http://schemas.microsoft.com/office/drawing/2014/main" id="{A7667450-ADDB-41C3-F7E3-5D562CC5AB42}"/>
               </a:ext>
             </a:extLst>
           </p:cNvPr>
@@ -598,7 +598,7 @@
     </p:spTree>
     <p:extLst>
       <p:ext uri="{BB962C8B-B14F-4D97-AF65-F5344CB8AC3E}">
-        <p14:creationId xmlns:p14="http://schemas.microsoft.com/office/powerpoint/2010/main" val="3372434285"/>
+        <p14:creationId xmlns:p14="http://schemas.microsoft.com/office/powerpoint/2010/main" val="666606680"/>
       </p:ext>
     </p:extLst>
   </p:cSld>
@@ -630,7 +630,7 @@
           <p:cNvPr id="7" name="creative_background">
             <a:extLst>
               <a:ext uri="{FF2B5EF4-FFF2-40B4-BE49-F238E27FC236}">
-                <a16:creationId xmlns:a16="http://schemas.microsoft.com/office/drawing/2014/main" id="{CECF58B8-B5D1-7355-E22E-03EA9A02BE0F}"/>
+                <a16:creationId xmlns:a16="http://schemas.microsoft.com/office/drawing/2014/main" id="{6E23D244-E028-2E49-7320-B5509EE0E0CC}"/>
               </a:ext>
             </a:extLst>
           </p:cNvPr>
@@ -703,7 +703,7 @@
           <a:bodyPr/>
           <a:lstStyle/>
           <a:p>
-            <a:fld id="{F38275E8-7EFC-4FEA-BF4C-11F280B3D894}" type="datetimeFigureOut">
+            <a:fld id="{C5143365-16B3-4FD5-8BF7-F05E2AA1930B}" type="datetimeFigureOut">
               <a:rPr lang="en-US" smtClean="0"/>
               <a:t>10/3/2026</a:t>
             </a:fld>
@@ -745,7 +745,7 @@
           <a:bodyPr/>
           <a:lstStyle/>
           <a:p>
-            <a:fld id="{460DAC5E-8076-4A1F-9E2B-43FC1CE1F208}" type="slidenum">
+            <a:fld id="{4562F234-49D9-48C6-80E0-9B9318BCC5E8}" type="slidenum">
               <a:rPr lang="en-US" smtClean="0"/>
               <a:t>‹#›</a:t>
             </a:fld>
@@ -758,7 +758,7 @@
           <p:cNvPr id="8" name="body">
             <a:extLst>
               <a:ext uri="{FF2B5EF4-FFF2-40B4-BE49-F238E27FC236}">
-                <a16:creationId xmlns:a16="http://schemas.microsoft.com/office/drawing/2014/main" id="{C08CA321-1A87-EFBD-0EFC-9A6EE7622C6F}"/>
+                <a16:creationId xmlns:a16="http://schemas.microsoft.com/office/drawing/2014/main" id="{A6761D88-7243-5679-A145-8E36CD1698A7}"/>
               </a:ext>
             </a:extLst>
           </p:cNvPr>
@@ -801,7 +801,7 @@
     </p:spTree>
     <p:extLst>
       <p:ext uri="{BB962C8B-B14F-4D97-AF65-F5344CB8AC3E}">
-        <p14:creationId xmlns:p14="http://schemas.microsoft.com/office/powerpoint/2010/main" val="7640829"/>
+        <p14:creationId xmlns:p14="http://schemas.microsoft.com/office/powerpoint/2010/main" val="515956396"/>
       </p:ext>
     </p:extLst>
   </p:cSld>
@@ -886,7 +886,7 @@
           <p:cNvPr id="6" name="section_number">
             <a:extLst>
               <a:ext uri="{FF2B5EF4-FFF2-40B4-BE49-F238E27FC236}">
-                <a16:creationId xmlns:a16="http://schemas.microsoft.com/office/drawing/2014/main" id="{3E3753A8-EFD6-2C57-FFB5-BD44CCD66969}"/>
+                <a16:creationId xmlns:a16="http://schemas.microsoft.com/office/drawing/2014/main" id="{BFC90DAE-A89F-C593-7DAB-F79B953B747D}"/>
               </a:ext>
             </a:extLst>
           </p:cNvPr>
@@ -939,7 +939,7 @@
           <p:cNvPr id="7" name="subtitle">
             <a:extLst>
               <a:ext uri="{FF2B5EF4-FFF2-40B4-BE49-F238E27FC236}">
-                <a16:creationId xmlns:a16="http://schemas.microsoft.com/office/drawing/2014/main" id="{64CB2F43-1C75-CD01-F709-2BB38EF4E709}"/>
+                <a16:creationId xmlns:a16="http://schemas.microsoft.com/office/drawing/2014/main" id="{7337B929-7D5A-BA26-9EDC-E20D2DC77B14}"/>
               </a:ext>
             </a:extLst>
           </p:cNvPr>
@@ -989,7 +989,7 @@
     </p:spTree>
     <p:extLst>
       <p:ext uri="{BB962C8B-B14F-4D97-AF65-F5344CB8AC3E}">
-        <p14:creationId xmlns:p14="http://schemas.microsoft.com/office/powerpoint/2010/main" val="1057770964"/>
+        <p14:creationId xmlns:p14="http://schemas.microsoft.com/office/powerpoint/2010/main" val="1890615270"/>
       </p:ext>
     </p:extLst>
   </p:cSld>
@@ -1021,7 +1021,7 @@
           <p:cNvPr id="7" name="creative_background">
             <a:extLst>
               <a:ext uri="{FF2B5EF4-FFF2-40B4-BE49-F238E27FC236}">
-                <a16:creationId xmlns:a16="http://schemas.microsoft.com/office/drawing/2014/main" id="{EAE5C17A-BAD5-B095-1270-848AEAF0141C}"/>
+                <a16:creationId xmlns:a16="http://schemas.microsoft.com/office/drawing/2014/main" id="{6116028B-DF59-6791-EC39-E21B222014B3}"/>
               </a:ext>
             </a:extLst>
           </p:cNvPr>
@@ -1094,7 +1094,7 @@
           <a:bodyPr/>
           <a:lstStyle/>
           <a:p>
-            <a:fld id="{F38275E8-7EFC-4FEA-BF4C-11F280B3D894}" type="datetimeFigureOut">
+            <a:fld id="{C5143365-16B3-4FD5-8BF7-F05E2AA1930B}" type="datetimeFigureOut">
               <a:rPr lang="en-US" smtClean="0"/>
               <a:t>10/3/2026</a:t>
             </a:fld>
@@ -1136,7 +1136,7 @@
           <a:bodyPr/>
           <a:lstStyle/>
           <a:p>
-            <a:fld id="{460DAC5E-8076-4A1F-9E2B-43FC1CE1F208}" type="slidenum">
+            <a:fld id="{4562F234-49D9-48C6-80E0-9B9318BCC5E8}" type="slidenum">
               <a:rPr lang="en-US" smtClean="0"/>
               <a:t>‹#›</a:t>
             </a:fld>
@@ -1149,7 +1149,7 @@
           <p:cNvPr id="8" name="item_1_title">
             <a:extLst>
               <a:ext uri="{FF2B5EF4-FFF2-40B4-BE49-F238E27FC236}">
-                <a16:creationId xmlns:a16="http://schemas.microsoft.com/office/drawing/2014/main" id="{CC6A572D-51F4-78B9-DF68-0A4127B7BF91}"/>
+                <a16:creationId xmlns:a16="http://schemas.microsoft.com/office/drawing/2014/main" id="{005545B2-E15C-1B35-DB87-FEA136189BD4}"/>
               </a:ext>
             </a:extLst>
           </p:cNvPr>
@@ -1199,7 +1199,7 @@
           <p:cNvPr id="9" name="item_1">
             <a:extLst>
               <a:ext uri="{FF2B5EF4-FFF2-40B4-BE49-F238E27FC236}">
-                <a16:creationId xmlns:a16="http://schemas.microsoft.com/office/drawing/2014/main" id="{BFF6BC88-CC3B-CFD0-85F1-83AC11493388}"/>
+                <a16:creationId xmlns:a16="http://schemas.microsoft.com/office/drawing/2014/main" id="{5840DAD7-D54A-AAB3-7A4F-98BE854883A2}"/>
               </a:ext>
             </a:extLst>
           </p:cNvPr>
@@ -1247,7 +1247,7 @@
           <p:cNvPr id="10" name="item_2_title">
             <a:extLst>
               <a:ext uri="{FF2B5EF4-FFF2-40B4-BE49-F238E27FC236}">
-                <a16:creationId xmlns:a16="http://schemas.microsoft.com/office/drawing/2014/main" id="{E2F84E28-70FC-D29A-D0DB-CB6EBEC6801F}"/>
+                <a16:creationId xmlns:a16="http://schemas.microsoft.com/office/drawing/2014/main" id="{309D72F6-7C9F-F27A-E015-F5426A91F2BF}"/>
               </a:ext>
             </a:extLst>
           </p:cNvPr>
@@ -1300,7 +1300,7 @@
           <p:cNvPr id="11" name="item_2">
             <a:extLst>
               <a:ext uri="{FF2B5EF4-FFF2-40B4-BE49-F238E27FC236}">
-                <a16:creationId xmlns:a16="http://schemas.microsoft.com/office/drawing/2014/main" id="{4265D6DD-05BD-935F-EE20-8D797AD1DA14}"/>
+                <a16:creationId xmlns:a16="http://schemas.microsoft.com/office/drawing/2014/main" id="{3DEFF9B1-D731-11EF-3B10-71D41701AAAF}"/>
               </a:ext>
             </a:extLst>
           </p:cNvPr>
@@ -1348,7 +1348,7 @@
           <p:cNvPr id="12" name="item_3_title">
             <a:extLst>
               <a:ext uri="{FF2B5EF4-FFF2-40B4-BE49-F238E27FC236}">
-                <a16:creationId xmlns:a16="http://schemas.microsoft.com/office/drawing/2014/main" id="{D53F9F38-EE91-C4C5-5C39-570ADB0EDA9E}"/>
+                <a16:creationId xmlns:a16="http://schemas.microsoft.com/office/drawing/2014/main" id="{D0851A9A-3BC0-53ED-3D07-8D529A7C0DF5}"/>
               </a:ext>
             </a:extLst>
           </p:cNvPr>
@@ -1401,7 +1401,7 @@
           <p:cNvPr id="13" name="item_3">
             <a:extLst>
               <a:ext uri="{FF2B5EF4-FFF2-40B4-BE49-F238E27FC236}">
-                <a16:creationId xmlns:a16="http://schemas.microsoft.com/office/drawing/2014/main" id="{9BB83457-E26C-5D4B-3A40-8364FD4A4227}"/>
+                <a16:creationId xmlns:a16="http://schemas.microsoft.com/office/drawing/2014/main" id="{FE00C56F-EB75-A75E-7658-6184092A224C}"/>
               </a:ext>
             </a:extLst>
           </p:cNvPr>
@@ -1449,7 +1449,7 @@
           <p:cNvPr id="14" name="item_4_title">
             <a:extLst>
               <a:ext uri="{FF2B5EF4-FFF2-40B4-BE49-F238E27FC236}">
-                <a16:creationId xmlns:a16="http://schemas.microsoft.com/office/drawing/2014/main" id="{8C0466FE-9C29-17C5-C375-166EB7B24ECB}"/>
+                <a16:creationId xmlns:a16="http://schemas.microsoft.com/office/drawing/2014/main" id="{1620694D-55D2-F739-35E6-2E061E6F2068}"/>
               </a:ext>
             </a:extLst>
           </p:cNvPr>
@@ -1502,7 +1502,7 @@
           <p:cNvPr id="15" name="item_4">
             <a:extLst>
               <a:ext uri="{FF2B5EF4-FFF2-40B4-BE49-F238E27FC236}">
-                <a16:creationId xmlns:a16="http://schemas.microsoft.com/office/drawing/2014/main" id="{42F467FD-2495-B131-5FE6-89A640694D3A}"/>
+                <a16:creationId xmlns:a16="http://schemas.microsoft.com/office/drawing/2014/main" id="{E48849CF-C5BC-CBD7-5576-063E5303FAE9}"/>
               </a:ext>
             </a:extLst>
           </p:cNvPr>
@@ -1550,7 +1550,7 @@
           <p:cNvPr id="16" name="source">
             <a:extLst>
               <a:ext uri="{FF2B5EF4-FFF2-40B4-BE49-F238E27FC236}">
-                <a16:creationId xmlns:a16="http://schemas.microsoft.com/office/drawing/2014/main" id="{0EB6F3A9-CD03-8393-17FE-A05DD0B60880}"/>
+                <a16:creationId xmlns:a16="http://schemas.microsoft.com/office/drawing/2014/main" id="{17065EF0-A0D3-3417-890F-6713B5CE3C49}"/>
               </a:ext>
             </a:extLst>
           </p:cNvPr>
@@ -1605,7 +1605,7 @@
     </p:spTree>
     <p:extLst>
       <p:ext uri="{BB962C8B-B14F-4D97-AF65-F5344CB8AC3E}">
-        <p14:creationId xmlns:p14="http://schemas.microsoft.com/office/powerpoint/2010/main" val="1593753713"/>
+        <p14:creationId xmlns:p14="http://schemas.microsoft.com/office/powerpoint/2010/main" val="1234580073"/>
       </p:ext>
     </p:extLst>
   </p:cSld>
@@ -1637,7 +1637,7 @@
           <p:cNvPr id="7" name="creative_background">
             <a:extLst>
               <a:ext uri="{FF2B5EF4-FFF2-40B4-BE49-F238E27FC236}">
-                <a16:creationId xmlns:a16="http://schemas.microsoft.com/office/drawing/2014/main" id="{10B3E360-A420-8635-D8EA-1147CA6D7A20}"/>
+                <a16:creationId xmlns:a16="http://schemas.microsoft.com/office/drawing/2014/main" id="{C06C2F94-23A7-C602-E66D-ACD818F05259}"/>
               </a:ext>
             </a:extLst>
           </p:cNvPr>
@@ -1710,7 +1710,7 @@
           <a:bodyPr/>
           <a:lstStyle/>
           <a:p>
-            <a:fld id="{F38275E8-7EFC-4FEA-BF4C-11F280B3D894}" type="datetimeFigureOut">
+            <a:fld id="{C5143365-16B3-4FD5-8BF7-F05E2AA1930B}" type="datetimeFigureOut">
               <a:rPr lang="en-US" smtClean="0"/>
               <a:t>10/3/2026</a:t>
             </a:fld>
@@ -1752,7 +1752,7 @@
           <a:bodyPr/>
           <a:lstStyle/>
           <a:p>
-            <a:fld id="{460DAC5E-8076-4A1F-9E2B-43FC1CE1F208}" type="slidenum">
+            <a:fld id="{4562F234-49D9-48C6-80E0-9B9318BCC5E8}" type="slidenum">
               <a:rPr lang="en-US" smtClean="0"/>
               <a:t>‹#›</a:t>
             </a:fld>
@@ -1765,7 +1765,7 @@
           <p:cNvPr id="8" name="body">
             <a:extLst>
               <a:ext uri="{FF2B5EF4-FFF2-40B4-BE49-F238E27FC236}">
-                <a16:creationId xmlns:a16="http://schemas.microsoft.com/office/drawing/2014/main" id="{9625BAAD-D1FF-CBE2-B210-9B05BD296D0B}"/>
+                <a16:creationId xmlns:a16="http://schemas.microsoft.com/office/drawing/2014/main" id="{892CE4AB-E9B6-5F39-073B-434BFE39F100}"/>
               </a:ext>
             </a:extLst>
           </p:cNvPr>
@@ -1810,7 +1810,7 @@
           <p:cNvPr id="9" name="source">
             <a:extLst>
               <a:ext uri="{FF2B5EF4-FFF2-40B4-BE49-F238E27FC236}">
-                <a16:creationId xmlns:a16="http://schemas.microsoft.com/office/drawing/2014/main" id="{55B1DD41-AE63-D492-0F8D-7FB8A72DC662}"/>
+                <a16:creationId xmlns:a16="http://schemas.microsoft.com/office/drawing/2014/main" id="{DC115002-2556-E7B7-B71D-A87C50ADDFD9}"/>
               </a:ext>
             </a:extLst>
           </p:cNvPr>
@@ -1865,7 +1865,7 @@
     </p:spTree>
     <p:extLst>
       <p:ext uri="{BB962C8B-B14F-4D97-AF65-F5344CB8AC3E}">
-        <p14:creationId xmlns:p14="http://schemas.microsoft.com/office/powerpoint/2010/main" val="3965680645"/>
+        <p14:creationId xmlns:p14="http://schemas.microsoft.com/office/powerpoint/2010/main" val="1207842713"/>
       </p:ext>
     </p:extLst>
   </p:cSld>
@@ -1897,7 +1897,7 @@
           <p:cNvPr id="7" name="creative_background">
             <a:extLst>
               <a:ext uri="{FF2B5EF4-FFF2-40B4-BE49-F238E27FC236}">
-                <a16:creationId xmlns:a16="http://schemas.microsoft.com/office/drawing/2014/main" id="{A14FEE9C-AFA6-4E07-75E5-0FFB042696F0}"/>
+                <a16:creationId xmlns:a16="http://schemas.microsoft.com/office/drawing/2014/main" id="{C68717D1-553D-93D9-CC33-AD84D0BC8B5F}"/>
               </a:ext>
             </a:extLst>
           </p:cNvPr>
@@ -1970,7 +1970,7 @@
           <a:bodyPr/>
           <a:lstStyle/>
           <a:p>
-            <a:fld id="{F38275E8-7EFC-4FEA-BF4C-11F280B3D894}" type="datetimeFigureOut">
+            <a:fld id="{C5143365-16B3-4FD5-8BF7-F05E2AA1930B}" type="datetimeFigureOut">
               <a:rPr lang="en-US" smtClean="0"/>
               <a:t>10/3/2026</a:t>
             </a:fld>
@@ -2012,7 +2012,7 @@
           <a:bodyPr/>
           <a:lstStyle/>
           <a:p>
-            <a:fld id="{460DAC5E-8076-4A1F-9E2B-43FC1CE1F208}" type="slidenum">
+            <a:fld id="{4562F234-49D9-48C6-80E0-9B9318BCC5E8}" type="slidenum">
               <a:rPr lang="en-US" smtClean="0"/>
               <a:t>‹#›</a:t>
             </a:fld>
@@ -2025,7 +2025,7 @@
           <p:cNvPr id="8" name="item_1_title">
             <a:extLst>
               <a:ext uri="{FF2B5EF4-FFF2-40B4-BE49-F238E27FC236}">
-                <a16:creationId xmlns:a16="http://schemas.microsoft.com/office/drawing/2014/main" id="{646D447D-DEFA-E552-0790-CDAF3D7639AD}"/>
+                <a16:creationId xmlns:a16="http://schemas.microsoft.com/office/drawing/2014/main" id="{66FEC42F-364F-FB2C-3D37-0C71EE64E1F7}"/>
               </a:ext>
             </a:extLst>
           </p:cNvPr>
@@ -2075,7 +2075,7 @@
           <p:cNvPr id="9" name="item_1">
             <a:extLst>
               <a:ext uri="{FF2B5EF4-FFF2-40B4-BE49-F238E27FC236}">
-                <a16:creationId xmlns:a16="http://schemas.microsoft.com/office/drawing/2014/main" id="{6E596F44-5504-7D33-53E9-07539EEAF05F}"/>
+                <a16:creationId xmlns:a16="http://schemas.microsoft.com/office/drawing/2014/main" id="{8F378B04-7784-F803-E721-42F26EA06D07}"/>
               </a:ext>
             </a:extLst>
           </p:cNvPr>
@@ -2123,7 +2123,7 @@
           <p:cNvPr id="10" name="item_2_title">
             <a:extLst>
               <a:ext uri="{FF2B5EF4-FFF2-40B4-BE49-F238E27FC236}">
-                <a16:creationId xmlns:a16="http://schemas.microsoft.com/office/drawing/2014/main" id="{A5EF09FE-053A-2F10-D392-1A43529E5A44}"/>
+                <a16:creationId xmlns:a16="http://schemas.microsoft.com/office/drawing/2014/main" id="{2A302E7F-6B41-A227-2372-B6E2724BB7DE}"/>
               </a:ext>
             </a:extLst>
           </p:cNvPr>
@@ -2176,7 +2176,7 @@
           <p:cNvPr id="11" name="item_2">
             <a:extLst>
               <a:ext uri="{FF2B5EF4-FFF2-40B4-BE49-F238E27FC236}">
-                <a16:creationId xmlns:a16="http://schemas.microsoft.com/office/drawing/2014/main" id="{6F28EFD9-DBE5-6D25-A8F8-FBC7E19E8E26}"/>
+                <a16:creationId xmlns:a16="http://schemas.microsoft.com/office/drawing/2014/main" id="{C538ADAA-482D-C212-5398-B8354746192B}"/>
               </a:ext>
             </a:extLst>
           </p:cNvPr>
@@ -2224,7 +2224,7 @@
           <p:cNvPr id="12" name="item_3_title">
             <a:extLst>
               <a:ext uri="{FF2B5EF4-FFF2-40B4-BE49-F238E27FC236}">
-                <a16:creationId xmlns:a16="http://schemas.microsoft.com/office/drawing/2014/main" id="{60DF43B6-E0F7-F9C4-77C0-CA700FC3F483}"/>
+                <a16:creationId xmlns:a16="http://schemas.microsoft.com/office/drawing/2014/main" id="{00A4C13F-7CCA-9610-47BD-ABB14533611A}"/>
               </a:ext>
             </a:extLst>
           </p:cNvPr>
@@ -2277,7 +2277,7 @@
           <p:cNvPr id="13" name="item_3">
             <a:extLst>
               <a:ext uri="{FF2B5EF4-FFF2-40B4-BE49-F238E27FC236}">
-                <a16:creationId xmlns:a16="http://schemas.microsoft.com/office/drawing/2014/main" id="{E9BB9EEA-EB16-5679-996B-B409911C3BC4}"/>
+                <a16:creationId xmlns:a16="http://schemas.microsoft.com/office/drawing/2014/main" id="{EBA3DEE0-9C7B-8EB5-4131-10833A372C57}"/>
               </a:ext>
             </a:extLst>
           </p:cNvPr>
@@ -2325,7 +2325,7 @@
           <p:cNvPr id="14" name="item_4_title">
             <a:extLst>
               <a:ext uri="{FF2B5EF4-FFF2-40B4-BE49-F238E27FC236}">
-                <a16:creationId xmlns:a16="http://schemas.microsoft.com/office/drawing/2014/main" id="{CF003FFD-5946-D1A4-AC2F-16B1B13BA296}"/>
+                <a16:creationId xmlns:a16="http://schemas.microsoft.com/office/drawing/2014/main" id="{FA02AECB-DB3B-621E-320B-223031543FAE}"/>
               </a:ext>
             </a:extLst>
           </p:cNvPr>
@@ -2378,7 +2378,7 @@
           <p:cNvPr id="15" name="item_4">
             <a:extLst>
               <a:ext uri="{FF2B5EF4-FFF2-40B4-BE49-F238E27FC236}">
-                <a16:creationId xmlns:a16="http://schemas.microsoft.com/office/drawing/2014/main" id="{78A3EF22-F5A3-1E8C-D452-15899A9FB2F7}"/>
+                <a16:creationId xmlns:a16="http://schemas.microsoft.com/office/drawing/2014/main" id="{0276F765-89CB-F4E6-E032-CAF8D0DF79C1}"/>
               </a:ext>
             </a:extLst>
           </p:cNvPr>
@@ -2426,7 +2426,7 @@
           <p:cNvPr id="16" name="source">
             <a:extLst>
               <a:ext uri="{FF2B5EF4-FFF2-40B4-BE49-F238E27FC236}">
-                <a16:creationId xmlns:a16="http://schemas.microsoft.com/office/drawing/2014/main" id="{65814A60-8038-6C73-7035-20221B798992}"/>
+                <a16:creationId xmlns:a16="http://schemas.microsoft.com/office/drawing/2014/main" id="{5609EFC3-76E3-F8EF-0569-3A4AA77D294A}"/>
               </a:ext>
             </a:extLst>
           </p:cNvPr>
@@ -2481,7 +2481,7 @@
     </p:spTree>
     <p:extLst>
       <p:ext uri="{BB962C8B-B14F-4D97-AF65-F5344CB8AC3E}">
-        <p14:creationId xmlns:p14="http://schemas.microsoft.com/office/powerpoint/2010/main" val="3356348033"/>
+        <p14:creationId xmlns:p14="http://schemas.microsoft.com/office/powerpoint/2010/main" val="408154106"/>
       </p:ext>
     </p:extLst>
   </p:cSld>
@@ -2513,7 +2513,7 @@
           <p:cNvPr id="7" name="creative_background">
             <a:extLst>
               <a:ext uri="{FF2B5EF4-FFF2-40B4-BE49-F238E27FC236}">
-                <a16:creationId xmlns:a16="http://schemas.microsoft.com/office/drawing/2014/main" id="{84DA3C93-2C47-1160-4A5B-603F609F8C1C}"/>
+                <a16:creationId xmlns:a16="http://schemas.microsoft.com/office/drawing/2014/main" id="{92A09F64-F1B4-0E52-7848-1E6B32D29279}"/>
               </a:ext>
             </a:extLst>
           </p:cNvPr>
@@ -2586,7 +2586,7 @@
           <a:bodyPr/>
           <a:lstStyle/>
           <a:p>
-            <a:fld id="{F38275E8-7EFC-4FEA-BF4C-11F280B3D894}" type="datetimeFigureOut">
+            <a:fld id="{C5143365-16B3-4FD5-8BF7-F05E2AA1930B}" type="datetimeFigureOut">
               <a:rPr lang="en-US" smtClean="0"/>
               <a:t>10/3/2026</a:t>
             </a:fld>
@@ -2628,7 +2628,7 @@
           <a:bodyPr/>
           <a:lstStyle/>
           <a:p>
-            <a:fld id="{460DAC5E-8076-4A1F-9E2B-43FC1CE1F208}" type="slidenum">
+            <a:fld id="{4562F234-49D9-48C6-80E0-9B9318BCC5E8}" type="slidenum">
               <a:rPr lang="en-US" smtClean="0"/>
               <a:t>‹#›</a:t>
             </a:fld>
@@ -2641,7 +2641,7 @@
           <p:cNvPr id="8" name="body">
             <a:extLst>
               <a:ext uri="{FF2B5EF4-FFF2-40B4-BE49-F238E27FC236}">
-                <a16:creationId xmlns:a16="http://schemas.microsoft.com/office/drawing/2014/main" id="{7C36D13A-E4A9-CDE2-D3AB-1D912B3E5470}"/>
+                <a16:creationId xmlns:a16="http://schemas.microsoft.com/office/drawing/2014/main" id="{549CFA0D-C07B-42AC-D534-755869BE192E}"/>
               </a:ext>
             </a:extLst>
           </p:cNvPr>
@@ -2681,7 +2681,7 @@
           <p:cNvPr id="9" name="kpi_value_1">
             <a:extLst>
               <a:ext uri="{FF2B5EF4-FFF2-40B4-BE49-F238E27FC236}">
-                <a16:creationId xmlns:a16="http://schemas.microsoft.com/office/drawing/2014/main" id="{2707D7CF-28B5-CD43-13E0-49C920708E1B}"/>
+                <a16:creationId xmlns:a16="http://schemas.microsoft.com/office/drawing/2014/main" id="{99766374-7187-0BF7-E62D-F78AC4EC6A4F}"/>
               </a:ext>
             </a:extLst>
           </p:cNvPr>
@@ -2734,7 +2734,7 @@
           <p:cNvPr id="10" name="kpi_label_1">
             <a:extLst>
               <a:ext uri="{FF2B5EF4-FFF2-40B4-BE49-F238E27FC236}">
-                <a16:creationId xmlns:a16="http://schemas.microsoft.com/office/drawing/2014/main" id="{8DB9E11B-A700-8B81-951D-EEF3A945BF97}"/>
+                <a16:creationId xmlns:a16="http://schemas.microsoft.com/office/drawing/2014/main" id="{77CEEFBB-16EE-B5BE-4136-1A185EB6679D}"/>
               </a:ext>
             </a:extLst>
           </p:cNvPr>
@@ -2782,7 +2782,7 @@
           <p:cNvPr id="11" name="source">
             <a:extLst>
               <a:ext uri="{FF2B5EF4-FFF2-40B4-BE49-F238E27FC236}">
-                <a16:creationId xmlns:a16="http://schemas.microsoft.com/office/drawing/2014/main" id="{A150A275-B5C5-C3D0-7CC8-814E4237C553}"/>
+                <a16:creationId xmlns:a16="http://schemas.microsoft.com/office/drawing/2014/main" id="{EE1E90FE-3FB5-07E4-5654-16E7B9500354}"/>
               </a:ext>
             </a:extLst>
           </p:cNvPr>
@@ -2837,7 +2837,7 @@
     </p:spTree>
     <p:extLst>
       <p:ext uri="{BB962C8B-B14F-4D97-AF65-F5344CB8AC3E}">
-        <p14:creationId xmlns:p14="http://schemas.microsoft.com/office/powerpoint/2010/main" val="1093252496"/>
+        <p14:creationId xmlns:p14="http://schemas.microsoft.com/office/powerpoint/2010/main" val="3851165464"/>
       </p:ext>
     </p:extLst>
   </p:cSld>
@@ -2869,7 +2869,7 @@
           <p:cNvPr id="7" name="creative_background">
             <a:extLst>
               <a:ext uri="{FF2B5EF4-FFF2-40B4-BE49-F238E27FC236}">
-                <a16:creationId xmlns:a16="http://schemas.microsoft.com/office/drawing/2014/main" id="{D7FF310A-1964-89F6-3A5A-4B1B32F43259}"/>
+                <a16:creationId xmlns:a16="http://schemas.microsoft.com/office/drawing/2014/main" id="{08139BB6-80F5-A757-EE77-BF04DD859DF6}"/>
               </a:ext>
             </a:extLst>
           </p:cNvPr>
@@ -2942,7 +2942,7 @@
           <a:bodyPr/>
           <a:lstStyle/>
           <a:p>
-            <a:fld id="{F38275E8-7EFC-4FEA-BF4C-11F280B3D894}" type="datetimeFigureOut">
+            <a:fld id="{C5143365-16B3-4FD5-8BF7-F05E2AA1930B}" type="datetimeFigureOut">
               <a:rPr lang="en-US" smtClean="0"/>
               <a:t>10/3/2026</a:t>
             </a:fld>
@@ -2984,7 +2984,7 @@
           <a:bodyPr/>
           <a:lstStyle/>
           <a:p>
-            <a:fld id="{460DAC5E-8076-4A1F-9E2B-43FC1CE1F208}" type="slidenum">
+            <a:fld id="{4562F234-49D9-48C6-80E0-9B9318BCC5E8}" type="slidenum">
               <a:rPr lang="en-US" smtClean="0"/>
               <a:t>‹#›</a:t>
             </a:fld>
@@ -2997,7 +2997,7 @@
           <p:cNvPr id="8" name="body">
             <a:extLst>
               <a:ext uri="{FF2B5EF4-FFF2-40B4-BE49-F238E27FC236}">
-                <a16:creationId xmlns:a16="http://schemas.microsoft.com/office/drawing/2014/main" id="{E1C506D2-1A23-EFE5-F485-D173DED5D055}"/>
+                <a16:creationId xmlns:a16="http://schemas.microsoft.com/office/drawing/2014/main" id="{8D1BA039-3752-C15C-1720-99132A1DBF62}"/>
               </a:ext>
             </a:extLst>
           </p:cNvPr>
@@ -3037,7 +3037,7 @@
           <p:cNvPr id="9" name="kpi_value_1">
             <a:extLst>
               <a:ext uri="{FF2B5EF4-FFF2-40B4-BE49-F238E27FC236}">
-                <a16:creationId xmlns:a16="http://schemas.microsoft.com/office/drawing/2014/main" id="{94B292F5-297F-738A-F84C-CA965C394AEF}"/>
+                <a16:creationId xmlns:a16="http://schemas.microsoft.com/office/drawing/2014/main" id="{57174851-F28A-C212-7459-BEBC974F703D}"/>
               </a:ext>
             </a:extLst>
           </p:cNvPr>
@@ -3090,7 +3090,7 @@
           <p:cNvPr id="10" name="kpi_label_1">
             <a:extLst>
               <a:ext uri="{FF2B5EF4-FFF2-40B4-BE49-F238E27FC236}">
-                <a16:creationId xmlns:a16="http://schemas.microsoft.com/office/drawing/2014/main" id="{8AA3AC53-518E-C3A5-CC67-355876319067}"/>
+                <a16:creationId xmlns:a16="http://schemas.microsoft.com/office/drawing/2014/main" id="{1D1D4EB1-0C04-B639-AC0A-67C5621CE257}"/>
               </a:ext>
             </a:extLst>
           </p:cNvPr>
@@ -3138,7 +3138,7 @@
           <p:cNvPr id="11" name="kpi_value_2">
             <a:extLst>
               <a:ext uri="{FF2B5EF4-FFF2-40B4-BE49-F238E27FC236}">
-                <a16:creationId xmlns:a16="http://schemas.microsoft.com/office/drawing/2014/main" id="{7737C28D-1142-E5E0-E5F2-2EACF57D3171}"/>
+                <a16:creationId xmlns:a16="http://schemas.microsoft.com/office/drawing/2014/main" id="{19837291-BAB1-5E28-6FEE-333E475049AC}"/>
               </a:ext>
             </a:extLst>
           </p:cNvPr>
@@ -3191,7 +3191,7 @@
           <p:cNvPr id="12" name="kpi_label_2">
             <a:extLst>
               <a:ext uri="{FF2B5EF4-FFF2-40B4-BE49-F238E27FC236}">
-                <a16:creationId xmlns:a16="http://schemas.microsoft.com/office/drawing/2014/main" id="{BD84DE5F-0514-1321-F9C8-57C929A78E4B}"/>
+                <a16:creationId xmlns:a16="http://schemas.microsoft.com/office/drawing/2014/main" id="{15C7F4A1-18FC-A502-E9ED-3C47E766B9DC}"/>
               </a:ext>
             </a:extLst>
           </p:cNvPr>
@@ -3239,7 +3239,7 @@
           <p:cNvPr id="13" name="kpi_value_3">
             <a:extLst>
               <a:ext uri="{FF2B5EF4-FFF2-40B4-BE49-F238E27FC236}">
-                <a16:creationId xmlns:a16="http://schemas.microsoft.com/office/drawing/2014/main" id="{DB9AA328-E347-5855-8FAB-56FDD4B16569}"/>
+                <a16:creationId xmlns:a16="http://schemas.microsoft.com/office/drawing/2014/main" id="{0BEEA4A7-08CB-5582-855A-525379231F97}"/>
               </a:ext>
             </a:extLst>
           </p:cNvPr>
@@ -3292,7 +3292,7 @@
           <p:cNvPr id="14" name="kpi_label_3">
             <a:extLst>
               <a:ext uri="{FF2B5EF4-FFF2-40B4-BE49-F238E27FC236}">
-                <a16:creationId xmlns:a16="http://schemas.microsoft.com/office/drawing/2014/main" id="{D6F0785D-2CA5-1E27-256E-F74BDABF4EAB}"/>
+                <a16:creationId xmlns:a16="http://schemas.microsoft.com/office/drawing/2014/main" id="{AD48B2F9-0FAE-B6CD-99F9-D3D88BFAC395}"/>
               </a:ext>
             </a:extLst>
           </p:cNvPr>
@@ -3340,7 +3340,7 @@
           <p:cNvPr id="15" name="kpi_value_4">
             <a:extLst>
               <a:ext uri="{FF2B5EF4-FFF2-40B4-BE49-F238E27FC236}">
-                <a16:creationId xmlns:a16="http://schemas.microsoft.com/office/drawing/2014/main" id="{BCF90D3B-AAD6-29D7-B700-AB2C72E6446B}"/>
+                <a16:creationId xmlns:a16="http://schemas.microsoft.com/office/drawing/2014/main" id="{F0EDC857-14ED-42E6-7AF5-155032C99899}"/>
               </a:ext>
             </a:extLst>
           </p:cNvPr>
@@ -3393,7 +3393,7 @@
           <p:cNvPr id="16" name="kpi_label_4">
             <a:extLst>
               <a:ext uri="{FF2B5EF4-FFF2-40B4-BE49-F238E27FC236}">
-                <a16:creationId xmlns:a16="http://schemas.microsoft.com/office/drawing/2014/main" id="{DD7E490B-FD71-43D9-5632-B9C402D59402}"/>
+                <a16:creationId xmlns:a16="http://schemas.microsoft.com/office/drawing/2014/main" id="{E2FC8525-941F-87B4-533F-DDF409A7F581}"/>
               </a:ext>
             </a:extLst>
           </p:cNvPr>
@@ -3441,7 +3441,7 @@
           <p:cNvPr id="17" name="source">
             <a:extLst>
               <a:ext uri="{FF2B5EF4-FFF2-40B4-BE49-F238E27FC236}">
-                <a16:creationId xmlns:a16="http://schemas.microsoft.com/office/drawing/2014/main" id="{4DE3183F-1E38-6AAA-0DC4-D37D6D10B7DA}"/>
+                <a16:creationId xmlns:a16="http://schemas.microsoft.com/office/drawing/2014/main" id="{3E7390DA-2A5D-5C6F-A65E-9AD35420EE8A}"/>
               </a:ext>
             </a:extLst>
           </p:cNvPr>
@@ -3496,7 +3496,7 @@
     </p:spTree>
     <p:extLst>
       <p:ext uri="{BB962C8B-B14F-4D97-AF65-F5344CB8AC3E}">
-        <p14:creationId xmlns:p14="http://schemas.microsoft.com/office/powerpoint/2010/main" val="2620248651"/>
+        <p14:creationId xmlns:p14="http://schemas.microsoft.com/office/powerpoint/2010/main" val="1111276497"/>
       </p:ext>
     </p:extLst>
   </p:cSld>
@@ -3528,7 +3528,7 @@
           <p:cNvPr id="7" name="creative_background">
             <a:extLst>
               <a:ext uri="{FF2B5EF4-FFF2-40B4-BE49-F238E27FC236}">
-                <a16:creationId xmlns:a16="http://schemas.microsoft.com/office/drawing/2014/main" id="{8409A093-25B5-45DF-AD21-0E33850234A0}"/>
+                <a16:creationId xmlns:a16="http://schemas.microsoft.com/office/drawing/2014/main" id="{E479CD58-F7F4-9A4D-C23E-15AC80DE38A5}"/>
               </a:ext>
             </a:extLst>
           </p:cNvPr>
@@ -3601,7 +3601,7 @@
           <a:bodyPr/>
           <a:lstStyle/>
           <a:p>
-            <a:fld id="{F38275E8-7EFC-4FEA-BF4C-11F280B3D894}" type="datetimeFigureOut">
+            <a:fld id="{C5143365-16B3-4FD5-8BF7-F05E2AA1930B}" type="datetimeFigureOut">
               <a:rPr lang="en-US" smtClean="0"/>
               <a:t>10/3/2026</a:t>
             </a:fld>
@@ -3643,7 +3643,7 @@
           <a:bodyPr/>
           <a:lstStyle/>
           <a:p>
-            <a:fld id="{460DAC5E-8076-4A1F-9E2B-43FC1CE1F208}" type="slidenum">
+            <a:fld id="{4562F234-49D9-48C6-80E0-9B9318BCC5E8}" type="slidenum">
               <a:rPr lang="en-US" smtClean="0"/>
               <a:t>‹#›</a:t>
             </a:fld>
@@ -3656,7 +3656,7 @@
           <p:cNvPr id="8" name="body">
             <a:extLst>
               <a:ext uri="{FF2B5EF4-FFF2-40B4-BE49-F238E27FC236}">
-                <a16:creationId xmlns:a16="http://schemas.microsoft.com/office/drawing/2014/main" id="{794C433E-7E1A-3ED1-90AA-6ED70D8CA5D1}"/>
+                <a16:creationId xmlns:a16="http://schemas.microsoft.com/office/drawing/2014/main" id="{1F78B3DE-160F-9F37-306C-269AAF1D91B5}"/>
               </a:ext>
             </a:extLst>
           </p:cNvPr>
@@ -3696,7 +3696,7 @@
           <p:cNvPr id="9" name="kpi_value_1">
             <a:extLst>
               <a:ext uri="{FF2B5EF4-FFF2-40B4-BE49-F238E27FC236}">
-                <a16:creationId xmlns:a16="http://schemas.microsoft.com/office/drawing/2014/main" id="{A1F725A2-9C12-0D35-F9AA-A7741D9F68E5}"/>
+                <a16:creationId xmlns:a16="http://schemas.microsoft.com/office/drawing/2014/main" id="{6DB6D244-22E2-5EEE-149B-40F08B456373}"/>
               </a:ext>
             </a:extLst>
           </p:cNvPr>
@@ -3749,7 +3749,7 @@
           <p:cNvPr id="10" name="kpi_label_1">
             <a:extLst>
               <a:ext uri="{FF2B5EF4-FFF2-40B4-BE49-F238E27FC236}">
-                <a16:creationId xmlns:a16="http://schemas.microsoft.com/office/drawing/2014/main" id="{9E411241-5A03-8597-C90F-ECD96510B290}"/>
+                <a16:creationId xmlns:a16="http://schemas.microsoft.com/office/drawing/2014/main" id="{121DDE14-9FE6-1EDB-62E6-9FDD5A0DE9E9}"/>
               </a:ext>
             </a:extLst>
           </p:cNvPr>
@@ -3797,7 +3797,7 @@
           <p:cNvPr id="11" name="kpi_value_2">
             <a:extLst>
               <a:ext uri="{FF2B5EF4-FFF2-40B4-BE49-F238E27FC236}">
-                <a16:creationId xmlns:a16="http://schemas.microsoft.com/office/drawing/2014/main" id="{1DA630E1-1666-1557-B061-616789A4D4E8}"/>
+                <a16:creationId xmlns:a16="http://schemas.microsoft.com/office/drawing/2014/main" id="{ACFBABE5-929A-30E7-3E42-D04FA04634B7}"/>
               </a:ext>
             </a:extLst>
           </p:cNvPr>
@@ -3850,7 +3850,7 @@
           <p:cNvPr id="12" name="kpi_label_2">
             <a:extLst>
               <a:ext uri="{FF2B5EF4-FFF2-40B4-BE49-F238E27FC236}">
-                <a16:creationId xmlns:a16="http://schemas.microsoft.com/office/drawing/2014/main" id="{EA6B0DB0-2406-FA4E-0872-A8252174915F}"/>
+                <a16:creationId xmlns:a16="http://schemas.microsoft.com/office/drawing/2014/main" id="{97E0E250-F6F6-CD13-278A-5AB6070AF3A5}"/>
               </a:ext>
             </a:extLst>
           </p:cNvPr>
@@ -3898,7 +3898,7 @@
           <p:cNvPr id="13" name="source">
             <a:extLst>
               <a:ext uri="{FF2B5EF4-FFF2-40B4-BE49-F238E27FC236}">
-                <a16:creationId xmlns:a16="http://schemas.microsoft.com/office/drawing/2014/main" id="{709F5F88-4D98-3279-371C-CA6C94AC36E6}"/>
+                <a16:creationId xmlns:a16="http://schemas.microsoft.com/office/drawing/2014/main" id="{0D7E8303-FDE9-634D-41A5-4B38114E355C}"/>
               </a:ext>
             </a:extLst>
           </p:cNvPr>
@@ -3953,7 +3953,7 @@
     </p:spTree>
     <p:extLst>
       <p:ext uri="{BB962C8B-B14F-4D97-AF65-F5344CB8AC3E}">
-        <p14:creationId xmlns:p14="http://schemas.microsoft.com/office/powerpoint/2010/main" val="547467850"/>
+        <p14:creationId xmlns:p14="http://schemas.microsoft.com/office/powerpoint/2010/main" val="22636889"/>
       </p:ext>
     </p:extLst>
   </p:cSld>
@@ -3985,7 +3985,7 @@
           <p:cNvPr id="7" name="creative_background">
             <a:extLst>
               <a:ext uri="{FF2B5EF4-FFF2-40B4-BE49-F238E27FC236}">
-                <a16:creationId xmlns:a16="http://schemas.microsoft.com/office/drawing/2014/main" id="{42AB0EBD-D31D-1B2A-3D21-684AE9E79A82}"/>
+                <a16:creationId xmlns:a16="http://schemas.microsoft.com/office/drawing/2014/main" id="{D8E37D70-2093-5CC2-EBDF-E31DEA2A3067}"/>
               </a:ext>
             </a:extLst>
           </p:cNvPr>
@@ -4058,7 +4058,7 @@
           <a:bodyPr/>
           <a:lstStyle/>
           <a:p>
-            <a:fld id="{F38275E8-7EFC-4FEA-BF4C-11F280B3D894}" type="datetimeFigureOut">
+            <a:fld id="{C5143365-16B3-4FD5-8BF7-F05E2AA1930B}" type="datetimeFigureOut">
               <a:rPr lang="en-US" smtClean="0"/>
               <a:t>10/3/2026</a:t>
             </a:fld>
@@ -4100,7 +4100,7 @@
           <a:bodyPr/>
           <a:lstStyle/>
           <a:p>
-            <a:fld id="{460DAC5E-8076-4A1F-9E2B-43FC1CE1F208}" type="slidenum">
+            <a:fld id="{4562F234-49D9-48C6-80E0-9B9318BCC5E8}" type="slidenum">
               <a:rPr lang="en-US" smtClean="0"/>
               <a:t>‹#›</a:t>
             </a:fld>
@@ -4113,7 +4113,7 @@
           <p:cNvPr id="8" name="body">
             <a:extLst>
               <a:ext uri="{FF2B5EF4-FFF2-40B4-BE49-F238E27FC236}">
-                <a16:creationId xmlns:a16="http://schemas.microsoft.com/office/drawing/2014/main" id="{6F21F54D-2875-186F-F1FC-8EA45102C50B}"/>
+                <a16:creationId xmlns:a16="http://schemas.microsoft.com/office/drawing/2014/main" id="{66D5BEDE-CC56-80CE-61F5-6D04467D2264}"/>
               </a:ext>
             </a:extLst>
           </p:cNvPr>
@@ -4153,7 +4153,7 @@
           <p:cNvPr id="9" name="kpi_value_1">
             <a:extLst>
               <a:ext uri="{FF2B5EF4-FFF2-40B4-BE49-F238E27FC236}">
-                <a16:creationId xmlns:a16="http://schemas.microsoft.com/office/drawing/2014/main" id="{2782102A-54E5-CA51-B264-E227EF15BEC2}"/>
+                <a16:creationId xmlns:a16="http://schemas.microsoft.com/office/drawing/2014/main" id="{9AB09239-8527-6D1A-44D4-CDF472F2A555}"/>
               </a:ext>
             </a:extLst>
           </p:cNvPr>
@@ -4206,7 +4206,7 @@
           <p:cNvPr id="10" name="kpi_label_1">
             <a:extLst>
               <a:ext uri="{FF2B5EF4-FFF2-40B4-BE49-F238E27FC236}">
-                <a16:creationId xmlns:a16="http://schemas.microsoft.com/office/drawing/2014/main" id="{1E1DE9BC-D698-3966-AD33-2D410280E603}"/>
+                <a16:creationId xmlns:a16="http://schemas.microsoft.com/office/drawing/2014/main" id="{5105F842-7BE2-9C2F-777C-35F70AE80ABA}"/>
               </a:ext>
             </a:extLst>
           </p:cNvPr>
@@ -4254,7 +4254,7 @@
           <p:cNvPr id="11" name="kpi_value_2">
             <a:extLst>
               <a:ext uri="{FF2B5EF4-FFF2-40B4-BE49-F238E27FC236}">
-                <a16:creationId xmlns:a16="http://schemas.microsoft.com/office/drawing/2014/main" id="{C270A58C-D34E-9FAC-C311-ED8678F959FE}"/>
+                <a16:creationId xmlns:a16="http://schemas.microsoft.com/office/drawing/2014/main" id="{07471D8A-7218-B085-F34B-59854FB8203B}"/>
               </a:ext>
             </a:extLst>
           </p:cNvPr>
@@ -4307,7 +4307,7 @@
           <p:cNvPr id="12" name="kpi_label_2">
             <a:extLst>
               <a:ext uri="{FF2B5EF4-FFF2-40B4-BE49-F238E27FC236}">
-                <a16:creationId xmlns:a16="http://schemas.microsoft.com/office/drawing/2014/main" id="{567E55F5-1588-4DCE-0E08-9772A330F172}"/>
+                <a16:creationId xmlns:a16="http://schemas.microsoft.com/office/drawing/2014/main" id="{7064AC60-8D81-5215-CEB2-AE7A834ABB2A}"/>
               </a:ext>
             </a:extLst>
           </p:cNvPr>
@@ -4355,7 +4355,7 @@
           <p:cNvPr id="13" name="kpi_value_3">
             <a:extLst>
               <a:ext uri="{FF2B5EF4-FFF2-40B4-BE49-F238E27FC236}">
-                <a16:creationId xmlns:a16="http://schemas.microsoft.com/office/drawing/2014/main" id="{927F340F-EE92-5F15-A458-483597D3BFA7}"/>
+                <a16:creationId xmlns:a16="http://schemas.microsoft.com/office/drawing/2014/main" id="{03AC1CFB-29D3-D8B4-6413-40C52461425F}"/>
               </a:ext>
             </a:extLst>
           </p:cNvPr>
@@ -4408,7 +4408,7 @@
           <p:cNvPr id="14" name="kpi_label_3">
             <a:extLst>
               <a:ext uri="{FF2B5EF4-FFF2-40B4-BE49-F238E27FC236}">
-                <a16:creationId xmlns:a16="http://schemas.microsoft.com/office/drawing/2014/main" id="{52B47E9C-934E-664C-C7C1-F5E64D3257F9}"/>
+                <a16:creationId xmlns:a16="http://schemas.microsoft.com/office/drawing/2014/main" id="{06CF670C-4F02-1CE5-88EF-7B71A0CF4721}"/>
               </a:ext>
             </a:extLst>
           </p:cNvPr>
@@ -4456,7 +4456,7 @@
           <p:cNvPr id="15" name="kpi_value_4">
             <a:extLst>
               <a:ext uri="{FF2B5EF4-FFF2-40B4-BE49-F238E27FC236}">
-                <a16:creationId xmlns:a16="http://schemas.microsoft.com/office/drawing/2014/main" id="{27A6F7FE-2A4B-8F10-D538-DE427B52A3F3}"/>
+                <a16:creationId xmlns:a16="http://schemas.microsoft.com/office/drawing/2014/main" id="{00ECE3A8-05CD-A4A7-7CB7-0DF84B28EA7A}"/>
               </a:ext>
             </a:extLst>
           </p:cNvPr>
@@ -4509,7 +4509,7 @@
           <p:cNvPr id="16" name="kpi_label_4">
             <a:extLst>
               <a:ext uri="{FF2B5EF4-FFF2-40B4-BE49-F238E27FC236}">
-                <a16:creationId xmlns:a16="http://schemas.microsoft.com/office/drawing/2014/main" id="{4D2B115D-87AC-7E86-D5F8-1CC02041CB79}"/>
+                <a16:creationId xmlns:a16="http://schemas.microsoft.com/office/drawing/2014/main" id="{26704887-A677-D37A-5660-C85224E9C2C2}"/>
               </a:ext>
             </a:extLst>
           </p:cNvPr>
@@ -4557,7 +4557,7 @@
           <p:cNvPr id="17" name="source">
             <a:extLst>
               <a:ext uri="{FF2B5EF4-FFF2-40B4-BE49-F238E27FC236}">
-                <a16:creationId xmlns:a16="http://schemas.microsoft.com/office/drawing/2014/main" id="{ADC8F196-90B9-90CB-5BB1-F1D9E59BF118}"/>
+                <a16:creationId xmlns:a16="http://schemas.microsoft.com/office/drawing/2014/main" id="{ECB2B68F-EE0A-8E53-14CC-DC0145F8A9EB}"/>
               </a:ext>
             </a:extLst>
           </p:cNvPr>
@@ -4612,7 +4612,7 @@
     </p:spTree>
     <p:extLst>
       <p:ext uri="{BB962C8B-B14F-4D97-AF65-F5344CB8AC3E}">
-        <p14:creationId xmlns:p14="http://schemas.microsoft.com/office/powerpoint/2010/main" val="247108642"/>
+        <p14:creationId xmlns:p14="http://schemas.microsoft.com/office/powerpoint/2010/main" val="4167156694"/>
       </p:ext>
     </p:extLst>
   </p:cSld>
@@ -4644,7 +4644,7 @@
           <p:cNvPr id="7" name="creative_background">
             <a:extLst>
               <a:ext uri="{FF2B5EF4-FFF2-40B4-BE49-F238E27FC236}">
-                <a16:creationId xmlns:a16="http://schemas.microsoft.com/office/drawing/2014/main" id="{70B02FD6-A1F9-1D82-CB93-54699D06F573}"/>
+                <a16:creationId xmlns:a16="http://schemas.microsoft.com/office/drawing/2014/main" id="{FE7735DB-8060-F36B-57B7-1B98ADA4687F}"/>
               </a:ext>
             </a:extLst>
           </p:cNvPr>
@@ -4717,7 +4717,7 @@
           <a:bodyPr/>
           <a:lstStyle/>
           <a:p>
-            <a:fld id="{F38275E8-7EFC-4FEA-BF4C-11F280B3D894}" type="datetimeFigureOut">
+            <a:fld id="{C5143365-16B3-4FD5-8BF7-F05E2AA1930B}" type="datetimeFigureOut">
               <a:rPr lang="en-US" smtClean="0"/>
               <a:t>10/3/2026</a:t>
             </a:fld>
@@ -4759,7 +4759,7 @@
           <a:bodyPr/>
           <a:lstStyle/>
           <a:p>
-            <a:fld id="{460DAC5E-8076-4A1F-9E2B-43FC1CE1F208}" type="slidenum">
+            <a:fld id="{4562F234-49D9-48C6-80E0-9B9318BCC5E8}" type="slidenum">
               <a:rPr lang="en-US" smtClean="0"/>
               <a:t>‹#›</a:t>
             </a:fld>
@@ -4772,7 +4772,7 @@
           <p:cNvPr id="8" name="item_1_title">
             <a:extLst>
               <a:ext uri="{FF2B5EF4-FFF2-40B4-BE49-F238E27FC236}">
-                <a16:creationId xmlns:a16="http://schemas.microsoft.com/office/drawing/2014/main" id="{55F0DA74-E330-B8BE-4359-01DA2894DE08}"/>
+                <a16:creationId xmlns:a16="http://schemas.microsoft.com/office/drawing/2014/main" id="{C1FF28AA-0A0B-2BCC-41F8-EF061BC35C34}"/>
               </a:ext>
             </a:extLst>
           </p:cNvPr>
@@ -4822,7 +4822,7 @@
           <p:cNvPr id="9" name="item_1">
             <a:extLst>
               <a:ext uri="{FF2B5EF4-FFF2-40B4-BE49-F238E27FC236}">
-                <a16:creationId xmlns:a16="http://schemas.microsoft.com/office/drawing/2014/main" id="{7767136B-B9CA-F894-1F21-4C47BF14492D}"/>
+                <a16:creationId xmlns:a16="http://schemas.microsoft.com/office/drawing/2014/main" id="{2E0F4FBB-8337-C603-E257-4044F02F45D3}"/>
               </a:ext>
             </a:extLst>
           </p:cNvPr>
@@ -4870,7 +4870,7 @@
           <p:cNvPr id="10" name="item_2_title">
             <a:extLst>
               <a:ext uri="{FF2B5EF4-FFF2-40B4-BE49-F238E27FC236}">
-                <a16:creationId xmlns:a16="http://schemas.microsoft.com/office/drawing/2014/main" id="{424558A9-9655-77A0-F627-8955190EDB1A}"/>
+                <a16:creationId xmlns:a16="http://schemas.microsoft.com/office/drawing/2014/main" id="{647F38A2-6657-6068-DC0D-19D482DFA784}"/>
               </a:ext>
             </a:extLst>
           </p:cNvPr>
@@ -4923,7 +4923,7 @@
           <p:cNvPr id="11" name="item_2">
             <a:extLst>
               <a:ext uri="{FF2B5EF4-FFF2-40B4-BE49-F238E27FC236}">
-                <a16:creationId xmlns:a16="http://schemas.microsoft.com/office/drawing/2014/main" id="{C10E960C-0BD7-074C-B4F8-0AB9AA9A1510}"/>
+                <a16:creationId xmlns:a16="http://schemas.microsoft.com/office/drawing/2014/main" id="{E4D2B2C0-EF97-1A77-0ECD-7DCD317FF9A9}"/>
               </a:ext>
             </a:extLst>
           </p:cNvPr>
@@ -4971,7 +4971,7 @@
           <p:cNvPr id="12" name="item_3_title">
             <a:extLst>
               <a:ext uri="{FF2B5EF4-FFF2-40B4-BE49-F238E27FC236}">
-                <a16:creationId xmlns:a16="http://schemas.microsoft.com/office/drawing/2014/main" id="{09044382-316B-1103-2B1E-D079BE416A50}"/>
+                <a16:creationId xmlns:a16="http://schemas.microsoft.com/office/drawing/2014/main" id="{AF86D072-3479-52A8-C0B5-3198928D43EE}"/>
               </a:ext>
             </a:extLst>
           </p:cNvPr>
@@ -5024,7 +5024,7 @@
           <p:cNvPr id="13" name="item_3">
             <a:extLst>
               <a:ext uri="{FF2B5EF4-FFF2-40B4-BE49-F238E27FC236}">
-                <a16:creationId xmlns:a16="http://schemas.microsoft.com/office/drawing/2014/main" id="{C78539D9-10CF-B8E1-072C-4DE2A1CD92C5}"/>
+                <a16:creationId xmlns:a16="http://schemas.microsoft.com/office/drawing/2014/main" id="{9ADCCECD-E032-7BD9-4C15-0EE658B85214}"/>
               </a:ext>
             </a:extLst>
           </p:cNvPr>
@@ -5072,7 +5072,7 @@
           <p:cNvPr id="14" name="item_4_title">
             <a:extLst>
               <a:ext uri="{FF2B5EF4-FFF2-40B4-BE49-F238E27FC236}">
-                <a16:creationId xmlns:a16="http://schemas.microsoft.com/office/drawing/2014/main" id="{DBA1919F-3528-98F9-D63B-5F64A56FC65C}"/>
+                <a16:creationId xmlns:a16="http://schemas.microsoft.com/office/drawing/2014/main" id="{0BA8C721-39B2-CAF4-E9CB-F216471C4427}"/>
               </a:ext>
             </a:extLst>
           </p:cNvPr>
@@ -5125,7 +5125,7 @@
           <p:cNvPr id="15" name="item_4">
             <a:extLst>
               <a:ext uri="{FF2B5EF4-FFF2-40B4-BE49-F238E27FC236}">
-                <a16:creationId xmlns:a16="http://schemas.microsoft.com/office/drawing/2014/main" id="{B822B3E4-6127-EE57-F948-383BCC6DAE66}"/>
+                <a16:creationId xmlns:a16="http://schemas.microsoft.com/office/drawing/2014/main" id="{ACF1CCFE-6C4E-FDA3-B235-E8F0862ADEA1}"/>
               </a:ext>
             </a:extLst>
           </p:cNvPr>
@@ -5173,7 +5173,7 @@
           <p:cNvPr id="16" name="source">
             <a:extLst>
               <a:ext uri="{FF2B5EF4-FFF2-40B4-BE49-F238E27FC236}">
-                <a16:creationId xmlns:a16="http://schemas.microsoft.com/office/drawing/2014/main" id="{818692E9-DD54-EAA6-5018-2EF9F2C30FE9}"/>
+                <a16:creationId xmlns:a16="http://schemas.microsoft.com/office/drawing/2014/main" id="{2BEC5BE9-3BC5-BB79-943F-6316DDC16045}"/>
               </a:ext>
             </a:extLst>
           </p:cNvPr>
@@ -5228,7 +5228,7 @@
     </p:spTree>
     <p:extLst>
       <p:ext uri="{BB962C8B-B14F-4D97-AF65-F5344CB8AC3E}">
-        <p14:creationId xmlns:p14="http://schemas.microsoft.com/office/powerpoint/2010/main" val="4071359303"/>
+        <p14:creationId xmlns:p14="http://schemas.microsoft.com/office/powerpoint/2010/main" val="805088520"/>
       </p:ext>
     </p:extLst>
   </p:cSld>
@@ -5260,7 +5260,7 @@
           <p:cNvPr id="7" name="creative_background">
             <a:extLst>
               <a:ext uri="{FF2B5EF4-FFF2-40B4-BE49-F238E27FC236}">
-                <a16:creationId xmlns:a16="http://schemas.microsoft.com/office/drawing/2014/main" id="{CA60C5B9-9EA0-03B7-F5CB-279B44626D50}"/>
+                <a16:creationId xmlns:a16="http://schemas.microsoft.com/office/drawing/2014/main" id="{A9CC1909-CF02-DB55-6D23-A8E4BA30AA11}"/>
               </a:ext>
             </a:extLst>
           </p:cNvPr>
@@ -5333,7 +5333,7 @@
           <a:bodyPr/>
           <a:lstStyle/>
           <a:p>
-            <a:fld id="{F38275E8-7EFC-4FEA-BF4C-11F280B3D894}" type="datetimeFigureOut">
+            <a:fld id="{C5143365-16B3-4FD5-8BF7-F05E2AA1930B}" type="datetimeFigureOut">
               <a:rPr lang="en-US" smtClean="0"/>
               <a:t>10/3/2026</a:t>
             </a:fld>
@@ -5375,7 +5375,7 @@
           <a:bodyPr/>
           <a:lstStyle/>
           <a:p>
-            <a:fld id="{460DAC5E-8076-4A1F-9E2B-43FC1CE1F208}" type="slidenum">
+            <a:fld id="{4562F234-49D9-48C6-80E0-9B9318BCC5E8}" type="slidenum">
               <a:rPr lang="en-US" smtClean="0"/>
               <a:t>‹#›</a:t>
             </a:fld>
@@ -5388,7 +5388,7 @@
           <p:cNvPr id="8" name="marker_1">
             <a:extLst>
               <a:ext uri="{FF2B5EF4-FFF2-40B4-BE49-F238E27FC236}">
-                <a16:creationId xmlns:a16="http://schemas.microsoft.com/office/drawing/2014/main" id="{AD001E50-0E6E-988E-E8D5-9B76309CD975}"/>
+                <a16:creationId xmlns:a16="http://schemas.microsoft.com/office/drawing/2014/main" id="{2522AB7F-CC18-D660-B269-C87DC186268D}"/>
               </a:ext>
             </a:extLst>
           </p:cNvPr>
@@ -5444,7 +5444,7 @@
           <p:cNvPr id="9" name="item_1_title">
             <a:extLst>
               <a:ext uri="{FF2B5EF4-FFF2-40B4-BE49-F238E27FC236}">
-                <a16:creationId xmlns:a16="http://schemas.microsoft.com/office/drawing/2014/main" id="{00990E6E-66E4-C29E-13BF-080867B3B63D}"/>
+                <a16:creationId xmlns:a16="http://schemas.microsoft.com/office/drawing/2014/main" id="{2602CA2D-5F33-5854-AD01-25419066F1A1}"/>
               </a:ext>
             </a:extLst>
           </p:cNvPr>
@@ -5497,7 +5497,7 @@
           <p:cNvPr id="10" name="item_1">
             <a:extLst>
               <a:ext uri="{FF2B5EF4-FFF2-40B4-BE49-F238E27FC236}">
-                <a16:creationId xmlns:a16="http://schemas.microsoft.com/office/drawing/2014/main" id="{2CBBC90D-3F0A-A8E0-C979-86C00AFCDA08}"/>
+                <a16:creationId xmlns:a16="http://schemas.microsoft.com/office/drawing/2014/main" id="{D97E5A51-AE3F-C4F7-5A5F-994B26BBF9C1}"/>
               </a:ext>
             </a:extLst>
           </p:cNvPr>
@@ -5545,7 +5545,7 @@
           <p:cNvPr id="11" name="marker_2">
             <a:extLst>
               <a:ext uri="{FF2B5EF4-FFF2-40B4-BE49-F238E27FC236}">
-                <a16:creationId xmlns:a16="http://schemas.microsoft.com/office/drawing/2014/main" id="{8EF8D39D-238F-4F8D-F197-90AB741051A5}"/>
+                <a16:creationId xmlns:a16="http://schemas.microsoft.com/office/drawing/2014/main" id="{DE71D4A6-69AB-2083-88C5-B58567E03FAB}"/>
               </a:ext>
             </a:extLst>
           </p:cNvPr>
@@ -5601,7 +5601,7 @@
           <p:cNvPr id="12" name="item_2_title">
             <a:extLst>
               <a:ext uri="{FF2B5EF4-FFF2-40B4-BE49-F238E27FC236}">
-                <a16:creationId xmlns:a16="http://schemas.microsoft.com/office/drawing/2014/main" id="{EACE1352-DF49-2626-D5F4-ACFA1244A2DD}"/>
+                <a16:creationId xmlns:a16="http://schemas.microsoft.com/office/drawing/2014/main" id="{1BC21F53-9F73-3819-2208-B8D61AC32DDD}"/>
               </a:ext>
             </a:extLst>
           </p:cNvPr>
@@ -5654,7 +5654,7 @@
           <p:cNvPr id="13" name="item_2">
             <a:extLst>
               <a:ext uri="{FF2B5EF4-FFF2-40B4-BE49-F238E27FC236}">
-                <a16:creationId xmlns:a16="http://schemas.microsoft.com/office/drawing/2014/main" id="{9205D886-DD37-FBA8-23B0-E739A7050D78}"/>
+                <a16:creationId xmlns:a16="http://schemas.microsoft.com/office/drawing/2014/main" id="{356DD7D5-3734-9A81-7AA8-91D355C3F1D2}"/>
               </a:ext>
             </a:extLst>
           </p:cNvPr>
@@ -5702,7 +5702,7 @@
           <p:cNvPr id="14" name="source">
             <a:extLst>
               <a:ext uri="{FF2B5EF4-FFF2-40B4-BE49-F238E27FC236}">
-                <a16:creationId xmlns:a16="http://schemas.microsoft.com/office/drawing/2014/main" id="{701A103D-86F9-9E04-04ED-AAEC35330F26}"/>
+                <a16:creationId xmlns:a16="http://schemas.microsoft.com/office/drawing/2014/main" id="{26E561F1-9909-3792-BE51-639D24634C1A}"/>
               </a:ext>
             </a:extLst>
           </p:cNvPr>
@@ -5757,7 +5757,7 @@
     </p:spTree>
     <p:extLst>
       <p:ext uri="{BB962C8B-B14F-4D97-AF65-F5344CB8AC3E}">
-        <p14:creationId xmlns:p14="http://schemas.microsoft.com/office/powerpoint/2010/main" val="525513521"/>
+        <p14:creationId xmlns:p14="http://schemas.microsoft.com/office/powerpoint/2010/main" val="824451990"/>
       </p:ext>
     </p:extLst>
   </p:cSld>
@@ -5789,7 +5789,7 @@
           <p:cNvPr id="7" name="creative_background">
             <a:extLst>
               <a:ext uri="{FF2B5EF4-FFF2-40B4-BE49-F238E27FC236}">
-                <a16:creationId xmlns:a16="http://schemas.microsoft.com/office/drawing/2014/main" id="{B9A162A2-70C3-7436-0041-BB6308F751A9}"/>
+                <a16:creationId xmlns:a16="http://schemas.microsoft.com/office/drawing/2014/main" id="{877E1C72-4150-1B57-E44B-1413BE806169}"/>
               </a:ext>
             </a:extLst>
           </p:cNvPr>
@@ -5862,7 +5862,7 @@
           <a:bodyPr/>
           <a:lstStyle/>
           <a:p>
-            <a:fld id="{F38275E8-7EFC-4FEA-BF4C-11F280B3D894}" type="datetimeFigureOut">
+            <a:fld id="{C5143365-16B3-4FD5-8BF7-F05E2AA1930B}" type="datetimeFigureOut">
               <a:rPr lang="en-US" smtClean="0"/>
               <a:t>10/3/2026</a:t>
             </a:fld>
@@ -5904,7 +5904,7 @@
           <a:bodyPr/>
           <a:lstStyle/>
           <a:p>
-            <a:fld id="{460DAC5E-8076-4A1F-9E2B-43FC1CE1F208}" type="slidenum">
+            <a:fld id="{4562F234-49D9-48C6-80E0-9B9318BCC5E8}" type="slidenum">
               <a:rPr lang="en-US" smtClean="0"/>
               <a:t>‹#›</a:t>
             </a:fld>
@@ -5917,7 +5917,7 @@
           <p:cNvPr id="8" name="item_1_title">
             <a:extLst>
               <a:ext uri="{FF2B5EF4-FFF2-40B4-BE49-F238E27FC236}">
-                <a16:creationId xmlns:a16="http://schemas.microsoft.com/office/drawing/2014/main" id="{99213753-2CD9-8828-D1FA-C44F1B2D26C6}"/>
+                <a16:creationId xmlns:a16="http://schemas.microsoft.com/office/drawing/2014/main" id="{3D6A6C7E-21FC-7851-7D9A-BD2182474FB1}"/>
               </a:ext>
             </a:extLst>
           </p:cNvPr>
@@ -5967,7 +5967,7 @@
           <p:cNvPr id="9" name="item_1">
             <a:extLst>
               <a:ext uri="{FF2B5EF4-FFF2-40B4-BE49-F238E27FC236}">
-                <a16:creationId xmlns:a16="http://schemas.microsoft.com/office/drawing/2014/main" id="{EDFCA9F6-BA37-F84B-DB84-5DCA44F5C587}"/>
+                <a16:creationId xmlns:a16="http://schemas.microsoft.com/office/drawing/2014/main" id="{FF704F08-1EC5-C5B3-A220-A3C22E061C30}"/>
               </a:ext>
             </a:extLst>
           </p:cNvPr>
@@ -6015,7 +6015,7 @@
           <p:cNvPr id="10" name="item_2_title">
             <a:extLst>
               <a:ext uri="{FF2B5EF4-FFF2-40B4-BE49-F238E27FC236}">
-                <a16:creationId xmlns:a16="http://schemas.microsoft.com/office/drawing/2014/main" id="{9CA7F7AD-E85C-B55B-FDAC-FA20411E7651}"/>
+                <a16:creationId xmlns:a16="http://schemas.microsoft.com/office/drawing/2014/main" id="{9C4FED94-6033-50D3-1EDD-7F048A072A6E}"/>
               </a:ext>
             </a:extLst>
           </p:cNvPr>
@@ -6068,7 +6068,7 @@
           <p:cNvPr id="11" name="item_2">
             <a:extLst>
               <a:ext uri="{FF2B5EF4-FFF2-40B4-BE49-F238E27FC236}">
-                <a16:creationId xmlns:a16="http://schemas.microsoft.com/office/drawing/2014/main" id="{6E93242C-99D4-C28E-32AE-B366EFCD118E}"/>
+                <a16:creationId xmlns:a16="http://schemas.microsoft.com/office/drawing/2014/main" id="{86D1E923-A02D-E9C6-147D-654364B1E25D}"/>
               </a:ext>
             </a:extLst>
           </p:cNvPr>
@@ -6116,7 +6116,7 @@
           <p:cNvPr id="12" name="item_3_title">
             <a:extLst>
               <a:ext uri="{FF2B5EF4-FFF2-40B4-BE49-F238E27FC236}">
-                <a16:creationId xmlns:a16="http://schemas.microsoft.com/office/drawing/2014/main" id="{090A43BE-8151-D6E5-7901-7A2BD9E16844}"/>
+                <a16:creationId xmlns:a16="http://schemas.microsoft.com/office/drawing/2014/main" id="{D13B118F-7E01-A649-B52F-90E76F5D662E}"/>
               </a:ext>
             </a:extLst>
           </p:cNvPr>
@@ -6169,7 +6169,7 @@
           <p:cNvPr id="13" name="item_3">
             <a:extLst>
               <a:ext uri="{FF2B5EF4-FFF2-40B4-BE49-F238E27FC236}">
-                <a16:creationId xmlns:a16="http://schemas.microsoft.com/office/drawing/2014/main" id="{7A20253E-7168-7742-0151-DDC7C960D62C}"/>
+                <a16:creationId xmlns:a16="http://schemas.microsoft.com/office/drawing/2014/main" id="{EBD7DCE2-E5F5-8CEC-89D5-1F7D7FC6CD48}"/>
               </a:ext>
             </a:extLst>
           </p:cNvPr>
@@ -6217,7 +6217,7 @@
           <p:cNvPr id="14" name="item_4_title">
             <a:extLst>
               <a:ext uri="{FF2B5EF4-FFF2-40B4-BE49-F238E27FC236}">
-                <a16:creationId xmlns:a16="http://schemas.microsoft.com/office/drawing/2014/main" id="{4BA270F6-0C9F-F8A9-5C39-FE726B282BB4}"/>
+                <a16:creationId xmlns:a16="http://schemas.microsoft.com/office/drawing/2014/main" id="{91E73778-1C38-08D9-7484-1185953AC26D}"/>
               </a:ext>
             </a:extLst>
           </p:cNvPr>
@@ -6270,7 +6270,7 @@
           <p:cNvPr id="15" name="item_4">
             <a:extLst>
               <a:ext uri="{FF2B5EF4-FFF2-40B4-BE49-F238E27FC236}">
-                <a16:creationId xmlns:a16="http://schemas.microsoft.com/office/drawing/2014/main" id="{3E86624F-8032-B1EA-6BC0-D6795604167E}"/>
+                <a16:creationId xmlns:a16="http://schemas.microsoft.com/office/drawing/2014/main" id="{6C3747A6-80D3-50B7-51A5-DE8EE4B16FDC}"/>
               </a:ext>
             </a:extLst>
           </p:cNvPr>
@@ -6318,7 +6318,7 @@
           <p:cNvPr id="16" name="source">
             <a:extLst>
               <a:ext uri="{FF2B5EF4-FFF2-40B4-BE49-F238E27FC236}">
-                <a16:creationId xmlns:a16="http://schemas.microsoft.com/office/drawing/2014/main" id="{7EE5E3BF-62D7-F8A8-3A26-514A94C5F0E8}"/>
+                <a16:creationId xmlns:a16="http://schemas.microsoft.com/office/drawing/2014/main" id="{0963D1C3-CE3A-1337-34FE-B294C9D53AB2}"/>
               </a:ext>
             </a:extLst>
           </p:cNvPr>
@@ -6373,7 +6373,7 @@
     </p:spTree>
     <p:extLst>
       <p:ext uri="{BB962C8B-B14F-4D97-AF65-F5344CB8AC3E}">
-        <p14:creationId xmlns:p14="http://schemas.microsoft.com/office/powerpoint/2010/main" val="2907225569"/>
+        <p14:creationId xmlns:p14="http://schemas.microsoft.com/office/powerpoint/2010/main" val="2753329450"/>
       </p:ext>
     </p:extLst>
   </p:cSld>
@@ -6405,7 +6405,7 @@
           <p:cNvPr id="7" name="creative_background">
             <a:extLst>
               <a:ext uri="{FF2B5EF4-FFF2-40B4-BE49-F238E27FC236}">
-                <a16:creationId xmlns:a16="http://schemas.microsoft.com/office/drawing/2014/main" id="{2D323CE5-564C-4580-B4DE-6C801E234E35}"/>
+                <a16:creationId xmlns:a16="http://schemas.microsoft.com/office/drawing/2014/main" id="{61AED8DC-5866-5022-BDA8-0FBBD1D3A702}"/>
               </a:ext>
             </a:extLst>
           </p:cNvPr>
@@ -6478,7 +6478,7 @@
           <a:bodyPr/>
           <a:lstStyle/>
           <a:p>
-            <a:fld id="{F38275E8-7EFC-4FEA-BF4C-11F280B3D894}" type="datetimeFigureOut">
+            <a:fld id="{C5143365-16B3-4FD5-8BF7-F05E2AA1930B}" type="datetimeFigureOut">
               <a:rPr lang="en-US" smtClean="0"/>
               <a:t>10/3/2026</a:t>
             </a:fld>
@@ -6520,7 +6520,7 @@
           <a:bodyPr/>
           <a:lstStyle/>
           <a:p>
-            <a:fld id="{460DAC5E-8076-4A1F-9E2B-43FC1CE1F208}" type="slidenum">
+            <a:fld id="{4562F234-49D9-48C6-80E0-9B9318BCC5E8}" type="slidenum">
               <a:rPr lang="en-US" smtClean="0"/>
               <a:t>‹#›</a:t>
             </a:fld>
@@ -6533,7 +6533,7 @@
           <p:cNvPr id="8" name="item_1_title">
             <a:extLst>
               <a:ext uri="{FF2B5EF4-FFF2-40B4-BE49-F238E27FC236}">
-                <a16:creationId xmlns:a16="http://schemas.microsoft.com/office/drawing/2014/main" id="{3C72C6F7-16A9-326B-D8EA-1B5834F8BE10}"/>
+                <a16:creationId xmlns:a16="http://schemas.microsoft.com/office/drawing/2014/main" id="{5E215783-639D-E65C-FF1E-4BE449CCA111}"/>
               </a:ext>
             </a:extLst>
           </p:cNvPr>
@@ -6583,7 +6583,7 @@
           <p:cNvPr id="9" name="item_1">
             <a:extLst>
               <a:ext uri="{FF2B5EF4-FFF2-40B4-BE49-F238E27FC236}">
-                <a16:creationId xmlns:a16="http://schemas.microsoft.com/office/drawing/2014/main" id="{EBA38A32-913E-2277-45FE-B47B346C4AEC}"/>
+                <a16:creationId xmlns:a16="http://schemas.microsoft.com/office/drawing/2014/main" id="{214E6857-5793-1D5D-F153-F811FD7DCC1F}"/>
               </a:ext>
             </a:extLst>
           </p:cNvPr>
@@ -6631,7 +6631,7 @@
           <p:cNvPr id="10" name="item_2_title">
             <a:extLst>
               <a:ext uri="{FF2B5EF4-FFF2-40B4-BE49-F238E27FC236}">
-                <a16:creationId xmlns:a16="http://schemas.microsoft.com/office/drawing/2014/main" id="{A211F04E-9104-0410-3A68-B2CF3C48B270}"/>
+                <a16:creationId xmlns:a16="http://schemas.microsoft.com/office/drawing/2014/main" id="{C0E7D55A-AEAB-5EF9-2F91-4461292E652C}"/>
               </a:ext>
             </a:extLst>
           </p:cNvPr>
@@ -6684,7 +6684,7 @@
           <p:cNvPr id="11" name="item_2">
             <a:extLst>
               <a:ext uri="{FF2B5EF4-FFF2-40B4-BE49-F238E27FC236}">
-                <a16:creationId xmlns:a16="http://schemas.microsoft.com/office/drawing/2014/main" id="{26EB1BB0-E069-1FA4-67D1-8133BDB75743}"/>
+                <a16:creationId xmlns:a16="http://schemas.microsoft.com/office/drawing/2014/main" id="{146ED47B-52D9-B8CD-0DFC-1870AFDAD899}"/>
               </a:ext>
             </a:extLst>
           </p:cNvPr>
@@ -6732,7 +6732,7 @@
           <p:cNvPr id="12" name="item_3_title">
             <a:extLst>
               <a:ext uri="{FF2B5EF4-FFF2-40B4-BE49-F238E27FC236}">
-                <a16:creationId xmlns:a16="http://schemas.microsoft.com/office/drawing/2014/main" id="{61805F4A-5A67-42B4-0DD9-8AA188EC5076}"/>
+                <a16:creationId xmlns:a16="http://schemas.microsoft.com/office/drawing/2014/main" id="{00CDF7E8-F069-1587-A8EB-6CAFC0187420}"/>
               </a:ext>
             </a:extLst>
           </p:cNvPr>
@@ -6785,7 +6785,7 @@
           <p:cNvPr id="13" name="item_3">
             <a:extLst>
               <a:ext uri="{FF2B5EF4-FFF2-40B4-BE49-F238E27FC236}">
-                <a16:creationId xmlns:a16="http://schemas.microsoft.com/office/drawing/2014/main" id="{B9533FC0-6251-33BE-4F5A-03FA3AEC90AA}"/>
+                <a16:creationId xmlns:a16="http://schemas.microsoft.com/office/drawing/2014/main" id="{CDAA5693-4858-CEF1-2B3E-567FCD718456}"/>
               </a:ext>
             </a:extLst>
           </p:cNvPr>
@@ -6833,7 +6833,7 @@
           <p:cNvPr id="14" name="item_4_title">
             <a:extLst>
               <a:ext uri="{FF2B5EF4-FFF2-40B4-BE49-F238E27FC236}">
-                <a16:creationId xmlns:a16="http://schemas.microsoft.com/office/drawing/2014/main" id="{54BA1AA6-63E9-C53A-7C15-64422DD74219}"/>
+                <a16:creationId xmlns:a16="http://schemas.microsoft.com/office/drawing/2014/main" id="{A441FCCF-48DA-12A4-C1CE-07B754400292}"/>
               </a:ext>
             </a:extLst>
           </p:cNvPr>
@@ -6886,7 +6886,7 @@
           <p:cNvPr id="15" name="item_4">
             <a:extLst>
               <a:ext uri="{FF2B5EF4-FFF2-40B4-BE49-F238E27FC236}">
-                <a16:creationId xmlns:a16="http://schemas.microsoft.com/office/drawing/2014/main" id="{B2D98263-D6DE-E512-4325-DAC7291C1F26}"/>
+                <a16:creationId xmlns:a16="http://schemas.microsoft.com/office/drawing/2014/main" id="{939C1C08-C6CC-6450-A833-953937A9D5B7}"/>
               </a:ext>
             </a:extLst>
           </p:cNvPr>
@@ -6934,7 +6934,7 @@
           <p:cNvPr id="16" name="source">
             <a:extLst>
               <a:ext uri="{FF2B5EF4-FFF2-40B4-BE49-F238E27FC236}">
-                <a16:creationId xmlns:a16="http://schemas.microsoft.com/office/drawing/2014/main" id="{0868E78A-FC13-8DA1-7DDD-8A71F67E0C6A}"/>
+                <a16:creationId xmlns:a16="http://schemas.microsoft.com/office/drawing/2014/main" id="{A6D046B5-C390-702D-A265-8E3954BAEC77}"/>
               </a:ext>
             </a:extLst>
           </p:cNvPr>
@@ -6989,7 +6989,7 @@
     </p:spTree>
     <p:extLst>
       <p:ext uri="{BB962C8B-B14F-4D97-AF65-F5344CB8AC3E}">
-        <p14:creationId xmlns:p14="http://schemas.microsoft.com/office/powerpoint/2010/main" val="135861496"/>
+        <p14:creationId xmlns:p14="http://schemas.microsoft.com/office/powerpoint/2010/main" val="957893231"/>
       </p:ext>
     </p:extLst>
   </p:cSld>
@@ -7021,7 +7021,7 @@
           <p:cNvPr id="7" name="creative_background">
             <a:extLst>
               <a:ext uri="{FF2B5EF4-FFF2-40B4-BE49-F238E27FC236}">
-                <a16:creationId xmlns:a16="http://schemas.microsoft.com/office/drawing/2014/main" id="{7C6E0DED-FCB1-54C4-7E8C-D137B2B2388D}"/>
+                <a16:creationId xmlns:a16="http://schemas.microsoft.com/office/drawing/2014/main" id="{6436F46D-23E3-F1F1-686F-FCB701A58819}"/>
               </a:ext>
             </a:extLst>
           </p:cNvPr>
@@ -7094,7 +7094,7 @@
           <a:bodyPr/>
           <a:lstStyle/>
           <a:p>
-            <a:fld id="{F38275E8-7EFC-4FEA-BF4C-11F280B3D894}" type="datetimeFigureOut">
+            <a:fld id="{C5143365-16B3-4FD5-8BF7-F05E2AA1930B}" type="datetimeFigureOut">
               <a:rPr lang="en-US" smtClean="0"/>
               <a:t>10/3/2026</a:t>
             </a:fld>
@@ -7136,7 +7136,7 @@
           <a:bodyPr/>
           <a:lstStyle/>
           <a:p>
-            <a:fld id="{460DAC5E-8076-4A1F-9E2B-43FC1CE1F208}" type="slidenum">
+            <a:fld id="{4562F234-49D9-48C6-80E0-9B9318BCC5E8}" type="slidenum">
               <a:rPr lang="en-US" smtClean="0"/>
               <a:t>‹#›</a:t>
             </a:fld>
@@ -7149,7 +7149,7 @@
           <p:cNvPr id="8" name="kpi_value_1">
             <a:extLst>
               <a:ext uri="{FF2B5EF4-FFF2-40B4-BE49-F238E27FC236}">
-                <a16:creationId xmlns:a16="http://schemas.microsoft.com/office/drawing/2014/main" id="{BBB4FB61-354A-F924-FD5F-3D3722813056}"/>
+                <a16:creationId xmlns:a16="http://schemas.microsoft.com/office/drawing/2014/main" id="{F44BE2BE-0095-56D0-8E48-8D08DC34E061}"/>
               </a:ext>
             </a:extLst>
           </p:cNvPr>
@@ -7199,7 +7199,7 @@
           <p:cNvPr id="9" name="kpi_label_1">
             <a:extLst>
               <a:ext uri="{FF2B5EF4-FFF2-40B4-BE49-F238E27FC236}">
-                <a16:creationId xmlns:a16="http://schemas.microsoft.com/office/drawing/2014/main" id="{4AA81C63-7A21-DD3C-6898-7F091242C7ED}"/>
+                <a16:creationId xmlns:a16="http://schemas.microsoft.com/office/drawing/2014/main" id="{7043E81B-15EB-AFCD-8445-1C1EFF372618}"/>
               </a:ext>
             </a:extLst>
           </p:cNvPr>
@@ -7247,7 +7247,7 @@
           <p:cNvPr id="10" name="quote">
             <a:extLst>
               <a:ext uri="{FF2B5EF4-FFF2-40B4-BE49-F238E27FC236}">
-                <a16:creationId xmlns:a16="http://schemas.microsoft.com/office/drawing/2014/main" id="{CE3DDB22-E22A-6006-2BDB-64FE5A53B40C}"/>
+                <a16:creationId xmlns:a16="http://schemas.microsoft.com/office/drawing/2014/main" id="{6E3CEE9C-5C63-780B-0BA8-B0773505BEE1}"/>
               </a:ext>
             </a:extLst>
           </p:cNvPr>
@@ -7297,7 +7297,7 @@
           <p:cNvPr id="11" name="attribution">
             <a:extLst>
               <a:ext uri="{FF2B5EF4-FFF2-40B4-BE49-F238E27FC236}">
-                <a16:creationId xmlns:a16="http://schemas.microsoft.com/office/drawing/2014/main" id="{DB3D070D-D768-E314-7023-C4ED413AED50}"/>
+                <a16:creationId xmlns:a16="http://schemas.microsoft.com/office/drawing/2014/main" id="{05FC4DFB-85C9-7ABE-E607-907D1B5E0DF0}"/>
               </a:ext>
             </a:extLst>
           </p:cNvPr>
@@ -7345,7 +7345,7 @@
           <p:cNvPr id="12" name="item_1_title">
             <a:extLst>
               <a:ext uri="{FF2B5EF4-FFF2-40B4-BE49-F238E27FC236}">
-                <a16:creationId xmlns:a16="http://schemas.microsoft.com/office/drawing/2014/main" id="{CAD09711-547E-2BE7-0697-8F18E7012690}"/>
+                <a16:creationId xmlns:a16="http://schemas.microsoft.com/office/drawing/2014/main" id="{F6082473-47B3-16D6-0CE5-A8FE89B46DFA}"/>
               </a:ext>
             </a:extLst>
           </p:cNvPr>
@@ -7398,7 +7398,7 @@
           <p:cNvPr id="13" name="item_1">
             <a:extLst>
               <a:ext uri="{FF2B5EF4-FFF2-40B4-BE49-F238E27FC236}">
-                <a16:creationId xmlns:a16="http://schemas.microsoft.com/office/drawing/2014/main" id="{7F44D0F9-7C57-F408-F604-3A5A29D2DD20}"/>
+                <a16:creationId xmlns:a16="http://schemas.microsoft.com/office/drawing/2014/main" id="{BD1C621C-A577-122F-0B7C-F9A77796F474}"/>
               </a:ext>
             </a:extLst>
           </p:cNvPr>
@@ -7446,7 +7446,7 @@
           <p:cNvPr id="14" name="source">
             <a:extLst>
               <a:ext uri="{FF2B5EF4-FFF2-40B4-BE49-F238E27FC236}">
-                <a16:creationId xmlns:a16="http://schemas.microsoft.com/office/drawing/2014/main" id="{2D24357F-524A-1E36-172F-ECA9A2211617}"/>
+                <a16:creationId xmlns:a16="http://schemas.microsoft.com/office/drawing/2014/main" id="{828293A3-A4E9-A902-9EED-BA1E9ECD08D0}"/>
               </a:ext>
             </a:extLst>
           </p:cNvPr>
@@ -7501,7 +7501,7 @@
     </p:spTree>
     <p:extLst>
       <p:ext uri="{BB962C8B-B14F-4D97-AF65-F5344CB8AC3E}">
-        <p14:creationId xmlns:p14="http://schemas.microsoft.com/office/powerpoint/2010/main" val="2399397194"/>
+        <p14:creationId xmlns:p14="http://schemas.microsoft.com/office/powerpoint/2010/main" val="1982738282"/>
       </p:ext>
     </p:extLst>
   </p:cSld>
@@ -7533,7 +7533,7 @@
           <p:cNvPr id="7" name="creative_background">
             <a:extLst>
               <a:ext uri="{FF2B5EF4-FFF2-40B4-BE49-F238E27FC236}">
-                <a16:creationId xmlns:a16="http://schemas.microsoft.com/office/drawing/2014/main" id="{E412A82E-3A14-C88A-C5B6-4179991B4132}"/>
+                <a16:creationId xmlns:a16="http://schemas.microsoft.com/office/drawing/2014/main" id="{E9889BEE-0E9C-5772-B18F-182256C7509F}"/>
               </a:ext>
             </a:extLst>
           </p:cNvPr>
@@ -7606,7 +7606,7 @@
           <a:bodyPr/>
           <a:lstStyle/>
           <a:p>
-            <a:fld id="{F38275E8-7EFC-4FEA-BF4C-11F280B3D894}" type="datetimeFigureOut">
+            <a:fld id="{C5143365-16B3-4FD5-8BF7-F05E2AA1930B}" type="datetimeFigureOut">
               <a:rPr lang="en-US" smtClean="0"/>
               <a:t>10/3/2026</a:t>
             </a:fld>
@@ -7648,7 +7648,7 @@
           <a:bodyPr/>
           <a:lstStyle/>
           <a:p>
-            <a:fld id="{460DAC5E-8076-4A1F-9E2B-43FC1CE1F208}" type="slidenum">
+            <a:fld id="{4562F234-49D9-48C6-80E0-9B9318BCC5E8}" type="slidenum">
               <a:rPr lang="en-US" smtClean="0"/>
               <a:t>‹#›</a:t>
             </a:fld>
@@ -7661,7 +7661,7 @@
           <p:cNvPr id="8" name="item_1_title">
             <a:extLst>
               <a:ext uri="{FF2B5EF4-FFF2-40B4-BE49-F238E27FC236}">
-                <a16:creationId xmlns:a16="http://schemas.microsoft.com/office/drawing/2014/main" id="{A78E46CD-1B39-4D42-CA63-A7C162C22D78}"/>
+                <a16:creationId xmlns:a16="http://schemas.microsoft.com/office/drawing/2014/main" id="{F596D009-ECAE-5D45-EA6B-19C13DBEC98A}"/>
               </a:ext>
             </a:extLst>
           </p:cNvPr>
@@ -7711,7 +7711,7 @@
           <p:cNvPr id="9" name="item_1">
             <a:extLst>
               <a:ext uri="{FF2B5EF4-FFF2-40B4-BE49-F238E27FC236}">
-                <a16:creationId xmlns:a16="http://schemas.microsoft.com/office/drawing/2014/main" id="{DA802ABB-7A02-71C6-E99B-9E0FD5D34975}"/>
+                <a16:creationId xmlns:a16="http://schemas.microsoft.com/office/drawing/2014/main" id="{ADF92BDE-CBB7-6597-04A3-1150EEEE8BF0}"/>
               </a:ext>
             </a:extLst>
           </p:cNvPr>
@@ -7759,7 +7759,7 @@
           <p:cNvPr id="10" name="item_2_title">
             <a:extLst>
               <a:ext uri="{FF2B5EF4-FFF2-40B4-BE49-F238E27FC236}">
-                <a16:creationId xmlns:a16="http://schemas.microsoft.com/office/drawing/2014/main" id="{F4A81CF4-334D-168B-644E-008835A00989}"/>
+                <a16:creationId xmlns:a16="http://schemas.microsoft.com/office/drawing/2014/main" id="{5480A446-DE34-11E0-8A3B-B588FD681E16}"/>
               </a:ext>
             </a:extLst>
           </p:cNvPr>
@@ -7812,7 +7812,7 @@
           <p:cNvPr id="11" name="item_2">
             <a:extLst>
               <a:ext uri="{FF2B5EF4-FFF2-40B4-BE49-F238E27FC236}">
-                <a16:creationId xmlns:a16="http://schemas.microsoft.com/office/drawing/2014/main" id="{1D57BA5A-F01C-0567-4B3A-A32B9DEB4580}"/>
+                <a16:creationId xmlns:a16="http://schemas.microsoft.com/office/drawing/2014/main" id="{80BA3747-7BC2-3CE0-6AC1-FC7102CF0BF8}"/>
               </a:ext>
             </a:extLst>
           </p:cNvPr>
@@ -7860,7 +7860,7 @@
           <p:cNvPr id="12" name="item_3_title">
             <a:extLst>
               <a:ext uri="{FF2B5EF4-FFF2-40B4-BE49-F238E27FC236}">
-                <a16:creationId xmlns:a16="http://schemas.microsoft.com/office/drawing/2014/main" id="{FE1F9CD7-4072-4A67-060E-837EB120893D}"/>
+                <a16:creationId xmlns:a16="http://schemas.microsoft.com/office/drawing/2014/main" id="{8BD7B523-6A51-FC26-514F-DBF1E40FF877}"/>
               </a:ext>
             </a:extLst>
           </p:cNvPr>
@@ -7913,7 +7913,7 @@
           <p:cNvPr id="13" name="item_3">
             <a:extLst>
               <a:ext uri="{FF2B5EF4-FFF2-40B4-BE49-F238E27FC236}">
-                <a16:creationId xmlns:a16="http://schemas.microsoft.com/office/drawing/2014/main" id="{F1178100-3F51-7817-6A91-A7FFBC2D0867}"/>
+                <a16:creationId xmlns:a16="http://schemas.microsoft.com/office/drawing/2014/main" id="{1C76B0EF-59C5-2BB8-0152-1AC8760F195C}"/>
               </a:ext>
             </a:extLst>
           </p:cNvPr>
@@ -7961,7 +7961,7 @@
           <p:cNvPr id="14" name="source">
             <a:extLst>
               <a:ext uri="{FF2B5EF4-FFF2-40B4-BE49-F238E27FC236}">
-                <a16:creationId xmlns:a16="http://schemas.microsoft.com/office/drawing/2014/main" id="{EAB60788-174F-07D3-E05C-2FDB8D0DDD8A}"/>
+                <a16:creationId xmlns:a16="http://schemas.microsoft.com/office/drawing/2014/main" id="{4E0F978F-7BFF-A402-9551-C3C3BF0648F6}"/>
               </a:ext>
             </a:extLst>
           </p:cNvPr>
@@ -8016,7 +8016,7 @@
     </p:spTree>
     <p:extLst>
       <p:ext uri="{BB962C8B-B14F-4D97-AF65-F5344CB8AC3E}">
-        <p14:creationId xmlns:p14="http://schemas.microsoft.com/office/powerpoint/2010/main" val="2673200253"/>
+        <p14:creationId xmlns:p14="http://schemas.microsoft.com/office/powerpoint/2010/main" val="3458257689"/>
       </p:ext>
     </p:extLst>
   </p:cSld>
@@ -8048,7 +8048,7 @@
           <p:cNvPr id="7" name="creative_background">
             <a:extLst>
               <a:ext uri="{FF2B5EF4-FFF2-40B4-BE49-F238E27FC236}">
-                <a16:creationId xmlns:a16="http://schemas.microsoft.com/office/drawing/2014/main" id="{2AAC5A20-6059-F988-0F68-532D1E1A4919}"/>
+                <a16:creationId xmlns:a16="http://schemas.microsoft.com/office/drawing/2014/main" id="{E3FDBDB7-9730-23C8-8168-109A75E2EF66}"/>
               </a:ext>
             </a:extLst>
           </p:cNvPr>
@@ -8121,7 +8121,7 @@
           <a:bodyPr/>
           <a:lstStyle/>
           <a:p>
-            <a:fld id="{F38275E8-7EFC-4FEA-BF4C-11F280B3D894}" type="datetimeFigureOut">
+            <a:fld id="{C5143365-16B3-4FD5-8BF7-F05E2AA1930B}" type="datetimeFigureOut">
               <a:rPr lang="en-US" smtClean="0"/>
               <a:t>10/3/2026</a:t>
             </a:fld>
@@ -8163,7 +8163,7 @@
           <a:bodyPr/>
           <a:lstStyle/>
           <a:p>
-            <a:fld id="{460DAC5E-8076-4A1F-9E2B-43FC1CE1F208}" type="slidenum">
+            <a:fld id="{4562F234-49D9-48C6-80E0-9B9318BCC5E8}" type="slidenum">
               <a:rPr lang="en-US" smtClean="0"/>
               <a:t>‹#›</a:t>
             </a:fld>
@@ -8176,7 +8176,7 @@
           <p:cNvPr id="8" name="marker_1">
             <a:extLst>
               <a:ext uri="{FF2B5EF4-FFF2-40B4-BE49-F238E27FC236}">
-                <a16:creationId xmlns:a16="http://schemas.microsoft.com/office/drawing/2014/main" id="{A71E1D19-2F09-EB1F-B83D-714191EA0111}"/>
+                <a16:creationId xmlns:a16="http://schemas.microsoft.com/office/drawing/2014/main" id="{843CC8C8-76F1-AD07-49A4-1EBD5DE00B35}"/>
               </a:ext>
             </a:extLst>
           </p:cNvPr>
@@ -8232,7 +8232,7 @@
           <p:cNvPr id="9" name="item_1_title">
             <a:extLst>
               <a:ext uri="{FF2B5EF4-FFF2-40B4-BE49-F238E27FC236}">
-                <a16:creationId xmlns:a16="http://schemas.microsoft.com/office/drawing/2014/main" id="{4FBCB464-7E1B-D519-F3E9-FE138E2A32DB}"/>
+                <a16:creationId xmlns:a16="http://schemas.microsoft.com/office/drawing/2014/main" id="{6AFDD1C6-781E-FD40-C31D-0FDCCBBA3ECE}"/>
               </a:ext>
             </a:extLst>
           </p:cNvPr>
@@ -8285,7 +8285,7 @@
           <p:cNvPr id="10" name="item_1">
             <a:extLst>
               <a:ext uri="{FF2B5EF4-FFF2-40B4-BE49-F238E27FC236}">
-                <a16:creationId xmlns:a16="http://schemas.microsoft.com/office/drawing/2014/main" id="{17BF4BE7-2BB0-4B3D-EC34-D8C12F81E745}"/>
+                <a16:creationId xmlns:a16="http://schemas.microsoft.com/office/drawing/2014/main" id="{71CE15EC-6F56-6C05-EACA-1822B1A7EF07}"/>
               </a:ext>
             </a:extLst>
           </p:cNvPr>
@@ -8333,7 +8333,7 @@
           <p:cNvPr id="11" name="marker_2">
             <a:extLst>
               <a:ext uri="{FF2B5EF4-FFF2-40B4-BE49-F238E27FC236}">
-                <a16:creationId xmlns:a16="http://schemas.microsoft.com/office/drawing/2014/main" id="{B14315A5-20B3-7BF0-AA3F-D8609ACF0857}"/>
+                <a16:creationId xmlns:a16="http://schemas.microsoft.com/office/drawing/2014/main" id="{72637AC5-1715-B8A9-08BA-A33C70F78947}"/>
               </a:ext>
             </a:extLst>
           </p:cNvPr>
@@ -8389,7 +8389,7 @@
           <p:cNvPr id="12" name="item_2_title">
             <a:extLst>
               <a:ext uri="{FF2B5EF4-FFF2-40B4-BE49-F238E27FC236}">
-                <a16:creationId xmlns:a16="http://schemas.microsoft.com/office/drawing/2014/main" id="{1BFC1FE3-D29F-8E46-C672-BDFB44D6FB99}"/>
+                <a16:creationId xmlns:a16="http://schemas.microsoft.com/office/drawing/2014/main" id="{E928A87A-511F-D11C-60D1-579248CD6410}"/>
               </a:ext>
             </a:extLst>
           </p:cNvPr>
@@ -8442,7 +8442,7 @@
           <p:cNvPr id="13" name="item_2">
             <a:extLst>
               <a:ext uri="{FF2B5EF4-FFF2-40B4-BE49-F238E27FC236}">
-                <a16:creationId xmlns:a16="http://schemas.microsoft.com/office/drawing/2014/main" id="{D6A2B705-AFA8-F40E-8D28-487E6493205E}"/>
+                <a16:creationId xmlns:a16="http://schemas.microsoft.com/office/drawing/2014/main" id="{6254A0E0-CCA3-E443-6BF5-71C1FD2CC970}"/>
               </a:ext>
             </a:extLst>
           </p:cNvPr>
@@ -8490,7 +8490,7 @@
           <p:cNvPr id="14" name="source">
             <a:extLst>
               <a:ext uri="{FF2B5EF4-FFF2-40B4-BE49-F238E27FC236}">
-                <a16:creationId xmlns:a16="http://schemas.microsoft.com/office/drawing/2014/main" id="{10C5F8C0-D104-021E-228A-7B6C9BDF492E}"/>
+                <a16:creationId xmlns:a16="http://schemas.microsoft.com/office/drawing/2014/main" id="{8D41F04C-CE85-69D7-A0D9-0C3DCBE9A281}"/>
               </a:ext>
             </a:extLst>
           </p:cNvPr>
@@ -8545,7 +8545,7 @@
     </p:spTree>
     <p:extLst>
       <p:ext uri="{BB962C8B-B14F-4D97-AF65-F5344CB8AC3E}">
-        <p14:creationId xmlns:p14="http://schemas.microsoft.com/office/powerpoint/2010/main" val="1207974115"/>
+        <p14:creationId xmlns:p14="http://schemas.microsoft.com/office/powerpoint/2010/main" val="2606595238"/>
       </p:ext>
     </p:extLst>
   </p:cSld>
@@ -8577,7 +8577,7 @@
           <p:cNvPr id="7" name="creative_background">
             <a:extLst>
               <a:ext uri="{FF2B5EF4-FFF2-40B4-BE49-F238E27FC236}">
-                <a16:creationId xmlns:a16="http://schemas.microsoft.com/office/drawing/2014/main" id="{4326CF01-BAD9-04AA-C7C9-CF6F51316300}"/>
+                <a16:creationId xmlns:a16="http://schemas.microsoft.com/office/drawing/2014/main" id="{938D7BD1-58D0-DEBF-F9AE-359C059A1C74}"/>
               </a:ext>
             </a:extLst>
           </p:cNvPr>
@@ -8650,7 +8650,7 @@
           <a:bodyPr/>
           <a:lstStyle/>
           <a:p>
-            <a:fld id="{F38275E8-7EFC-4FEA-BF4C-11F280B3D894}" type="datetimeFigureOut">
+            <a:fld id="{C5143365-16B3-4FD5-8BF7-F05E2AA1930B}" type="datetimeFigureOut">
               <a:rPr lang="en-US" smtClean="0"/>
               <a:t>10/3/2026</a:t>
             </a:fld>
@@ -8692,7 +8692,7 @@
           <a:bodyPr/>
           <a:lstStyle/>
           <a:p>
-            <a:fld id="{460DAC5E-8076-4A1F-9E2B-43FC1CE1F208}" type="slidenum">
+            <a:fld id="{4562F234-49D9-48C6-80E0-9B9318BCC5E8}" type="slidenum">
               <a:rPr lang="en-US" smtClean="0"/>
               <a:t>‹#›</a:t>
             </a:fld>
@@ -8705,7 +8705,7 @@
           <p:cNvPr id="8" name="kpi_value_1">
             <a:extLst>
               <a:ext uri="{FF2B5EF4-FFF2-40B4-BE49-F238E27FC236}">
-                <a16:creationId xmlns:a16="http://schemas.microsoft.com/office/drawing/2014/main" id="{FE9A0A9B-D894-ACE8-66BC-9377B95F301D}"/>
+                <a16:creationId xmlns:a16="http://schemas.microsoft.com/office/drawing/2014/main" id="{0AAB4ED8-8457-7924-8832-428CA6EF8755}"/>
               </a:ext>
             </a:extLst>
           </p:cNvPr>
@@ -8755,7 +8755,7 @@
           <p:cNvPr id="9" name="kpi_label_1">
             <a:extLst>
               <a:ext uri="{FF2B5EF4-FFF2-40B4-BE49-F238E27FC236}">
-                <a16:creationId xmlns:a16="http://schemas.microsoft.com/office/drawing/2014/main" id="{AEC4BCAD-301A-39EC-8D67-4BD10EA61622}"/>
+                <a16:creationId xmlns:a16="http://schemas.microsoft.com/office/drawing/2014/main" id="{D850B7BB-DFA4-18F9-4D08-4110F90C3E9A}"/>
               </a:ext>
             </a:extLst>
           </p:cNvPr>
@@ -8803,7 +8803,7 @@
           <p:cNvPr id="10" name="quote">
             <a:extLst>
               <a:ext uri="{FF2B5EF4-FFF2-40B4-BE49-F238E27FC236}">
-                <a16:creationId xmlns:a16="http://schemas.microsoft.com/office/drawing/2014/main" id="{825CA08A-4BBC-1807-C5DF-208E39E242B7}"/>
+                <a16:creationId xmlns:a16="http://schemas.microsoft.com/office/drawing/2014/main" id="{98F1DFE3-135B-3FC6-28F6-E984DBFEDD4A}"/>
               </a:ext>
             </a:extLst>
           </p:cNvPr>
@@ -8853,7 +8853,7 @@
           <p:cNvPr id="11" name="attribution">
             <a:extLst>
               <a:ext uri="{FF2B5EF4-FFF2-40B4-BE49-F238E27FC236}">
-                <a16:creationId xmlns:a16="http://schemas.microsoft.com/office/drawing/2014/main" id="{0B51A7E4-D63D-75E6-8D75-F835D738E741}"/>
+                <a16:creationId xmlns:a16="http://schemas.microsoft.com/office/drawing/2014/main" id="{ED386D8E-55F4-0E03-F725-6277EB528152}"/>
               </a:ext>
             </a:extLst>
           </p:cNvPr>
@@ -8901,7 +8901,7 @@
           <p:cNvPr id="12" name="item_1_title">
             <a:extLst>
               <a:ext uri="{FF2B5EF4-FFF2-40B4-BE49-F238E27FC236}">
-                <a16:creationId xmlns:a16="http://schemas.microsoft.com/office/drawing/2014/main" id="{1606ABCB-C5EA-AA8E-1FA0-1A34E113DDED}"/>
+                <a16:creationId xmlns:a16="http://schemas.microsoft.com/office/drawing/2014/main" id="{44F32971-9A58-D924-84F8-E9284DB28079}"/>
               </a:ext>
             </a:extLst>
           </p:cNvPr>
@@ -8954,7 +8954,7 @@
           <p:cNvPr id="13" name="item_1">
             <a:extLst>
               <a:ext uri="{FF2B5EF4-FFF2-40B4-BE49-F238E27FC236}">
-                <a16:creationId xmlns:a16="http://schemas.microsoft.com/office/drawing/2014/main" id="{11692C86-BAB9-390F-4A54-D17CF8903910}"/>
+                <a16:creationId xmlns:a16="http://schemas.microsoft.com/office/drawing/2014/main" id="{D61D3F87-4CC1-7610-6180-1CF61223EE66}"/>
               </a:ext>
             </a:extLst>
           </p:cNvPr>
@@ -9002,7 +9002,7 @@
           <p:cNvPr id="14" name="source">
             <a:extLst>
               <a:ext uri="{FF2B5EF4-FFF2-40B4-BE49-F238E27FC236}">
-                <a16:creationId xmlns:a16="http://schemas.microsoft.com/office/drawing/2014/main" id="{E673BA99-C1E4-783E-86F5-9CB6158BE622}"/>
+                <a16:creationId xmlns:a16="http://schemas.microsoft.com/office/drawing/2014/main" id="{B41A2310-F1A3-8664-3C84-71388BA6E27D}"/>
               </a:ext>
             </a:extLst>
           </p:cNvPr>
@@ -9057,7 +9057,7 @@
     </p:spTree>
     <p:extLst>
       <p:ext uri="{BB962C8B-B14F-4D97-AF65-F5344CB8AC3E}">
-        <p14:creationId xmlns:p14="http://schemas.microsoft.com/office/powerpoint/2010/main" val="1522865714"/>
+        <p14:creationId xmlns:p14="http://schemas.microsoft.com/office/powerpoint/2010/main" val="827885556"/>
       </p:ext>
     </p:extLst>
   </p:cSld>
@@ -9089,7 +9089,7 @@
           <p:cNvPr id="7" name="creative_background">
             <a:extLst>
               <a:ext uri="{FF2B5EF4-FFF2-40B4-BE49-F238E27FC236}">
-                <a16:creationId xmlns:a16="http://schemas.microsoft.com/office/drawing/2014/main" id="{603BE1B9-86B7-6797-264C-2EBFD24BBBA8}"/>
+                <a16:creationId xmlns:a16="http://schemas.microsoft.com/office/drawing/2014/main" id="{F02BCF3D-3A80-1148-DFA6-6AB406658B89}"/>
               </a:ext>
             </a:extLst>
           </p:cNvPr>
@@ -9162,7 +9162,7 @@
           <a:bodyPr/>
           <a:lstStyle/>
           <a:p>
-            <a:fld id="{F38275E8-7EFC-4FEA-BF4C-11F280B3D894}" type="datetimeFigureOut">
+            <a:fld id="{C5143365-16B3-4FD5-8BF7-F05E2AA1930B}" type="datetimeFigureOut">
               <a:rPr lang="en-US" smtClean="0"/>
               <a:t>10/3/2026</a:t>
             </a:fld>
@@ -9204,7 +9204,7 @@
           <a:bodyPr/>
           <a:lstStyle/>
           <a:p>
-            <a:fld id="{460DAC5E-8076-4A1F-9E2B-43FC1CE1F208}" type="slidenum">
+            <a:fld id="{4562F234-49D9-48C6-80E0-9B9318BCC5E8}" type="slidenum">
               <a:rPr lang="en-US" smtClean="0"/>
               <a:t>‹#›</a:t>
             </a:fld>
@@ -9217,7 +9217,7 @@
           <p:cNvPr id="8" name="marker_1">
             <a:extLst>
               <a:ext uri="{FF2B5EF4-FFF2-40B4-BE49-F238E27FC236}">
-                <a16:creationId xmlns:a16="http://schemas.microsoft.com/office/drawing/2014/main" id="{28A1D7CA-BC3A-4DC7-874C-379E67D7BD95}"/>
+                <a16:creationId xmlns:a16="http://schemas.microsoft.com/office/drawing/2014/main" id="{C0B9AD90-0ECC-9E32-BA81-D337BF0DB2F5}"/>
               </a:ext>
             </a:extLst>
           </p:cNvPr>
@@ -9273,7 +9273,7 @@
           <p:cNvPr id="9" name="item_1">
             <a:extLst>
               <a:ext uri="{FF2B5EF4-FFF2-40B4-BE49-F238E27FC236}">
-                <a16:creationId xmlns:a16="http://schemas.microsoft.com/office/drawing/2014/main" id="{ABF2EEA4-5237-4784-2C56-6CA2AA32C8E0}"/>
+                <a16:creationId xmlns:a16="http://schemas.microsoft.com/office/drawing/2014/main" id="{1939C52F-031B-CBEA-BD54-9808CEE58286}"/>
               </a:ext>
             </a:extLst>
           </p:cNvPr>
@@ -9321,7 +9321,7 @@
           <p:cNvPr id="10" name="marker_2">
             <a:extLst>
               <a:ext uri="{FF2B5EF4-FFF2-40B4-BE49-F238E27FC236}">
-                <a16:creationId xmlns:a16="http://schemas.microsoft.com/office/drawing/2014/main" id="{B9F5E2A0-E062-1A70-AEEC-20706A2C2B2E}"/>
+                <a16:creationId xmlns:a16="http://schemas.microsoft.com/office/drawing/2014/main" id="{5A86973F-8BC6-01F8-C975-687FB9BA0EA2}"/>
               </a:ext>
             </a:extLst>
           </p:cNvPr>
@@ -9377,7 +9377,7 @@
           <p:cNvPr id="11" name="item_2">
             <a:extLst>
               <a:ext uri="{FF2B5EF4-FFF2-40B4-BE49-F238E27FC236}">
-                <a16:creationId xmlns:a16="http://schemas.microsoft.com/office/drawing/2014/main" id="{31429620-6DB7-AEF8-4D24-F97F654C1A77}"/>
+                <a16:creationId xmlns:a16="http://schemas.microsoft.com/office/drawing/2014/main" id="{AB66F2D0-F222-032B-D244-406F435BD793}"/>
               </a:ext>
             </a:extLst>
           </p:cNvPr>
@@ -9425,7 +9425,7 @@
           <p:cNvPr id="12" name="marker_3">
             <a:extLst>
               <a:ext uri="{FF2B5EF4-FFF2-40B4-BE49-F238E27FC236}">
-                <a16:creationId xmlns:a16="http://schemas.microsoft.com/office/drawing/2014/main" id="{1A198052-B5D0-07F4-CC4B-70C819540204}"/>
+                <a16:creationId xmlns:a16="http://schemas.microsoft.com/office/drawing/2014/main" id="{D2313508-796C-8FB6-1CEB-A0946C9BB25B}"/>
               </a:ext>
             </a:extLst>
           </p:cNvPr>
@@ -9481,7 +9481,7 @@
           <p:cNvPr id="13" name="item_3">
             <a:extLst>
               <a:ext uri="{FF2B5EF4-FFF2-40B4-BE49-F238E27FC236}">
-                <a16:creationId xmlns:a16="http://schemas.microsoft.com/office/drawing/2014/main" id="{ACD990A4-611E-CE17-D97D-6AE0785F37C5}"/>
+                <a16:creationId xmlns:a16="http://schemas.microsoft.com/office/drawing/2014/main" id="{C97566F4-A3D3-0772-8333-76A26E3634D0}"/>
               </a:ext>
             </a:extLst>
           </p:cNvPr>
@@ -9529,7 +9529,7 @@
           <p:cNvPr id="14" name="marker_4">
             <a:extLst>
               <a:ext uri="{FF2B5EF4-FFF2-40B4-BE49-F238E27FC236}">
-                <a16:creationId xmlns:a16="http://schemas.microsoft.com/office/drawing/2014/main" id="{98662D6E-1667-2A20-E9E9-A2B9071EAF3B}"/>
+                <a16:creationId xmlns:a16="http://schemas.microsoft.com/office/drawing/2014/main" id="{000352D9-72BF-5FC0-09A8-FEE0D658C0BD}"/>
               </a:ext>
             </a:extLst>
           </p:cNvPr>
@@ -9585,7 +9585,7 @@
           <p:cNvPr id="15" name="item_4">
             <a:extLst>
               <a:ext uri="{FF2B5EF4-FFF2-40B4-BE49-F238E27FC236}">
-                <a16:creationId xmlns:a16="http://schemas.microsoft.com/office/drawing/2014/main" id="{4FC970A7-6397-04DA-7E56-0F72C83B8A04}"/>
+                <a16:creationId xmlns:a16="http://schemas.microsoft.com/office/drawing/2014/main" id="{8B610A2A-0C65-713F-2EF8-105234AF120C}"/>
               </a:ext>
             </a:extLst>
           </p:cNvPr>
@@ -9633,7 +9633,7 @@
           <p:cNvPr id="16" name="source">
             <a:extLst>
               <a:ext uri="{FF2B5EF4-FFF2-40B4-BE49-F238E27FC236}">
-                <a16:creationId xmlns:a16="http://schemas.microsoft.com/office/drawing/2014/main" id="{97413B26-9AD9-2133-BB02-2D4ED20F09DB}"/>
+                <a16:creationId xmlns:a16="http://schemas.microsoft.com/office/drawing/2014/main" id="{019B5795-5CE3-5311-3ED4-572B1DA13145}"/>
               </a:ext>
             </a:extLst>
           </p:cNvPr>
@@ -9688,7 +9688,7 @@
     </p:spTree>
     <p:extLst>
       <p:ext uri="{BB962C8B-B14F-4D97-AF65-F5344CB8AC3E}">
-        <p14:creationId xmlns:p14="http://schemas.microsoft.com/office/powerpoint/2010/main" val="3587044601"/>
+        <p14:creationId xmlns:p14="http://schemas.microsoft.com/office/powerpoint/2010/main" val="308312630"/>
       </p:ext>
     </p:extLst>
   </p:cSld>
@@ -9720,7 +9720,7 @@
           <p:cNvPr id="7" name="creative_background">
             <a:extLst>
               <a:ext uri="{FF2B5EF4-FFF2-40B4-BE49-F238E27FC236}">
-                <a16:creationId xmlns:a16="http://schemas.microsoft.com/office/drawing/2014/main" id="{1249BB3A-C49D-262B-7100-CF0EE8F8D5C8}"/>
+                <a16:creationId xmlns:a16="http://schemas.microsoft.com/office/drawing/2014/main" id="{9FAAB64A-3515-1F31-A7CD-3A3E025803CF}"/>
               </a:ext>
             </a:extLst>
           </p:cNvPr>
@@ -9793,7 +9793,7 @@
           <a:bodyPr/>
           <a:lstStyle/>
           <a:p>
-            <a:fld id="{F38275E8-7EFC-4FEA-BF4C-11F280B3D894}" type="datetimeFigureOut">
+            <a:fld id="{C5143365-16B3-4FD5-8BF7-F05E2AA1930B}" type="datetimeFigureOut">
               <a:rPr lang="en-US" smtClean="0"/>
               <a:t>10/3/2026</a:t>
             </a:fld>
@@ -9835,7 +9835,7 @@
           <a:bodyPr/>
           <a:lstStyle/>
           <a:p>
-            <a:fld id="{460DAC5E-8076-4A1F-9E2B-43FC1CE1F208}" type="slidenum">
+            <a:fld id="{4562F234-49D9-48C6-80E0-9B9318BCC5E8}" type="slidenum">
               <a:rPr lang="en-US" smtClean="0"/>
               <a:t>‹#›</a:t>
             </a:fld>
@@ -9848,7 +9848,7 @@
           <p:cNvPr id="8" name="decisions_title">
             <a:extLst>
               <a:ext uri="{FF2B5EF4-FFF2-40B4-BE49-F238E27FC236}">
-                <a16:creationId xmlns:a16="http://schemas.microsoft.com/office/drawing/2014/main" id="{0566C5CC-F6FE-7FC9-EF36-223C5909ECDD}"/>
+                <a16:creationId xmlns:a16="http://schemas.microsoft.com/office/drawing/2014/main" id="{567CED38-3FA3-8A39-0339-F519E3A633C2}"/>
               </a:ext>
             </a:extLst>
           </p:cNvPr>
@@ -9898,7 +9898,7 @@
           <p:cNvPr id="9" name="decisions">
             <a:extLst>
               <a:ext uri="{FF2B5EF4-FFF2-40B4-BE49-F238E27FC236}">
-                <a16:creationId xmlns:a16="http://schemas.microsoft.com/office/drawing/2014/main" id="{312C9B35-49B7-4316-5A4D-08C295C4A2C4}"/>
+                <a16:creationId xmlns:a16="http://schemas.microsoft.com/office/drawing/2014/main" id="{ED672CB5-E9F2-E068-996B-184FFBF101CC}"/>
               </a:ext>
             </a:extLst>
           </p:cNvPr>
@@ -9941,7 +9941,7 @@
           <p:cNvPr id="10" name="item_1_title">
             <a:extLst>
               <a:ext uri="{FF2B5EF4-FFF2-40B4-BE49-F238E27FC236}">
-                <a16:creationId xmlns:a16="http://schemas.microsoft.com/office/drawing/2014/main" id="{839A4902-A33F-AE8B-DB84-BA236258A704}"/>
+                <a16:creationId xmlns:a16="http://schemas.microsoft.com/office/drawing/2014/main" id="{64C6330E-78D2-CF38-B620-E44634F97162}"/>
               </a:ext>
             </a:extLst>
           </p:cNvPr>
@@ -9994,7 +9994,7 @@
           <p:cNvPr id="11" name="item_1">
             <a:extLst>
               <a:ext uri="{FF2B5EF4-FFF2-40B4-BE49-F238E27FC236}">
-                <a16:creationId xmlns:a16="http://schemas.microsoft.com/office/drawing/2014/main" id="{7D927320-B99E-CA71-7D12-F1945293E82E}"/>
+                <a16:creationId xmlns:a16="http://schemas.microsoft.com/office/drawing/2014/main" id="{68D32054-AC80-2EC9-EAFE-F0E698D3E318}"/>
               </a:ext>
             </a:extLst>
           </p:cNvPr>
@@ -10042,7 +10042,7 @@
           <p:cNvPr id="12" name="item_2_title">
             <a:extLst>
               <a:ext uri="{FF2B5EF4-FFF2-40B4-BE49-F238E27FC236}">
-                <a16:creationId xmlns:a16="http://schemas.microsoft.com/office/drawing/2014/main" id="{C11B63CF-7EE5-D146-4358-02334CF241E0}"/>
+                <a16:creationId xmlns:a16="http://schemas.microsoft.com/office/drawing/2014/main" id="{6C61CE00-A9E3-B870-9A55-F711F991ADE6}"/>
               </a:ext>
             </a:extLst>
           </p:cNvPr>
@@ -10095,7 +10095,7 @@
           <p:cNvPr id="13" name="item_2">
             <a:extLst>
               <a:ext uri="{FF2B5EF4-FFF2-40B4-BE49-F238E27FC236}">
-                <a16:creationId xmlns:a16="http://schemas.microsoft.com/office/drawing/2014/main" id="{BA58624B-2E8B-2636-DB53-E7B5487A7D6E}"/>
+                <a16:creationId xmlns:a16="http://schemas.microsoft.com/office/drawing/2014/main" id="{FFF2F845-D594-9B20-15AD-79062B409146}"/>
               </a:ext>
             </a:extLst>
           </p:cNvPr>
@@ -10143,7 +10143,7 @@
           <p:cNvPr id="14" name="item_3_title">
             <a:extLst>
               <a:ext uri="{FF2B5EF4-FFF2-40B4-BE49-F238E27FC236}">
-                <a16:creationId xmlns:a16="http://schemas.microsoft.com/office/drawing/2014/main" id="{17E23A53-40F8-F0B0-EEC2-0480BA9176CE}"/>
+                <a16:creationId xmlns:a16="http://schemas.microsoft.com/office/drawing/2014/main" id="{BCBCD226-0FCB-142A-369F-A46B67F3D191}"/>
               </a:ext>
             </a:extLst>
           </p:cNvPr>
@@ -10196,7 +10196,7 @@
           <p:cNvPr id="15" name="item_3">
             <a:extLst>
               <a:ext uri="{FF2B5EF4-FFF2-40B4-BE49-F238E27FC236}">
-                <a16:creationId xmlns:a16="http://schemas.microsoft.com/office/drawing/2014/main" id="{33D3FF8C-A5BB-CF81-5CE7-0F2E7923284E}"/>
+                <a16:creationId xmlns:a16="http://schemas.microsoft.com/office/drawing/2014/main" id="{D02C46EC-596A-6DB7-D665-C61ABDAF9BE6}"/>
               </a:ext>
             </a:extLst>
           </p:cNvPr>
@@ -10244,7 +10244,7 @@
           <p:cNvPr id="16" name="source">
             <a:extLst>
               <a:ext uri="{FF2B5EF4-FFF2-40B4-BE49-F238E27FC236}">
-                <a16:creationId xmlns:a16="http://schemas.microsoft.com/office/drawing/2014/main" id="{4A6BDEB6-7578-3A71-D3EC-8BAC6EFCD951}"/>
+                <a16:creationId xmlns:a16="http://schemas.microsoft.com/office/drawing/2014/main" id="{7603F477-B4B7-5250-2882-597307BF0FFD}"/>
               </a:ext>
             </a:extLst>
           </p:cNvPr>
@@ -10299,7 +10299,7 @@
     </p:spTree>
     <p:extLst>
       <p:ext uri="{BB962C8B-B14F-4D97-AF65-F5344CB8AC3E}">
-        <p14:creationId xmlns:p14="http://schemas.microsoft.com/office/powerpoint/2010/main" val="2095909934"/>
+        <p14:creationId xmlns:p14="http://schemas.microsoft.com/office/powerpoint/2010/main" val="918622883"/>
       </p:ext>
     </p:extLst>
   </p:cSld>
@@ -10331,7 +10331,7 @@
           <p:cNvPr id="7" name="creative_background">
             <a:extLst>
               <a:ext uri="{FF2B5EF4-FFF2-40B4-BE49-F238E27FC236}">
-                <a16:creationId xmlns:a16="http://schemas.microsoft.com/office/drawing/2014/main" id="{9156C71B-051E-A5C9-0472-986798FB1E58}"/>
+                <a16:creationId xmlns:a16="http://schemas.microsoft.com/office/drawing/2014/main" id="{8EEB32D3-BF06-9F93-B936-E15752D82CAF}"/>
               </a:ext>
             </a:extLst>
           </p:cNvPr>
@@ -10404,7 +10404,7 @@
           <a:bodyPr/>
           <a:lstStyle/>
           <a:p>
-            <a:fld id="{F38275E8-7EFC-4FEA-BF4C-11F280B3D894}" type="datetimeFigureOut">
+            <a:fld id="{C5143365-16B3-4FD5-8BF7-F05E2AA1930B}" type="datetimeFigureOut">
               <a:rPr lang="en-US" smtClean="0"/>
               <a:t>10/3/2026</a:t>
             </a:fld>
@@ -10446,7 +10446,7 @@
           <a:bodyPr/>
           <a:lstStyle/>
           <a:p>
-            <a:fld id="{460DAC5E-8076-4A1F-9E2B-43FC1CE1F208}" type="slidenum">
+            <a:fld id="{4562F234-49D9-48C6-80E0-9B9318BCC5E8}" type="slidenum">
               <a:rPr lang="en-US" smtClean="0"/>
               <a:t>‹#›</a:t>
             </a:fld>
@@ -10459,7 +10459,7 @@
           <p:cNvPr id="8" name="body">
             <a:extLst>
               <a:ext uri="{FF2B5EF4-FFF2-40B4-BE49-F238E27FC236}">
-                <a16:creationId xmlns:a16="http://schemas.microsoft.com/office/drawing/2014/main" id="{CE48D1C3-42B0-8EFE-7CD0-6D6A582F39AF}"/>
+                <a16:creationId xmlns:a16="http://schemas.microsoft.com/office/drawing/2014/main" id="{16E2C3C1-EEF7-AA0C-9A24-DC536A8A362E}"/>
               </a:ext>
             </a:extLst>
           </p:cNvPr>
@@ -10499,7 +10499,7 @@
           <p:cNvPr id="9" name="kpi_value_1">
             <a:extLst>
               <a:ext uri="{FF2B5EF4-FFF2-40B4-BE49-F238E27FC236}">
-                <a16:creationId xmlns:a16="http://schemas.microsoft.com/office/drawing/2014/main" id="{52A59787-A1E4-A581-06C3-05A9DC5DD737}"/>
+                <a16:creationId xmlns:a16="http://schemas.microsoft.com/office/drawing/2014/main" id="{1F32D3ED-0EF4-9C75-30BB-1EF5F36357C1}"/>
               </a:ext>
             </a:extLst>
           </p:cNvPr>
@@ -10552,7 +10552,7 @@
           <p:cNvPr id="10" name="kpi_label_1">
             <a:extLst>
               <a:ext uri="{FF2B5EF4-FFF2-40B4-BE49-F238E27FC236}">
-                <a16:creationId xmlns:a16="http://schemas.microsoft.com/office/drawing/2014/main" id="{8437AA18-D703-5A90-9A9C-3E96CBD22A98}"/>
+                <a16:creationId xmlns:a16="http://schemas.microsoft.com/office/drawing/2014/main" id="{82DBB217-28EF-2E3F-E205-F163B005C2D9}"/>
               </a:ext>
             </a:extLst>
           </p:cNvPr>
@@ -10600,7 +10600,7 @@
           <p:cNvPr id="11" name="kpi_value_2">
             <a:extLst>
               <a:ext uri="{FF2B5EF4-FFF2-40B4-BE49-F238E27FC236}">
-                <a16:creationId xmlns:a16="http://schemas.microsoft.com/office/drawing/2014/main" id="{3164CAA7-19BE-689B-E486-D8596BDCD632}"/>
+                <a16:creationId xmlns:a16="http://schemas.microsoft.com/office/drawing/2014/main" id="{29DC681B-D985-10AE-AB4E-D0AF987C50CA}"/>
               </a:ext>
             </a:extLst>
           </p:cNvPr>
@@ -10653,7 +10653,7 @@
           <p:cNvPr id="12" name="kpi_label_2">
             <a:extLst>
               <a:ext uri="{FF2B5EF4-FFF2-40B4-BE49-F238E27FC236}">
-                <a16:creationId xmlns:a16="http://schemas.microsoft.com/office/drawing/2014/main" id="{2EAF2B8D-AEAC-5247-BF6C-EFAB5DAC5710}"/>
+                <a16:creationId xmlns:a16="http://schemas.microsoft.com/office/drawing/2014/main" id="{F8D2996B-52CD-69FF-67AD-A90E61D44E0E}"/>
               </a:ext>
             </a:extLst>
           </p:cNvPr>
@@ -10701,7 +10701,7 @@
           <p:cNvPr id="13" name="source">
             <a:extLst>
               <a:ext uri="{FF2B5EF4-FFF2-40B4-BE49-F238E27FC236}">
-                <a16:creationId xmlns:a16="http://schemas.microsoft.com/office/drawing/2014/main" id="{9C24DBC3-F717-FF62-9A12-4A4A6ACB4D68}"/>
+                <a16:creationId xmlns:a16="http://schemas.microsoft.com/office/drawing/2014/main" id="{84B817FE-0A43-2424-55E5-4901D925C8BE}"/>
               </a:ext>
             </a:extLst>
           </p:cNvPr>
@@ -10756,7 +10756,7 @@
     </p:spTree>
     <p:extLst>
       <p:ext uri="{BB962C8B-B14F-4D97-AF65-F5344CB8AC3E}">
-        <p14:creationId xmlns:p14="http://schemas.microsoft.com/office/powerpoint/2010/main" val="2852995011"/>
+        <p14:creationId xmlns:p14="http://schemas.microsoft.com/office/powerpoint/2010/main" val="2802228996"/>
       </p:ext>
     </p:extLst>
   </p:cSld>
@@ -10788,7 +10788,7 @@
           <p:cNvPr id="7" name="creative_background">
             <a:extLst>
               <a:ext uri="{FF2B5EF4-FFF2-40B4-BE49-F238E27FC236}">
-                <a16:creationId xmlns:a16="http://schemas.microsoft.com/office/drawing/2014/main" id="{92BE5FAC-F722-C766-612D-774DCEC6F4CF}"/>
+                <a16:creationId xmlns:a16="http://schemas.microsoft.com/office/drawing/2014/main" id="{2AAEC7AE-FE07-ED65-8D8B-6A9944E389F2}"/>
               </a:ext>
             </a:extLst>
           </p:cNvPr>
@@ -10861,7 +10861,7 @@
           <a:bodyPr/>
           <a:lstStyle/>
           <a:p>
-            <a:fld id="{F38275E8-7EFC-4FEA-BF4C-11F280B3D894}" type="datetimeFigureOut">
+            <a:fld id="{C5143365-16B3-4FD5-8BF7-F05E2AA1930B}" type="datetimeFigureOut">
               <a:rPr lang="en-US" smtClean="0"/>
               <a:t>10/3/2026</a:t>
             </a:fld>
@@ -10903,7 +10903,7 @@
           <a:bodyPr/>
           <a:lstStyle/>
           <a:p>
-            <a:fld id="{460DAC5E-8076-4A1F-9E2B-43FC1CE1F208}" type="slidenum">
+            <a:fld id="{4562F234-49D9-48C6-80E0-9B9318BCC5E8}" type="slidenum">
               <a:rPr lang="en-US" smtClean="0"/>
               <a:t>‹#›</a:t>
             </a:fld>
@@ -10916,7 +10916,7 @@
           <p:cNvPr id="8" name="body">
             <a:extLst>
               <a:ext uri="{FF2B5EF4-FFF2-40B4-BE49-F238E27FC236}">
-                <a16:creationId xmlns:a16="http://schemas.microsoft.com/office/drawing/2014/main" id="{0EB36F06-8658-E027-F5BD-0E10D7271B96}"/>
+                <a16:creationId xmlns:a16="http://schemas.microsoft.com/office/drawing/2014/main" id="{67A27D39-3845-7ADE-C589-4D56ED845F77}"/>
               </a:ext>
             </a:extLst>
           </p:cNvPr>
@@ -10956,7 +10956,7 @@
           <p:cNvPr id="9" name="kpi_value_1">
             <a:extLst>
               <a:ext uri="{FF2B5EF4-FFF2-40B4-BE49-F238E27FC236}">
-                <a16:creationId xmlns:a16="http://schemas.microsoft.com/office/drawing/2014/main" id="{1E4592C5-2B57-FF05-8DA7-7E6F2DACC6DF}"/>
+                <a16:creationId xmlns:a16="http://schemas.microsoft.com/office/drawing/2014/main" id="{0F03BC35-E399-BFAF-C0EE-6249EABBE9D2}"/>
               </a:ext>
             </a:extLst>
           </p:cNvPr>
@@ -11009,7 +11009,7 @@
           <p:cNvPr id="10" name="kpi_label_1">
             <a:extLst>
               <a:ext uri="{FF2B5EF4-FFF2-40B4-BE49-F238E27FC236}">
-                <a16:creationId xmlns:a16="http://schemas.microsoft.com/office/drawing/2014/main" id="{1E73EEEE-0F4A-DD76-138C-9D8C9F27FBA3}"/>
+                <a16:creationId xmlns:a16="http://schemas.microsoft.com/office/drawing/2014/main" id="{25DC097A-2D72-AF12-2251-56537428D13A}"/>
               </a:ext>
             </a:extLst>
           </p:cNvPr>
@@ -11057,7 +11057,7 @@
           <p:cNvPr id="11" name="kpi_value_2">
             <a:extLst>
               <a:ext uri="{FF2B5EF4-FFF2-40B4-BE49-F238E27FC236}">
-                <a16:creationId xmlns:a16="http://schemas.microsoft.com/office/drawing/2014/main" id="{9D3684ED-B013-DAA4-38FB-651A6B05F6C2}"/>
+                <a16:creationId xmlns:a16="http://schemas.microsoft.com/office/drawing/2014/main" id="{D278D625-7A8A-0496-F7CE-61C2275C84C8}"/>
               </a:ext>
             </a:extLst>
           </p:cNvPr>
@@ -11110,7 +11110,7 @@
           <p:cNvPr id="12" name="kpi_label_2">
             <a:extLst>
               <a:ext uri="{FF2B5EF4-FFF2-40B4-BE49-F238E27FC236}">
-                <a16:creationId xmlns:a16="http://schemas.microsoft.com/office/drawing/2014/main" id="{7DF37C12-D01A-73BD-6996-66F0E39E79CA}"/>
+                <a16:creationId xmlns:a16="http://schemas.microsoft.com/office/drawing/2014/main" id="{CFE32785-381E-63F3-EFA5-A1CCAB83F9C2}"/>
               </a:ext>
             </a:extLst>
           </p:cNvPr>
@@ -11158,7 +11158,7 @@
           <p:cNvPr id="13" name="kpi_value_3">
             <a:extLst>
               <a:ext uri="{FF2B5EF4-FFF2-40B4-BE49-F238E27FC236}">
-                <a16:creationId xmlns:a16="http://schemas.microsoft.com/office/drawing/2014/main" id="{B984EFA3-59A3-65D9-333D-75553015A3AB}"/>
+                <a16:creationId xmlns:a16="http://schemas.microsoft.com/office/drawing/2014/main" id="{37285405-63D0-AC1C-DB50-E17EDEE55AF2}"/>
               </a:ext>
             </a:extLst>
           </p:cNvPr>
@@ -11211,7 +11211,7 @@
           <p:cNvPr id="14" name="kpi_label_3">
             <a:extLst>
               <a:ext uri="{FF2B5EF4-FFF2-40B4-BE49-F238E27FC236}">
-                <a16:creationId xmlns:a16="http://schemas.microsoft.com/office/drawing/2014/main" id="{5EEE1498-26D7-88FF-A429-7E8BC187FE50}"/>
+                <a16:creationId xmlns:a16="http://schemas.microsoft.com/office/drawing/2014/main" id="{78822D12-A9E7-217D-050F-FDF944C0726A}"/>
               </a:ext>
             </a:extLst>
           </p:cNvPr>
@@ -11259,7 +11259,7 @@
           <p:cNvPr id="15" name="kpi_value_4">
             <a:extLst>
               <a:ext uri="{FF2B5EF4-FFF2-40B4-BE49-F238E27FC236}">
-                <a16:creationId xmlns:a16="http://schemas.microsoft.com/office/drawing/2014/main" id="{351DF105-F941-1931-C67A-221D1391B13F}"/>
+                <a16:creationId xmlns:a16="http://schemas.microsoft.com/office/drawing/2014/main" id="{AE2C5296-E2C6-CB6A-5AF7-893510E618E2}"/>
               </a:ext>
             </a:extLst>
           </p:cNvPr>
@@ -11312,7 +11312,7 @@
           <p:cNvPr id="16" name="kpi_label_4">
             <a:extLst>
               <a:ext uri="{FF2B5EF4-FFF2-40B4-BE49-F238E27FC236}">
-                <a16:creationId xmlns:a16="http://schemas.microsoft.com/office/drawing/2014/main" id="{A3FA7786-8F6F-D0FC-5A09-7D73487CEA21}"/>
+                <a16:creationId xmlns:a16="http://schemas.microsoft.com/office/drawing/2014/main" id="{90DC6C12-9C42-5E68-7474-214838BA41CA}"/>
               </a:ext>
             </a:extLst>
           </p:cNvPr>
@@ -11360,7 +11360,7 @@
           <p:cNvPr id="17" name="source">
             <a:extLst>
               <a:ext uri="{FF2B5EF4-FFF2-40B4-BE49-F238E27FC236}">
-                <a16:creationId xmlns:a16="http://schemas.microsoft.com/office/drawing/2014/main" id="{97600D8C-A076-C82C-0921-BB6C9F979C64}"/>
+                <a16:creationId xmlns:a16="http://schemas.microsoft.com/office/drawing/2014/main" id="{C7EE5A61-ACFF-BF59-DD57-7DB54AEFE843}"/>
               </a:ext>
             </a:extLst>
           </p:cNvPr>
@@ -11415,7 +11415,7 @@
     </p:spTree>
     <p:extLst>
       <p:ext uri="{BB962C8B-B14F-4D97-AF65-F5344CB8AC3E}">
-        <p14:creationId xmlns:p14="http://schemas.microsoft.com/office/powerpoint/2010/main" val="2303401222"/>
+        <p14:creationId xmlns:p14="http://schemas.microsoft.com/office/powerpoint/2010/main" val="1819556731"/>
       </p:ext>
     </p:extLst>
   </p:cSld>
@@ -11447,7 +11447,7 @@
           <p:cNvPr id="7" name="creative_background">
             <a:extLst>
               <a:ext uri="{FF2B5EF4-FFF2-40B4-BE49-F238E27FC236}">
-                <a16:creationId xmlns:a16="http://schemas.microsoft.com/office/drawing/2014/main" id="{BB0137B3-F486-F7BF-9D6D-0A37CBE3319E}"/>
+                <a16:creationId xmlns:a16="http://schemas.microsoft.com/office/drawing/2014/main" id="{7AEE068B-E9DC-6250-95E5-F98FA862C928}"/>
               </a:ext>
             </a:extLst>
           </p:cNvPr>
@@ -11520,7 +11520,7 @@
           <a:bodyPr/>
           <a:lstStyle/>
           <a:p>
-            <a:fld id="{F38275E8-7EFC-4FEA-BF4C-11F280B3D894}" type="datetimeFigureOut">
+            <a:fld id="{C5143365-16B3-4FD5-8BF7-F05E2AA1930B}" type="datetimeFigureOut">
               <a:rPr lang="en-US" smtClean="0"/>
               <a:t>10/3/2026</a:t>
             </a:fld>
@@ -11562,7 +11562,7 @@
           <a:bodyPr/>
           <a:lstStyle/>
           <a:p>
-            <a:fld id="{460DAC5E-8076-4A1F-9E2B-43FC1CE1F208}" type="slidenum">
+            <a:fld id="{4562F234-49D9-48C6-80E0-9B9318BCC5E8}" type="slidenum">
               <a:rPr lang="en-US" smtClean="0"/>
               <a:t>‹#›</a:t>
             </a:fld>
@@ -11575,7 +11575,7 @@
           <p:cNvPr id="8" name="body">
             <a:extLst>
               <a:ext uri="{FF2B5EF4-FFF2-40B4-BE49-F238E27FC236}">
-                <a16:creationId xmlns:a16="http://schemas.microsoft.com/office/drawing/2014/main" id="{660AC3A9-FAB7-3C8F-65D3-28448296C616}"/>
+                <a16:creationId xmlns:a16="http://schemas.microsoft.com/office/drawing/2014/main" id="{66D6FE21-E1EE-C45A-677D-018B4D4957CE}"/>
               </a:ext>
             </a:extLst>
           </p:cNvPr>
@@ -11615,7 +11615,7 @@
           <p:cNvPr id="9" name="quote">
             <a:extLst>
               <a:ext uri="{FF2B5EF4-FFF2-40B4-BE49-F238E27FC236}">
-                <a16:creationId xmlns:a16="http://schemas.microsoft.com/office/drawing/2014/main" id="{DCD8C3E2-B4BD-106B-BCC0-C939E3914CD9}"/>
+                <a16:creationId xmlns:a16="http://schemas.microsoft.com/office/drawing/2014/main" id="{F66F4FD4-47BE-F58F-2267-B0D30F3BFEC0}"/>
               </a:ext>
             </a:extLst>
           </p:cNvPr>
@@ -11665,7 +11665,7 @@
           <p:cNvPr id="10" name="attribution">
             <a:extLst>
               <a:ext uri="{FF2B5EF4-FFF2-40B4-BE49-F238E27FC236}">
-                <a16:creationId xmlns:a16="http://schemas.microsoft.com/office/drawing/2014/main" id="{89B87261-F8E4-404F-27F3-CBDCF80B4ED5}"/>
+                <a16:creationId xmlns:a16="http://schemas.microsoft.com/office/drawing/2014/main" id="{DAEBACF1-8253-ABDD-1A4E-7A0ED9EA0428}"/>
               </a:ext>
             </a:extLst>
           </p:cNvPr>
@@ -11713,7 +11713,7 @@
           <p:cNvPr id="11" name="source">
             <a:extLst>
               <a:ext uri="{FF2B5EF4-FFF2-40B4-BE49-F238E27FC236}">
-                <a16:creationId xmlns:a16="http://schemas.microsoft.com/office/drawing/2014/main" id="{5D7C78B7-D376-5251-24E5-7038A97CF42F}"/>
+                <a16:creationId xmlns:a16="http://schemas.microsoft.com/office/drawing/2014/main" id="{A1572442-133E-E6D6-C1B8-687F81578C86}"/>
               </a:ext>
             </a:extLst>
           </p:cNvPr>
@@ -11768,7 +11768,7 @@
     </p:spTree>
     <p:extLst>
       <p:ext uri="{BB962C8B-B14F-4D97-AF65-F5344CB8AC3E}">
-        <p14:creationId xmlns:p14="http://schemas.microsoft.com/office/powerpoint/2010/main" val="820613328"/>
+        <p14:creationId xmlns:p14="http://schemas.microsoft.com/office/powerpoint/2010/main" val="2816106941"/>
       </p:ext>
     </p:extLst>
   </p:cSld>
@@ -11800,7 +11800,7 @@
           <p:cNvPr id="7" name="creative_background">
             <a:extLst>
               <a:ext uri="{FF2B5EF4-FFF2-40B4-BE49-F238E27FC236}">
-                <a16:creationId xmlns:a16="http://schemas.microsoft.com/office/drawing/2014/main" id="{89DB1A54-1D0A-E534-EEC4-C937807462AE}"/>
+                <a16:creationId xmlns:a16="http://schemas.microsoft.com/office/drawing/2014/main" id="{F7DD51C4-4B97-4292-DF2D-AEB2D1646ACC}"/>
               </a:ext>
             </a:extLst>
           </p:cNvPr>
@@ -11873,7 +11873,7 @@
           <a:bodyPr/>
           <a:lstStyle/>
           <a:p>
-            <a:fld id="{F38275E8-7EFC-4FEA-BF4C-11F280B3D894}" type="datetimeFigureOut">
+            <a:fld id="{C5143365-16B3-4FD5-8BF7-F05E2AA1930B}" type="datetimeFigureOut">
               <a:rPr lang="en-US" smtClean="0"/>
               <a:t>10/3/2026</a:t>
             </a:fld>
@@ -11915,7 +11915,7 @@
           <a:bodyPr/>
           <a:lstStyle/>
           <a:p>
-            <a:fld id="{460DAC5E-8076-4A1F-9E2B-43FC1CE1F208}" type="slidenum">
+            <a:fld id="{4562F234-49D9-48C6-80E0-9B9318BCC5E8}" type="slidenum">
               <a:rPr lang="en-US" smtClean="0"/>
               <a:t>‹#›</a:t>
             </a:fld>
@@ -11928,7 +11928,7 @@
           <p:cNvPr id="8" name="item_1_title">
             <a:extLst>
               <a:ext uri="{FF2B5EF4-FFF2-40B4-BE49-F238E27FC236}">
-                <a16:creationId xmlns:a16="http://schemas.microsoft.com/office/drawing/2014/main" id="{47B6EBBD-0CC1-06B8-94CC-18302632AD05}"/>
+                <a16:creationId xmlns:a16="http://schemas.microsoft.com/office/drawing/2014/main" id="{E1C32A14-F63E-5E73-6903-B72D6F3E5072}"/>
               </a:ext>
             </a:extLst>
           </p:cNvPr>
@@ -11978,7 +11978,7 @@
           <p:cNvPr id="9" name="item_1">
             <a:extLst>
               <a:ext uri="{FF2B5EF4-FFF2-40B4-BE49-F238E27FC236}">
-                <a16:creationId xmlns:a16="http://schemas.microsoft.com/office/drawing/2014/main" id="{1BF31955-3C4C-9822-5314-226468EE8375}"/>
+                <a16:creationId xmlns:a16="http://schemas.microsoft.com/office/drawing/2014/main" id="{606F0FAC-B414-F765-2EB4-ED02C951C54B}"/>
               </a:ext>
             </a:extLst>
           </p:cNvPr>
@@ -12026,7 +12026,7 @@
           <p:cNvPr id="10" name="item_2_title">
             <a:extLst>
               <a:ext uri="{FF2B5EF4-FFF2-40B4-BE49-F238E27FC236}">
-                <a16:creationId xmlns:a16="http://schemas.microsoft.com/office/drawing/2014/main" id="{5F2AB129-6635-8B40-EBD3-EF4F510F9C2C}"/>
+                <a16:creationId xmlns:a16="http://schemas.microsoft.com/office/drawing/2014/main" id="{366F39D2-D8D8-AD92-D0C1-B32E07A7F46B}"/>
               </a:ext>
             </a:extLst>
           </p:cNvPr>
@@ -12079,7 +12079,7 @@
           <p:cNvPr id="11" name="item_2">
             <a:extLst>
               <a:ext uri="{FF2B5EF4-FFF2-40B4-BE49-F238E27FC236}">
-                <a16:creationId xmlns:a16="http://schemas.microsoft.com/office/drawing/2014/main" id="{104152CF-CFBD-45CC-5325-CE98C90FF67E}"/>
+                <a16:creationId xmlns:a16="http://schemas.microsoft.com/office/drawing/2014/main" id="{F0ABEC10-E977-4FE4-67A0-BCDB0F4FAF93}"/>
               </a:ext>
             </a:extLst>
           </p:cNvPr>
@@ -12127,7 +12127,7 @@
           <p:cNvPr id="12" name="item_3_title">
             <a:extLst>
               <a:ext uri="{FF2B5EF4-FFF2-40B4-BE49-F238E27FC236}">
-                <a16:creationId xmlns:a16="http://schemas.microsoft.com/office/drawing/2014/main" id="{173FAFD0-8A9A-2D20-DD45-99F96A6E94C2}"/>
+                <a16:creationId xmlns:a16="http://schemas.microsoft.com/office/drawing/2014/main" id="{C3681101-C70F-DB4D-4116-1CB0EDEEA051}"/>
               </a:ext>
             </a:extLst>
           </p:cNvPr>
@@ -12180,7 +12180,7 @@
           <p:cNvPr id="13" name="item_3">
             <a:extLst>
               <a:ext uri="{FF2B5EF4-FFF2-40B4-BE49-F238E27FC236}">
-                <a16:creationId xmlns:a16="http://schemas.microsoft.com/office/drawing/2014/main" id="{3FC6AA54-F1CE-3AEC-153C-260431262E41}"/>
+                <a16:creationId xmlns:a16="http://schemas.microsoft.com/office/drawing/2014/main" id="{DCD3C534-B37B-19A8-A299-4F12D4B8CBC0}"/>
               </a:ext>
             </a:extLst>
           </p:cNvPr>
@@ -12228,7 +12228,7 @@
           <p:cNvPr id="14" name="source">
             <a:extLst>
               <a:ext uri="{FF2B5EF4-FFF2-40B4-BE49-F238E27FC236}">
-                <a16:creationId xmlns:a16="http://schemas.microsoft.com/office/drawing/2014/main" id="{1904BB3A-151B-B89A-EC95-514CC0FB07D2}"/>
+                <a16:creationId xmlns:a16="http://schemas.microsoft.com/office/drawing/2014/main" id="{82EC865A-A8A5-C330-0C0F-6035D7D17F86}"/>
               </a:ext>
             </a:extLst>
           </p:cNvPr>
@@ -12283,7 +12283,7 @@
     </p:spTree>
     <p:extLst>
       <p:ext uri="{BB962C8B-B14F-4D97-AF65-F5344CB8AC3E}">
-        <p14:creationId xmlns:p14="http://schemas.microsoft.com/office/powerpoint/2010/main" val="1363175121"/>
+        <p14:creationId xmlns:p14="http://schemas.microsoft.com/office/powerpoint/2010/main" val="1782534178"/>
       </p:ext>
     </p:extLst>
   </p:cSld>
@@ -12315,7 +12315,7 @@
           <p:cNvPr id="7" name="creative_background">
             <a:extLst>
               <a:ext uri="{FF2B5EF4-FFF2-40B4-BE49-F238E27FC236}">
-                <a16:creationId xmlns:a16="http://schemas.microsoft.com/office/drawing/2014/main" id="{8DF95C9A-6014-3460-7A31-CA40DF316A26}"/>
+                <a16:creationId xmlns:a16="http://schemas.microsoft.com/office/drawing/2014/main" id="{75689574-D724-4FBA-37E5-EDD7CC188BAB}"/>
               </a:ext>
             </a:extLst>
           </p:cNvPr>
@@ -12388,7 +12388,7 @@
           <a:bodyPr/>
           <a:lstStyle/>
           <a:p>
-            <a:fld id="{F38275E8-7EFC-4FEA-BF4C-11F280B3D894}" type="datetimeFigureOut">
+            <a:fld id="{C5143365-16B3-4FD5-8BF7-F05E2AA1930B}" type="datetimeFigureOut">
               <a:rPr lang="en-US" smtClean="0"/>
               <a:t>10/3/2026</a:t>
             </a:fld>
@@ -12430,7 +12430,7 @@
           <a:bodyPr/>
           <a:lstStyle/>
           <a:p>
-            <a:fld id="{460DAC5E-8076-4A1F-9E2B-43FC1CE1F208}" type="slidenum">
+            <a:fld id="{4562F234-49D9-48C6-80E0-9B9318BCC5E8}" type="slidenum">
               <a:rPr lang="en-US" smtClean="0"/>
               <a:t>‹#›</a:t>
             </a:fld>
@@ -12443,7 +12443,7 @@
           <p:cNvPr id="8" name="item_1_title">
             <a:extLst>
               <a:ext uri="{FF2B5EF4-FFF2-40B4-BE49-F238E27FC236}">
-                <a16:creationId xmlns:a16="http://schemas.microsoft.com/office/drawing/2014/main" id="{036EBEE5-B01F-A03F-5CB6-1BCD45D74600}"/>
+                <a16:creationId xmlns:a16="http://schemas.microsoft.com/office/drawing/2014/main" id="{805BE4B2-12E9-14A8-8941-1308C0295949}"/>
               </a:ext>
             </a:extLst>
           </p:cNvPr>
@@ -12493,7 +12493,7 @@
           <p:cNvPr id="9" name="item_1">
             <a:extLst>
               <a:ext uri="{FF2B5EF4-FFF2-40B4-BE49-F238E27FC236}">
-                <a16:creationId xmlns:a16="http://schemas.microsoft.com/office/drawing/2014/main" id="{596438E9-40A1-07CF-84BB-33A150CF9C5A}"/>
+                <a16:creationId xmlns:a16="http://schemas.microsoft.com/office/drawing/2014/main" id="{90B4F4CD-D251-8926-5B22-460A2EDC5008}"/>
               </a:ext>
             </a:extLst>
           </p:cNvPr>
@@ -12541,7 +12541,7 @@
           <p:cNvPr id="10" name="item_2_title">
             <a:extLst>
               <a:ext uri="{FF2B5EF4-FFF2-40B4-BE49-F238E27FC236}">
-                <a16:creationId xmlns:a16="http://schemas.microsoft.com/office/drawing/2014/main" id="{818CE88D-AE0B-549B-2753-873BC0FED030}"/>
+                <a16:creationId xmlns:a16="http://schemas.microsoft.com/office/drawing/2014/main" id="{345FF389-2F4E-034B-A25B-D3346C5627A7}"/>
               </a:ext>
             </a:extLst>
           </p:cNvPr>
@@ -12594,7 +12594,7 @@
           <p:cNvPr id="11" name="item_2">
             <a:extLst>
               <a:ext uri="{FF2B5EF4-FFF2-40B4-BE49-F238E27FC236}">
-                <a16:creationId xmlns:a16="http://schemas.microsoft.com/office/drawing/2014/main" id="{AFEA8ED3-A6B2-3907-C2E5-2ADCC4B73033}"/>
+                <a16:creationId xmlns:a16="http://schemas.microsoft.com/office/drawing/2014/main" id="{1FBC510A-0A32-4030-6370-9BB5F1EAE36D}"/>
               </a:ext>
             </a:extLst>
           </p:cNvPr>
@@ -12642,7 +12642,7 @@
           <p:cNvPr id="12" name="source">
             <a:extLst>
               <a:ext uri="{FF2B5EF4-FFF2-40B4-BE49-F238E27FC236}">
-                <a16:creationId xmlns:a16="http://schemas.microsoft.com/office/drawing/2014/main" id="{0AC09C10-7414-81E4-1754-2F2636F165EB}"/>
+                <a16:creationId xmlns:a16="http://schemas.microsoft.com/office/drawing/2014/main" id="{638B585B-C1C6-9AD9-46B4-0A2FF0E9966B}"/>
               </a:ext>
             </a:extLst>
           </p:cNvPr>
@@ -12697,7 +12697,7 @@
     </p:spTree>
     <p:extLst>
       <p:ext uri="{BB962C8B-B14F-4D97-AF65-F5344CB8AC3E}">
-        <p14:creationId xmlns:p14="http://schemas.microsoft.com/office/powerpoint/2010/main" val="2593283559"/>
+        <p14:creationId xmlns:p14="http://schemas.microsoft.com/office/powerpoint/2010/main" val="3750105403"/>
       </p:ext>
     </p:extLst>
   </p:cSld>
@@ -12729,7 +12729,7 @@
           <p:cNvPr id="7" name="creative_background">
             <a:extLst>
               <a:ext uri="{FF2B5EF4-FFF2-40B4-BE49-F238E27FC236}">
-                <a16:creationId xmlns:a16="http://schemas.microsoft.com/office/drawing/2014/main" id="{6A48BD0A-3C13-9D36-FE9E-01D8CF833AD7}"/>
+                <a16:creationId xmlns:a16="http://schemas.microsoft.com/office/drawing/2014/main" id="{E60A5BB7-AAB8-C830-0F7D-B5966C71C201}"/>
               </a:ext>
             </a:extLst>
           </p:cNvPr>
@@ -12802,7 +12802,7 @@
           <a:bodyPr/>
           <a:lstStyle/>
           <a:p>
-            <a:fld id="{F38275E8-7EFC-4FEA-BF4C-11F280B3D894}" type="datetimeFigureOut">
+            <a:fld id="{C5143365-16B3-4FD5-8BF7-F05E2AA1930B}" type="datetimeFigureOut">
               <a:rPr lang="en-US" smtClean="0"/>
               <a:t>10/3/2026</a:t>
             </a:fld>
@@ -12844,7 +12844,7 @@
           <a:bodyPr/>
           <a:lstStyle/>
           <a:p>
-            <a:fld id="{460DAC5E-8076-4A1F-9E2B-43FC1CE1F208}" type="slidenum">
+            <a:fld id="{4562F234-49D9-48C6-80E0-9B9318BCC5E8}" type="slidenum">
               <a:rPr lang="en-US" smtClean="0"/>
               <a:t>‹#›</a:t>
             </a:fld>
@@ -12857,7 +12857,7 @@
           <p:cNvPr id="8" name="chart">
             <a:extLst>
               <a:ext uri="{FF2B5EF4-FFF2-40B4-BE49-F238E27FC236}">
-                <a16:creationId xmlns:a16="http://schemas.microsoft.com/office/drawing/2014/main" id="{0C50107B-A9CD-4A03-B511-B4400301A052}"/>
+                <a16:creationId xmlns:a16="http://schemas.microsoft.com/office/drawing/2014/main" id="{E5BA243A-8F90-99C4-6CE7-D300A02EA4CD}"/>
               </a:ext>
             </a:extLst>
           </p:cNvPr>
@@ -12887,7 +12887,7 @@
           <p:cNvPr id="9" name="body">
             <a:extLst>
               <a:ext uri="{FF2B5EF4-FFF2-40B4-BE49-F238E27FC236}">
-                <a16:creationId xmlns:a16="http://schemas.microsoft.com/office/drawing/2014/main" id="{E1F8BB1F-4B09-4B62-423A-182FD9625E26}"/>
+                <a16:creationId xmlns:a16="http://schemas.microsoft.com/office/drawing/2014/main" id="{9FAC5691-30DC-A6DF-068B-257DC59F8A51}"/>
               </a:ext>
             </a:extLst>
           </p:cNvPr>
@@ -12930,7 +12930,7 @@
           <p:cNvPr id="10" name="source">
             <a:extLst>
               <a:ext uri="{FF2B5EF4-FFF2-40B4-BE49-F238E27FC236}">
-                <a16:creationId xmlns:a16="http://schemas.microsoft.com/office/drawing/2014/main" id="{E9154A47-F523-CF04-40B8-94EEB40CC0AB}"/>
+                <a16:creationId xmlns:a16="http://schemas.microsoft.com/office/drawing/2014/main" id="{97000CB8-D0EC-1F5A-38F6-0A08695ABB18}"/>
               </a:ext>
             </a:extLst>
           </p:cNvPr>
@@ -12985,7 +12985,7 @@
     </p:spTree>
     <p:extLst>
       <p:ext uri="{BB962C8B-B14F-4D97-AF65-F5344CB8AC3E}">
-        <p14:creationId xmlns:p14="http://schemas.microsoft.com/office/powerpoint/2010/main" val="3260023881"/>
+        <p14:creationId xmlns:p14="http://schemas.microsoft.com/office/powerpoint/2010/main" val="4174584309"/>
       </p:ext>
     </p:extLst>
   </p:cSld>
@@ -13017,7 +13017,7 @@
           <p:cNvPr id="7" name="creative_background">
             <a:extLst>
               <a:ext uri="{FF2B5EF4-FFF2-40B4-BE49-F238E27FC236}">
-                <a16:creationId xmlns:a16="http://schemas.microsoft.com/office/drawing/2014/main" id="{2F86B7A3-C223-D655-D241-710ABAAC834E}"/>
+                <a16:creationId xmlns:a16="http://schemas.microsoft.com/office/drawing/2014/main" id="{64897D8F-4D89-5256-1B79-0ED00ECE5BC1}"/>
               </a:ext>
             </a:extLst>
           </p:cNvPr>
@@ -13090,7 +13090,7 @@
           <a:bodyPr/>
           <a:lstStyle/>
           <a:p>
-            <a:fld id="{F38275E8-7EFC-4FEA-BF4C-11F280B3D894}" type="datetimeFigureOut">
+            <a:fld id="{C5143365-16B3-4FD5-8BF7-F05E2AA1930B}" type="datetimeFigureOut">
               <a:rPr lang="en-US" smtClean="0"/>
               <a:t>10/3/2026</a:t>
             </a:fld>
@@ -13132,7 +13132,7 @@
           <a:bodyPr/>
           <a:lstStyle/>
           <a:p>
-            <a:fld id="{460DAC5E-8076-4A1F-9E2B-43FC1CE1F208}" type="slidenum">
+            <a:fld id="{4562F234-49D9-48C6-80E0-9B9318BCC5E8}" type="slidenum">
               <a:rPr lang="en-US" smtClean="0"/>
               <a:t>‹#›</a:t>
             </a:fld>
@@ -13145,7 +13145,7 @@
           <p:cNvPr id="8" name="item_1_title">
             <a:extLst>
               <a:ext uri="{FF2B5EF4-FFF2-40B4-BE49-F238E27FC236}">
-                <a16:creationId xmlns:a16="http://schemas.microsoft.com/office/drawing/2014/main" id="{8D30E011-4A1E-0E8C-A9E4-ACB5D015B37C}"/>
+                <a16:creationId xmlns:a16="http://schemas.microsoft.com/office/drawing/2014/main" id="{51EEBEBC-A472-E501-173C-E912780A9098}"/>
               </a:ext>
             </a:extLst>
           </p:cNvPr>
@@ -13195,7 +13195,7 @@
           <p:cNvPr id="9" name="item_1">
             <a:extLst>
               <a:ext uri="{FF2B5EF4-FFF2-40B4-BE49-F238E27FC236}">
-                <a16:creationId xmlns:a16="http://schemas.microsoft.com/office/drawing/2014/main" id="{E003939E-20B9-2349-6427-15C200FB1564}"/>
+                <a16:creationId xmlns:a16="http://schemas.microsoft.com/office/drawing/2014/main" id="{A114E4DF-2D15-FAD1-3E6E-3107E2A656E4}"/>
               </a:ext>
             </a:extLst>
           </p:cNvPr>
@@ -13243,7 +13243,7 @@
           <p:cNvPr id="10" name="item_2_title">
             <a:extLst>
               <a:ext uri="{FF2B5EF4-FFF2-40B4-BE49-F238E27FC236}">
-                <a16:creationId xmlns:a16="http://schemas.microsoft.com/office/drawing/2014/main" id="{706680DC-72E5-3830-494B-C99A24809F1D}"/>
+                <a16:creationId xmlns:a16="http://schemas.microsoft.com/office/drawing/2014/main" id="{6FF0FB9D-ABC7-CEE4-B106-8C0943EB21AE}"/>
               </a:ext>
             </a:extLst>
           </p:cNvPr>
@@ -13296,7 +13296,7 @@
           <p:cNvPr id="11" name="item_2">
             <a:extLst>
               <a:ext uri="{FF2B5EF4-FFF2-40B4-BE49-F238E27FC236}">
-                <a16:creationId xmlns:a16="http://schemas.microsoft.com/office/drawing/2014/main" id="{8573C30A-3A76-7D90-6A08-0985114218E1}"/>
+                <a16:creationId xmlns:a16="http://schemas.microsoft.com/office/drawing/2014/main" id="{F460772A-C50D-CBC4-D77A-E88DF87B077B}"/>
               </a:ext>
             </a:extLst>
           </p:cNvPr>
@@ -13344,7 +13344,7 @@
           <p:cNvPr id="12" name="item_3_title">
             <a:extLst>
               <a:ext uri="{FF2B5EF4-FFF2-40B4-BE49-F238E27FC236}">
-                <a16:creationId xmlns:a16="http://schemas.microsoft.com/office/drawing/2014/main" id="{45A7173E-63E7-A35B-E838-8DCF87D39A1D}"/>
+                <a16:creationId xmlns:a16="http://schemas.microsoft.com/office/drawing/2014/main" id="{D3412035-139B-F8C8-CC3F-8F362D51005A}"/>
               </a:ext>
             </a:extLst>
           </p:cNvPr>
@@ -13397,7 +13397,7 @@
           <p:cNvPr id="13" name="item_3">
             <a:extLst>
               <a:ext uri="{FF2B5EF4-FFF2-40B4-BE49-F238E27FC236}">
-                <a16:creationId xmlns:a16="http://schemas.microsoft.com/office/drawing/2014/main" id="{DBEBD8F5-C4EC-5E9C-5BAD-6D5A60294928}"/>
+                <a16:creationId xmlns:a16="http://schemas.microsoft.com/office/drawing/2014/main" id="{9563F8EA-C6D9-6787-E95A-CCFF27BA75B7}"/>
               </a:ext>
             </a:extLst>
           </p:cNvPr>
@@ -13445,7 +13445,7 @@
           <p:cNvPr id="14" name="item_4_title">
             <a:extLst>
               <a:ext uri="{FF2B5EF4-FFF2-40B4-BE49-F238E27FC236}">
-                <a16:creationId xmlns:a16="http://schemas.microsoft.com/office/drawing/2014/main" id="{128AACD6-5CCB-352A-DC33-E582EF3F92FC}"/>
+                <a16:creationId xmlns:a16="http://schemas.microsoft.com/office/drawing/2014/main" id="{B7114EB9-424C-0A11-622E-2B7BBAD97BF3}"/>
               </a:ext>
             </a:extLst>
           </p:cNvPr>
@@ -13498,7 +13498,7 @@
           <p:cNvPr id="15" name="item_4">
             <a:extLst>
               <a:ext uri="{FF2B5EF4-FFF2-40B4-BE49-F238E27FC236}">
-                <a16:creationId xmlns:a16="http://schemas.microsoft.com/office/drawing/2014/main" id="{53482F17-5551-E8F9-2778-176B5A8A0FAF}"/>
+                <a16:creationId xmlns:a16="http://schemas.microsoft.com/office/drawing/2014/main" id="{A9525656-81A2-51A1-1DCA-4E7AFE1DFEF9}"/>
               </a:ext>
             </a:extLst>
           </p:cNvPr>
@@ -13546,7 +13546,7 @@
           <p:cNvPr id="16" name="source">
             <a:extLst>
               <a:ext uri="{FF2B5EF4-FFF2-40B4-BE49-F238E27FC236}">
-                <a16:creationId xmlns:a16="http://schemas.microsoft.com/office/drawing/2014/main" id="{9B95321D-634B-E686-EB7F-17D081CDFE82}"/>
+                <a16:creationId xmlns:a16="http://schemas.microsoft.com/office/drawing/2014/main" id="{CE405513-8258-608A-DB06-046B4D0C8479}"/>
               </a:ext>
             </a:extLst>
           </p:cNvPr>
@@ -13601,7 +13601,7 @@
     </p:spTree>
     <p:extLst>
       <p:ext uri="{BB962C8B-B14F-4D97-AF65-F5344CB8AC3E}">
-        <p14:creationId xmlns:p14="http://schemas.microsoft.com/office/powerpoint/2010/main" val="3274169917"/>
+        <p14:creationId xmlns:p14="http://schemas.microsoft.com/office/powerpoint/2010/main" val="1446664874"/>
       </p:ext>
     </p:extLst>
   </p:cSld>
@@ -13638,7 +13638,7 @@
           <p:cNvPr id="9" name="creative_background_master">
             <a:extLst>
               <a:ext uri="{FF2B5EF4-FFF2-40B4-BE49-F238E27FC236}">
-                <a16:creationId xmlns:a16="http://schemas.microsoft.com/office/drawing/2014/main" id="{5EAA33D3-92FF-D6AE-C772-1E3C08FB95BB}"/>
+                <a16:creationId xmlns:a16="http://schemas.microsoft.com/office/drawing/2014/main" id="{BD367781-A461-2CEE-56A0-2287445CC8C6}"/>
               </a:ext>
             </a:extLst>
           </p:cNvPr>
@@ -13799,7 +13799,7 @@
             </a:lvl1pPr>
           </a:lstStyle>
           <a:p>
-            <a:fld id="{F38275E8-7EFC-4FEA-BF4C-11F280B3D894}" type="datetimeFigureOut">
+            <a:fld id="{C5143365-16B3-4FD5-8BF7-F05E2AA1930B}" type="datetimeFigureOut">
               <a:rPr lang="en-US" smtClean="0"/>
               <a:t>10/3/2026</a:t>
             </a:fld>
@@ -13881,7 +13881,7 @@
             </a:lvl1pPr>
           </a:lstStyle>
           <a:p>
-            <a:fld id="{460DAC5E-8076-4A1F-9E2B-43FC1CE1F208}" type="slidenum">
+            <a:fld id="{4562F234-49D9-48C6-80E0-9B9318BCC5E8}" type="slidenum">
               <a:rPr lang="en-US" smtClean="0"/>
               <a:t>‹#›</a:t>
             </a:fld>
@@ -13892,7 +13892,7 @@
     </p:spTree>
     <p:extLst>
       <p:ext uri="{BB962C8B-B14F-4D97-AF65-F5344CB8AC3E}">
-        <p14:creationId xmlns:p14="http://schemas.microsoft.com/office/powerpoint/2010/main" val="3665996358"/>
+        <p14:creationId xmlns:p14="http://schemas.microsoft.com/office/powerpoint/2010/main" val="1772243547"/>
       </p:ext>
     </p:extLst>
   </p:cSld>
@@ -14273,7 +14273,7 @@
   <a:themeElements>
     <a:clrScheme name="Integral">
       <a:dk1>
-        <a:srgbClr val="4077CC"/>
+        <a:srgbClr val="4B82D8"/>
       </a:dk1>
       <a:lt1>
         <a:srgbClr val="05070B"/>
@@ -14288,7 +14288,7 @@
         <a:srgbClr val="D6A84B"/>
       </a:accent1>
       <a:accent2>
-        <a:srgbClr val="4077CC"/>
+        <a:srgbClr val="D6A84B"/>
       </a:accent2>
       <a:accent3>
         <a:srgbClr val="99A6B9"/>

--- a/design/templates/nile-night/template.pptx
+++ b/design/templates/nile-night/template.pptx
@@ -126,7 +126,7 @@
           <p:cNvPr id="9" name="creative_background">
             <a:extLst>
               <a:ext uri="{FF2B5EF4-FFF2-40B4-BE49-F238E27FC236}">
-                <a16:creationId xmlns:a16="http://schemas.microsoft.com/office/drawing/2014/main" id="{177F16A3-334B-F725-A2C6-AC6B9C86A46A}"/>
+                <a16:creationId xmlns:a16="http://schemas.microsoft.com/office/drawing/2014/main" id="{4A386C4E-4CC5-6214-57C2-CB6DB11EBB1D}"/>
               </a:ext>
             </a:extLst>
           </p:cNvPr>
@@ -290,9 +290,9 @@
             </a:lvl1pPr>
           </a:lstStyle>
           <a:p>
-            <a:fld id="{C5143365-16B3-4FD5-8BF7-F05E2AA1930B}" type="datetimeFigureOut">
+            <a:fld id="{67949D26-9034-4D83-88EA-A31F57F7C9E2}" type="datetimeFigureOut">
               <a:rPr lang="en-US" smtClean="0"/>
-              <a:t>10/3/2026</a:t>
+              <a:t>10/4/2026</a:t>
             </a:fld>
             <a:endParaRPr lang="en-US"/>
           </a:p>
@@ -332,7 +332,7 @@
           <a:bodyPr/>
           <a:lstStyle/>
           <a:p>
-            <a:fld id="{4562F234-49D9-48C6-80E0-9B9318BCC5E8}" type="slidenum">
+            <a:fld id="{7212BDF5-4B35-4116-8BB7-2AC3344F768A}" type="slidenum">
               <a:rPr lang="en-US" smtClean="0"/>
               <a:t>‹#›</a:t>
             </a:fld>
@@ -343,7 +343,7 @@
     </p:spTree>
     <p:extLst>
       <p:ext uri="{BB962C8B-B14F-4D97-AF65-F5344CB8AC3E}">
-        <p14:creationId xmlns:p14="http://schemas.microsoft.com/office/powerpoint/2010/main" val="794032755"/>
+        <p14:creationId xmlns:p14="http://schemas.microsoft.com/office/powerpoint/2010/main" val="2893614645"/>
       </p:ext>
     </p:extLst>
   </p:cSld>
@@ -375,7 +375,7 @@
           <p:cNvPr id="7" name="creative_background">
             <a:extLst>
               <a:ext uri="{FF2B5EF4-FFF2-40B4-BE49-F238E27FC236}">
-                <a16:creationId xmlns:a16="http://schemas.microsoft.com/office/drawing/2014/main" id="{67BDFCF1-3463-345E-1F75-8F167570B53A}"/>
+                <a16:creationId xmlns:a16="http://schemas.microsoft.com/office/drawing/2014/main" id="{1CFF55B2-0B7F-A445-8F8C-6B3A38534EA6}"/>
               </a:ext>
             </a:extLst>
           </p:cNvPr>
@@ -448,9 +448,9 @@
           <a:bodyPr/>
           <a:lstStyle/>
           <a:p>
-            <a:fld id="{C5143365-16B3-4FD5-8BF7-F05E2AA1930B}" type="datetimeFigureOut">
+            <a:fld id="{67949D26-9034-4D83-88EA-A31F57F7C9E2}" type="datetimeFigureOut">
               <a:rPr lang="en-US" smtClean="0"/>
-              <a:t>10/3/2026</a:t>
+              <a:t>10/4/2026</a:t>
             </a:fld>
             <a:endParaRPr lang="en-US"/>
           </a:p>
@@ -490,7 +490,7 @@
           <a:bodyPr/>
           <a:lstStyle/>
           <a:p>
-            <a:fld id="{4562F234-49D9-48C6-80E0-9B9318BCC5E8}" type="slidenum">
+            <a:fld id="{7212BDF5-4B35-4116-8BB7-2AC3344F768A}" type="slidenum">
               <a:rPr lang="en-US" smtClean="0"/>
               <a:t>‹#›</a:t>
             </a:fld>
@@ -503,7 +503,7 @@
           <p:cNvPr id="8" name="body">
             <a:extLst>
               <a:ext uri="{FF2B5EF4-FFF2-40B4-BE49-F238E27FC236}">
-                <a16:creationId xmlns:a16="http://schemas.microsoft.com/office/drawing/2014/main" id="{7F4E0C13-B48C-086A-2F5C-DF3FFF8F52FD}"/>
+                <a16:creationId xmlns:a16="http://schemas.microsoft.com/office/drawing/2014/main" id="{7DA1F2B3-C551-7029-BF62-A6DF1073F6A6}"/>
               </a:ext>
             </a:extLst>
           </p:cNvPr>
@@ -543,7 +543,7 @@
           <p:cNvPr id="9" name="source">
             <a:extLst>
               <a:ext uri="{FF2B5EF4-FFF2-40B4-BE49-F238E27FC236}">
-                <a16:creationId xmlns:a16="http://schemas.microsoft.com/office/drawing/2014/main" id="{A7667450-ADDB-41C3-F7E3-5D562CC5AB42}"/>
+                <a16:creationId xmlns:a16="http://schemas.microsoft.com/office/drawing/2014/main" id="{3F6F5EC6-3A19-1A67-FE48-DA86C1EB1A88}"/>
               </a:ext>
             </a:extLst>
           </p:cNvPr>
@@ -598,7 +598,7 @@
     </p:spTree>
     <p:extLst>
       <p:ext uri="{BB962C8B-B14F-4D97-AF65-F5344CB8AC3E}">
-        <p14:creationId xmlns:p14="http://schemas.microsoft.com/office/powerpoint/2010/main" val="666606680"/>
+        <p14:creationId xmlns:p14="http://schemas.microsoft.com/office/powerpoint/2010/main" val="1451578902"/>
       </p:ext>
     </p:extLst>
   </p:cSld>
@@ -630,7 +630,7 @@
           <p:cNvPr id="7" name="creative_background">
             <a:extLst>
               <a:ext uri="{FF2B5EF4-FFF2-40B4-BE49-F238E27FC236}">
-                <a16:creationId xmlns:a16="http://schemas.microsoft.com/office/drawing/2014/main" id="{6E23D244-E028-2E49-7320-B5509EE0E0CC}"/>
+                <a16:creationId xmlns:a16="http://schemas.microsoft.com/office/drawing/2014/main" id="{2126DBAE-0E4B-A6AE-6939-F43BC089C741}"/>
               </a:ext>
             </a:extLst>
           </p:cNvPr>
@@ -703,9 +703,9 @@
           <a:bodyPr/>
           <a:lstStyle/>
           <a:p>
-            <a:fld id="{C5143365-16B3-4FD5-8BF7-F05E2AA1930B}" type="datetimeFigureOut">
+            <a:fld id="{67949D26-9034-4D83-88EA-A31F57F7C9E2}" type="datetimeFigureOut">
               <a:rPr lang="en-US" smtClean="0"/>
-              <a:t>10/3/2026</a:t>
+              <a:t>10/4/2026</a:t>
             </a:fld>
             <a:endParaRPr lang="en-US"/>
           </a:p>
@@ -745,7 +745,7 @@
           <a:bodyPr/>
           <a:lstStyle/>
           <a:p>
-            <a:fld id="{4562F234-49D9-48C6-80E0-9B9318BCC5E8}" type="slidenum">
+            <a:fld id="{7212BDF5-4B35-4116-8BB7-2AC3344F768A}" type="slidenum">
               <a:rPr lang="en-US" smtClean="0"/>
               <a:t>‹#›</a:t>
             </a:fld>
@@ -758,7 +758,7 @@
           <p:cNvPr id="8" name="body">
             <a:extLst>
               <a:ext uri="{FF2B5EF4-FFF2-40B4-BE49-F238E27FC236}">
-                <a16:creationId xmlns:a16="http://schemas.microsoft.com/office/drawing/2014/main" id="{A6761D88-7243-5679-A145-8E36CD1698A7}"/>
+                <a16:creationId xmlns:a16="http://schemas.microsoft.com/office/drawing/2014/main" id="{128F0B0C-6257-7D0A-0EE1-A166A6F28C63}"/>
               </a:ext>
             </a:extLst>
           </p:cNvPr>
@@ -801,7 +801,7 @@
     </p:spTree>
     <p:extLst>
       <p:ext uri="{BB962C8B-B14F-4D97-AF65-F5344CB8AC3E}">
-        <p14:creationId xmlns:p14="http://schemas.microsoft.com/office/powerpoint/2010/main" val="515956396"/>
+        <p14:creationId xmlns:p14="http://schemas.microsoft.com/office/powerpoint/2010/main" val="3592170214"/>
       </p:ext>
     </p:extLst>
   </p:cSld>
@@ -886,7 +886,7 @@
           <p:cNvPr id="6" name="section_number">
             <a:extLst>
               <a:ext uri="{FF2B5EF4-FFF2-40B4-BE49-F238E27FC236}">
-                <a16:creationId xmlns:a16="http://schemas.microsoft.com/office/drawing/2014/main" id="{BFC90DAE-A89F-C593-7DAB-F79B953B747D}"/>
+                <a16:creationId xmlns:a16="http://schemas.microsoft.com/office/drawing/2014/main" id="{99A56710-9B08-7A39-A37E-8F5C36896A57}"/>
               </a:ext>
             </a:extLst>
           </p:cNvPr>
@@ -939,7 +939,7 @@
           <p:cNvPr id="7" name="subtitle">
             <a:extLst>
               <a:ext uri="{FF2B5EF4-FFF2-40B4-BE49-F238E27FC236}">
-                <a16:creationId xmlns:a16="http://schemas.microsoft.com/office/drawing/2014/main" id="{7337B929-7D5A-BA26-9EDC-E20D2DC77B14}"/>
+                <a16:creationId xmlns:a16="http://schemas.microsoft.com/office/drawing/2014/main" id="{CFC66056-8965-3D5F-3FEE-CE2FBCA50761}"/>
               </a:ext>
             </a:extLst>
           </p:cNvPr>
@@ -989,7 +989,7 @@
     </p:spTree>
     <p:extLst>
       <p:ext uri="{BB962C8B-B14F-4D97-AF65-F5344CB8AC3E}">
-        <p14:creationId xmlns:p14="http://schemas.microsoft.com/office/powerpoint/2010/main" val="1890615270"/>
+        <p14:creationId xmlns:p14="http://schemas.microsoft.com/office/powerpoint/2010/main" val="1610701026"/>
       </p:ext>
     </p:extLst>
   </p:cSld>
@@ -1021,7 +1021,7 @@
           <p:cNvPr id="7" name="creative_background">
             <a:extLst>
               <a:ext uri="{FF2B5EF4-FFF2-40B4-BE49-F238E27FC236}">
-                <a16:creationId xmlns:a16="http://schemas.microsoft.com/office/drawing/2014/main" id="{6116028B-DF59-6791-EC39-E21B222014B3}"/>
+                <a16:creationId xmlns:a16="http://schemas.microsoft.com/office/drawing/2014/main" id="{B0503B64-D322-94DB-76A8-0E7F91A9F2E7}"/>
               </a:ext>
             </a:extLst>
           </p:cNvPr>
@@ -1094,9 +1094,9 @@
           <a:bodyPr/>
           <a:lstStyle/>
           <a:p>
-            <a:fld id="{C5143365-16B3-4FD5-8BF7-F05E2AA1930B}" type="datetimeFigureOut">
+            <a:fld id="{67949D26-9034-4D83-88EA-A31F57F7C9E2}" type="datetimeFigureOut">
               <a:rPr lang="en-US" smtClean="0"/>
-              <a:t>10/3/2026</a:t>
+              <a:t>10/4/2026</a:t>
             </a:fld>
             <a:endParaRPr lang="en-US"/>
           </a:p>
@@ -1136,7 +1136,7 @@
           <a:bodyPr/>
           <a:lstStyle/>
           <a:p>
-            <a:fld id="{4562F234-49D9-48C6-80E0-9B9318BCC5E8}" type="slidenum">
+            <a:fld id="{7212BDF5-4B35-4116-8BB7-2AC3344F768A}" type="slidenum">
               <a:rPr lang="en-US" smtClean="0"/>
               <a:t>‹#›</a:t>
             </a:fld>
@@ -1149,7 +1149,7 @@
           <p:cNvPr id="8" name="item_1_title">
             <a:extLst>
               <a:ext uri="{FF2B5EF4-FFF2-40B4-BE49-F238E27FC236}">
-                <a16:creationId xmlns:a16="http://schemas.microsoft.com/office/drawing/2014/main" id="{005545B2-E15C-1B35-DB87-FEA136189BD4}"/>
+                <a16:creationId xmlns:a16="http://schemas.microsoft.com/office/drawing/2014/main" id="{D721F07F-EEAF-7C43-C9DB-FF7D80CD50D9}"/>
               </a:ext>
             </a:extLst>
           </p:cNvPr>
@@ -1199,7 +1199,7 @@
           <p:cNvPr id="9" name="item_1">
             <a:extLst>
               <a:ext uri="{FF2B5EF4-FFF2-40B4-BE49-F238E27FC236}">
-                <a16:creationId xmlns:a16="http://schemas.microsoft.com/office/drawing/2014/main" id="{5840DAD7-D54A-AAB3-7A4F-98BE854883A2}"/>
+                <a16:creationId xmlns:a16="http://schemas.microsoft.com/office/drawing/2014/main" id="{93A81A20-EAC9-6455-0CEF-3933B3EB490D}"/>
               </a:ext>
             </a:extLst>
           </p:cNvPr>
@@ -1247,7 +1247,7 @@
           <p:cNvPr id="10" name="item_2_title">
             <a:extLst>
               <a:ext uri="{FF2B5EF4-FFF2-40B4-BE49-F238E27FC236}">
-                <a16:creationId xmlns:a16="http://schemas.microsoft.com/office/drawing/2014/main" id="{309D72F6-7C9F-F27A-E015-F5426A91F2BF}"/>
+                <a16:creationId xmlns:a16="http://schemas.microsoft.com/office/drawing/2014/main" id="{24D9A0C1-05ED-8A29-55EB-EF5DC32858BE}"/>
               </a:ext>
             </a:extLst>
           </p:cNvPr>
@@ -1300,7 +1300,7 @@
           <p:cNvPr id="11" name="item_2">
             <a:extLst>
               <a:ext uri="{FF2B5EF4-FFF2-40B4-BE49-F238E27FC236}">
-                <a16:creationId xmlns:a16="http://schemas.microsoft.com/office/drawing/2014/main" id="{3DEFF9B1-D731-11EF-3B10-71D41701AAAF}"/>
+                <a16:creationId xmlns:a16="http://schemas.microsoft.com/office/drawing/2014/main" id="{ACEAA45F-189B-7706-5AB6-83AB7C6D40A8}"/>
               </a:ext>
             </a:extLst>
           </p:cNvPr>
@@ -1348,7 +1348,7 @@
           <p:cNvPr id="12" name="item_3_title">
             <a:extLst>
               <a:ext uri="{FF2B5EF4-FFF2-40B4-BE49-F238E27FC236}">
-                <a16:creationId xmlns:a16="http://schemas.microsoft.com/office/drawing/2014/main" id="{D0851A9A-3BC0-53ED-3D07-8D529A7C0DF5}"/>
+                <a16:creationId xmlns:a16="http://schemas.microsoft.com/office/drawing/2014/main" id="{2111401A-75D5-6C44-F39B-37F0ACB69A52}"/>
               </a:ext>
             </a:extLst>
           </p:cNvPr>
@@ -1401,7 +1401,7 @@
           <p:cNvPr id="13" name="item_3">
             <a:extLst>
               <a:ext uri="{FF2B5EF4-FFF2-40B4-BE49-F238E27FC236}">
-                <a16:creationId xmlns:a16="http://schemas.microsoft.com/office/drawing/2014/main" id="{FE00C56F-EB75-A75E-7658-6184092A224C}"/>
+                <a16:creationId xmlns:a16="http://schemas.microsoft.com/office/drawing/2014/main" id="{FA13FF5F-46EC-FDC9-6C23-955ED07B3533}"/>
               </a:ext>
             </a:extLst>
           </p:cNvPr>
@@ -1449,7 +1449,7 @@
           <p:cNvPr id="14" name="item_4_title">
             <a:extLst>
               <a:ext uri="{FF2B5EF4-FFF2-40B4-BE49-F238E27FC236}">
-                <a16:creationId xmlns:a16="http://schemas.microsoft.com/office/drawing/2014/main" id="{1620694D-55D2-F739-35E6-2E061E6F2068}"/>
+                <a16:creationId xmlns:a16="http://schemas.microsoft.com/office/drawing/2014/main" id="{D9E0E115-0BB7-8406-9186-1DA62A7651BC}"/>
               </a:ext>
             </a:extLst>
           </p:cNvPr>
@@ -1502,7 +1502,7 @@
           <p:cNvPr id="15" name="item_4">
             <a:extLst>
               <a:ext uri="{FF2B5EF4-FFF2-40B4-BE49-F238E27FC236}">
-                <a16:creationId xmlns:a16="http://schemas.microsoft.com/office/drawing/2014/main" id="{E48849CF-C5BC-CBD7-5576-063E5303FAE9}"/>
+                <a16:creationId xmlns:a16="http://schemas.microsoft.com/office/drawing/2014/main" id="{6017A254-C84F-CB47-FE43-C831A940E1B4}"/>
               </a:ext>
             </a:extLst>
           </p:cNvPr>
@@ -1550,7 +1550,7 @@
           <p:cNvPr id="16" name="source">
             <a:extLst>
               <a:ext uri="{FF2B5EF4-FFF2-40B4-BE49-F238E27FC236}">
-                <a16:creationId xmlns:a16="http://schemas.microsoft.com/office/drawing/2014/main" id="{17065EF0-A0D3-3417-890F-6713B5CE3C49}"/>
+                <a16:creationId xmlns:a16="http://schemas.microsoft.com/office/drawing/2014/main" id="{4F24C1CB-531C-BB62-6643-23FEBBC6E489}"/>
               </a:ext>
             </a:extLst>
           </p:cNvPr>
@@ -1605,7 +1605,7 @@
     </p:spTree>
     <p:extLst>
       <p:ext uri="{BB962C8B-B14F-4D97-AF65-F5344CB8AC3E}">
-        <p14:creationId xmlns:p14="http://schemas.microsoft.com/office/powerpoint/2010/main" val="1234580073"/>
+        <p14:creationId xmlns:p14="http://schemas.microsoft.com/office/powerpoint/2010/main" val="796972063"/>
       </p:ext>
     </p:extLst>
   </p:cSld>
@@ -1637,7 +1637,7 @@
           <p:cNvPr id="7" name="creative_background">
             <a:extLst>
               <a:ext uri="{FF2B5EF4-FFF2-40B4-BE49-F238E27FC236}">
-                <a16:creationId xmlns:a16="http://schemas.microsoft.com/office/drawing/2014/main" id="{C06C2F94-23A7-C602-E66D-ACD818F05259}"/>
+                <a16:creationId xmlns:a16="http://schemas.microsoft.com/office/drawing/2014/main" id="{BAC8EDDD-3939-FF64-CE8F-4C8B5D779986}"/>
               </a:ext>
             </a:extLst>
           </p:cNvPr>
@@ -1710,9 +1710,9 @@
           <a:bodyPr/>
           <a:lstStyle/>
           <a:p>
-            <a:fld id="{C5143365-16B3-4FD5-8BF7-F05E2AA1930B}" type="datetimeFigureOut">
+            <a:fld id="{67949D26-9034-4D83-88EA-A31F57F7C9E2}" type="datetimeFigureOut">
               <a:rPr lang="en-US" smtClean="0"/>
-              <a:t>10/3/2026</a:t>
+              <a:t>10/4/2026</a:t>
             </a:fld>
             <a:endParaRPr lang="en-US"/>
           </a:p>
@@ -1752,7 +1752,7 @@
           <a:bodyPr/>
           <a:lstStyle/>
           <a:p>
-            <a:fld id="{4562F234-49D9-48C6-80E0-9B9318BCC5E8}" type="slidenum">
+            <a:fld id="{7212BDF5-4B35-4116-8BB7-2AC3344F768A}" type="slidenum">
               <a:rPr lang="en-US" smtClean="0"/>
               <a:t>‹#›</a:t>
             </a:fld>
@@ -1765,7 +1765,7 @@
           <p:cNvPr id="8" name="body">
             <a:extLst>
               <a:ext uri="{FF2B5EF4-FFF2-40B4-BE49-F238E27FC236}">
-                <a16:creationId xmlns:a16="http://schemas.microsoft.com/office/drawing/2014/main" id="{892CE4AB-E9B6-5F39-073B-434BFE39F100}"/>
+                <a16:creationId xmlns:a16="http://schemas.microsoft.com/office/drawing/2014/main" id="{E1E2D6CE-FAC7-C6BB-73CB-A12E708A74AB}"/>
               </a:ext>
             </a:extLst>
           </p:cNvPr>
@@ -1810,7 +1810,7 @@
           <p:cNvPr id="9" name="source">
             <a:extLst>
               <a:ext uri="{FF2B5EF4-FFF2-40B4-BE49-F238E27FC236}">
-                <a16:creationId xmlns:a16="http://schemas.microsoft.com/office/drawing/2014/main" id="{DC115002-2556-E7B7-B71D-A87C50ADDFD9}"/>
+                <a16:creationId xmlns:a16="http://schemas.microsoft.com/office/drawing/2014/main" id="{5435D8C9-FA70-9413-AF52-42A26300A183}"/>
               </a:ext>
             </a:extLst>
           </p:cNvPr>
@@ -1865,7 +1865,7 @@
     </p:spTree>
     <p:extLst>
       <p:ext uri="{BB962C8B-B14F-4D97-AF65-F5344CB8AC3E}">
-        <p14:creationId xmlns:p14="http://schemas.microsoft.com/office/powerpoint/2010/main" val="1207842713"/>
+        <p14:creationId xmlns:p14="http://schemas.microsoft.com/office/powerpoint/2010/main" val="1440535085"/>
       </p:ext>
     </p:extLst>
   </p:cSld>
@@ -1897,7 +1897,7 @@
           <p:cNvPr id="7" name="creative_background">
             <a:extLst>
               <a:ext uri="{FF2B5EF4-FFF2-40B4-BE49-F238E27FC236}">
-                <a16:creationId xmlns:a16="http://schemas.microsoft.com/office/drawing/2014/main" id="{C68717D1-553D-93D9-CC33-AD84D0BC8B5F}"/>
+                <a16:creationId xmlns:a16="http://schemas.microsoft.com/office/drawing/2014/main" id="{5A94ADB5-FB6D-CF2C-B6C3-64702F7E0EA9}"/>
               </a:ext>
             </a:extLst>
           </p:cNvPr>
@@ -1970,9 +1970,9 @@
           <a:bodyPr/>
           <a:lstStyle/>
           <a:p>
-            <a:fld id="{C5143365-16B3-4FD5-8BF7-F05E2AA1930B}" type="datetimeFigureOut">
+            <a:fld id="{67949D26-9034-4D83-88EA-A31F57F7C9E2}" type="datetimeFigureOut">
               <a:rPr lang="en-US" smtClean="0"/>
-              <a:t>10/3/2026</a:t>
+              <a:t>10/4/2026</a:t>
             </a:fld>
             <a:endParaRPr lang="en-US"/>
           </a:p>
@@ -2012,7 +2012,7 @@
           <a:bodyPr/>
           <a:lstStyle/>
           <a:p>
-            <a:fld id="{4562F234-49D9-48C6-80E0-9B9318BCC5E8}" type="slidenum">
+            <a:fld id="{7212BDF5-4B35-4116-8BB7-2AC3344F768A}" type="slidenum">
               <a:rPr lang="en-US" smtClean="0"/>
               <a:t>‹#›</a:t>
             </a:fld>
@@ -2025,7 +2025,7 @@
           <p:cNvPr id="8" name="item_1_title">
             <a:extLst>
               <a:ext uri="{FF2B5EF4-FFF2-40B4-BE49-F238E27FC236}">
-                <a16:creationId xmlns:a16="http://schemas.microsoft.com/office/drawing/2014/main" id="{66FEC42F-364F-FB2C-3D37-0C71EE64E1F7}"/>
+                <a16:creationId xmlns:a16="http://schemas.microsoft.com/office/drawing/2014/main" id="{B3EFBECD-E1B2-C5C2-BF08-307D3C3CD2CC}"/>
               </a:ext>
             </a:extLst>
           </p:cNvPr>
@@ -2075,7 +2075,7 @@
           <p:cNvPr id="9" name="item_1">
             <a:extLst>
               <a:ext uri="{FF2B5EF4-FFF2-40B4-BE49-F238E27FC236}">
-                <a16:creationId xmlns:a16="http://schemas.microsoft.com/office/drawing/2014/main" id="{8F378B04-7784-F803-E721-42F26EA06D07}"/>
+                <a16:creationId xmlns:a16="http://schemas.microsoft.com/office/drawing/2014/main" id="{93613FCE-4B6A-CA37-4A25-D315F8F1A7A2}"/>
               </a:ext>
             </a:extLst>
           </p:cNvPr>
@@ -2123,7 +2123,7 @@
           <p:cNvPr id="10" name="item_2_title">
             <a:extLst>
               <a:ext uri="{FF2B5EF4-FFF2-40B4-BE49-F238E27FC236}">
-                <a16:creationId xmlns:a16="http://schemas.microsoft.com/office/drawing/2014/main" id="{2A302E7F-6B41-A227-2372-B6E2724BB7DE}"/>
+                <a16:creationId xmlns:a16="http://schemas.microsoft.com/office/drawing/2014/main" id="{53A08CFE-9DC0-AAC7-15F9-7A742F9BCB37}"/>
               </a:ext>
             </a:extLst>
           </p:cNvPr>
@@ -2176,7 +2176,7 @@
           <p:cNvPr id="11" name="item_2">
             <a:extLst>
               <a:ext uri="{FF2B5EF4-FFF2-40B4-BE49-F238E27FC236}">
-                <a16:creationId xmlns:a16="http://schemas.microsoft.com/office/drawing/2014/main" id="{C538ADAA-482D-C212-5398-B8354746192B}"/>
+                <a16:creationId xmlns:a16="http://schemas.microsoft.com/office/drawing/2014/main" id="{AA478A30-847E-6C2D-1EFC-6548FF2190FB}"/>
               </a:ext>
             </a:extLst>
           </p:cNvPr>
@@ -2224,7 +2224,7 @@
           <p:cNvPr id="12" name="item_3_title">
             <a:extLst>
               <a:ext uri="{FF2B5EF4-FFF2-40B4-BE49-F238E27FC236}">
-                <a16:creationId xmlns:a16="http://schemas.microsoft.com/office/drawing/2014/main" id="{00A4C13F-7CCA-9610-47BD-ABB14533611A}"/>
+                <a16:creationId xmlns:a16="http://schemas.microsoft.com/office/drawing/2014/main" id="{63D5635E-0B06-FD8D-11B7-5F523A5791FA}"/>
               </a:ext>
             </a:extLst>
           </p:cNvPr>
@@ -2277,7 +2277,7 @@
           <p:cNvPr id="13" name="item_3">
             <a:extLst>
               <a:ext uri="{FF2B5EF4-FFF2-40B4-BE49-F238E27FC236}">
-                <a16:creationId xmlns:a16="http://schemas.microsoft.com/office/drawing/2014/main" id="{EBA3DEE0-9C7B-8EB5-4131-10833A372C57}"/>
+                <a16:creationId xmlns:a16="http://schemas.microsoft.com/office/drawing/2014/main" id="{111B73EC-86D8-400E-6DF8-2742BEEBDA69}"/>
               </a:ext>
             </a:extLst>
           </p:cNvPr>
@@ -2325,7 +2325,7 @@
           <p:cNvPr id="14" name="item_4_title">
             <a:extLst>
               <a:ext uri="{FF2B5EF4-FFF2-40B4-BE49-F238E27FC236}">
-                <a16:creationId xmlns:a16="http://schemas.microsoft.com/office/drawing/2014/main" id="{FA02AECB-DB3B-621E-320B-223031543FAE}"/>
+                <a16:creationId xmlns:a16="http://schemas.microsoft.com/office/drawing/2014/main" id="{8F4612A2-4969-CFFF-6E30-97A1272E4CFD}"/>
               </a:ext>
             </a:extLst>
           </p:cNvPr>
@@ -2378,7 +2378,7 @@
           <p:cNvPr id="15" name="item_4">
             <a:extLst>
               <a:ext uri="{FF2B5EF4-FFF2-40B4-BE49-F238E27FC236}">
-                <a16:creationId xmlns:a16="http://schemas.microsoft.com/office/drawing/2014/main" id="{0276F765-89CB-F4E6-E032-CAF8D0DF79C1}"/>
+                <a16:creationId xmlns:a16="http://schemas.microsoft.com/office/drawing/2014/main" id="{2E666434-D645-FD91-CCDC-9695E51EAE4E}"/>
               </a:ext>
             </a:extLst>
           </p:cNvPr>
@@ -2426,7 +2426,7 @@
           <p:cNvPr id="16" name="source">
             <a:extLst>
               <a:ext uri="{FF2B5EF4-FFF2-40B4-BE49-F238E27FC236}">
-                <a16:creationId xmlns:a16="http://schemas.microsoft.com/office/drawing/2014/main" id="{5609EFC3-76E3-F8EF-0569-3A4AA77D294A}"/>
+                <a16:creationId xmlns:a16="http://schemas.microsoft.com/office/drawing/2014/main" id="{4C906CFC-F8C2-2ADD-1416-F3A412107DA5}"/>
               </a:ext>
             </a:extLst>
           </p:cNvPr>
@@ -2481,7 +2481,7 @@
     </p:spTree>
     <p:extLst>
       <p:ext uri="{BB962C8B-B14F-4D97-AF65-F5344CB8AC3E}">
-        <p14:creationId xmlns:p14="http://schemas.microsoft.com/office/powerpoint/2010/main" val="408154106"/>
+        <p14:creationId xmlns:p14="http://schemas.microsoft.com/office/powerpoint/2010/main" val="3453194432"/>
       </p:ext>
     </p:extLst>
   </p:cSld>
@@ -2513,7 +2513,7 @@
           <p:cNvPr id="7" name="creative_background">
             <a:extLst>
               <a:ext uri="{FF2B5EF4-FFF2-40B4-BE49-F238E27FC236}">
-                <a16:creationId xmlns:a16="http://schemas.microsoft.com/office/drawing/2014/main" id="{92A09F64-F1B4-0E52-7848-1E6B32D29279}"/>
+                <a16:creationId xmlns:a16="http://schemas.microsoft.com/office/drawing/2014/main" id="{E018B360-9D3B-BE2D-8992-C22C554A0BED}"/>
               </a:ext>
             </a:extLst>
           </p:cNvPr>
@@ -2586,9 +2586,9 @@
           <a:bodyPr/>
           <a:lstStyle/>
           <a:p>
-            <a:fld id="{C5143365-16B3-4FD5-8BF7-F05E2AA1930B}" type="datetimeFigureOut">
+            <a:fld id="{67949D26-9034-4D83-88EA-A31F57F7C9E2}" type="datetimeFigureOut">
               <a:rPr lang="en-US" smtClean="0"/>
-              <a:t>10/3/2026</a:t>
+              <a:t>10/4/2026</a:t>
             </a:fld>
             <a:endParaRPr lang="en-US"/>
           </a:p>
@@ -2628,7 +2628,7 @@
           <a:bodyPr/>
           <a:lstStyle/>
           <a:p>
-            <a:fld id="{4562F234-49D9-48C6-80E0-9B9318BCC5E8}" type="slidenum">
+            <a:fld id="{7212BDF5-4B35-4116-8BB7-2AC3344F768A}" type="slidenum">
               <a:rPr lang="en-US" smtClean="0"/>
               <a:t>‹#›</a:t>
             </a:fld>
@@ -2641,7 +2641,7 @@
           <p:cNvPr id="8" name="body">
             <a:extLst>
               <a:ext uri="{FF2B5EF4-FFF2-40B4-BE49-F238E27FC236}">
-                <a16:creationId xmlns:a16="http://schemas.microsoft.com/office/drawing/2014/main" id="{549CFA0D-C07B-42AC-D534-755869BE192E}"/>
+                <a16:creationId xmlns:a16="http://schemas.microsoft.com/office/drawing/2014/main" id="{A8394E34-66F1-6870-C02A-DC0DF3E2D8F6}"/>
               </a:ext>
             </a:extLst>
           </p:cNvPr>
@@ -2681,7 +2681,7 @@
           <p:cNvPr id="9" name="kpi_value_1">
             <a:extLst>
               <a:ext uri="{FF2B5EF4-FFF2-40B4-BE49-F238E27FC236}">
-                <a16:creationId xmlns:a16="http://schemas.microsoft.com/office/drawing/2014/main" id="{99766374-7187-0BF7-E62D-F78AC4EC6A4F}"/>
+                <a16:creationId xmlns:a16="http://schemas.microsoft.com/office/drawing/2014/main" id="{3B61DB21-AB49-93D0-F207-1B0085327E5F}"/>
               </a:ext>
             </a:extLst>
           </p:cNvPr>
@@ -2734,7 +2734,7 @@
           <p:cNvPr id="10" name="kpi_label_1">
             <a:extLst>
               <a:ext uri="{FF2B5EF4-FFF2-40B4-BE49-F238E27FC236}">
-                <a16:creationId xmlns:a16="http://schemas.microsoft.com/office/drawing/2014/main" id="{77CEEFBB-16EE-B5BE-4136-1A185EB6679D}"/>
+                <a16:creationId xmlns:a16="http://schemas.microsoft.com/office/drawing/2014/main" id="{6FEA2898-840E-BBFB-CCD3-ADC88422076A}"/>
               </a:ext>
             </a:extLst>
           </p:cNvPr>
@@ -2782,7 +2782,7 @@
           <p:cNvPr id="11" name="source">
             <a:extLst>
               <a:ext uri="{FF2B5EF4-FFF2-40B4-BE49-F238E27FC236}">
-                <a16:creationId xmlns:a16="http://schemas.microsoft.com/office/drawing/2014/main" id="{EE1E90FE-3FB5-07E4-5654-16E7B9500354}"/>
+                <a16:creationId xmlns:a16="http://schemas.microsoft.com/office/drawing/2014/main" id="{0D6684F1-5B65-BC69-493A-CACCB4B683AA}"/>
               </a:ext>
             </a:extLst>
           </p:cNvPr>
@@ -2837,7 +2837,7 @@
     </p:spTree>
     <p:extLst>
       <p:ext uri="{BB962C8B-B14F-4D97-AF65-F5344CB8AC3E}">
-        <p14:creationId xmlns:p14="http://schemas.microsoft.com/office/powerpoint/2010/main" val="3851165464"/>
+        <p14:creationId xmlns:p14="http://schemas.microsoft.com/office/powerpoint/2010/main" val="1135754599"/>
       </p:ext>
     </p:extLst>
   </p:cSld>
@@ -2869,7 +2869,7 @@
           <p:cNvPr id="7" name="creative_background">
             <a:extLst>
               <a:ext uri="{FF2B5EF4-FFF2-40B4-BE49-F238E27FC236}">
-                <a16:creationId xmlns:a16="http://schemas.microsoft.com/office/drawing/2014/main" id="{08139BB6-80F5-A757-EE77-BF04DD859DF6}"/>
+                <a16:creationId xmlns:a16="http://schemas.microsoft.com/office/drawing/2014/main" id="{25EA762D-78E3-31AF-ACFD-EF579D9D6C24}"/>
               </a:ext>
             </a:extLst>
           </p:cNvPr>
@@ -2942,9 +2942,9 @@
           <a:bodyPr/>
           <a:lstStyle/>
           <a:p>
-            <a:fld id="{C5143365-16B3-4FD5-8BF7-F05E2AA1930B}" type="datetimeFigureOut">
+            <a:fld id="{67949D26-9034-4D83-88EA-A31F57F7C9E2}" type="datetimeFigureOut">
               <a:rPr lang="en-US" smtClean="0"/>
-              <a:t>10/3/2026</a:t>
+              <a:t>10/4/2026</a:t>
             </a:fld>
             <a:endParaRPr lang="en-US"/>
           </a:p>
@@ -2984,7 +2984,7 @@
           <a:bodyPr/>
           <a:lstStyle/>
           <a:p>
-            <a:fld id="{4562F234-49D9-48C6-80E0-9B9318BCC5E8}" type="slidenum">
+            <a:fld id="{7212BDF5-4B35-4116-8BB7-2AC3344F768A}" type="slidenum">
               <a:rPr lang="en-US" smtClean="0"/>
               <a:t>‹#›</a:t>
             </a:fld>
@@ -2997,7 +2997,7 @@
           <p:cNvPr id="8" name="body">
             <a:extLst>
               <a:ext uri="{FF2B5EF4-FFF2-40B4-BE49-F238E27FC236}">
-                <a16:creationId xmlns:a16="http://schemas.microsoft.com/office/drawing/2014/main" id="{8D1BA039-3752-C15C-1720-99132A1DBF62}"/>
+                <a16:creationId xmlns:a16="http://schemas.microsoft.com/office/drawing/2014/main" id="{908FB5A1-2ABF-1CBB-203E-588E37D511B7}"/>
               </a:ext>
             </a:extLst>
           </p:cNvPr>
@@ -3037,7 +3037,7 @@
           <p:cNvPr id="9" name="kpi_value_1">
             <a:extLst>
               <a:ext uri="{FF2B5EF4-FFF2-40B4-BE49-F238E27FC236}">
-                <a16:creationId xmlns:a16="http://schemas.microsoft.com/office/drawing/2014/main" id="{57174851-F28A-C212-7459-BEBC974F703D}"/>
+                <a16:creationId xmlns:a16="http://schemas.microsoft.com/office/drawing/2014/main" id="{A2E7E18B-851C-A50B-CB7A-F8862DAB1EF4}"/>
               </a:ext>
             </a:extLst>
           </p:cNvPr>
@@ -3090,7 +3090,7 @@
           <p:cNvPr id="10" name="kpi_label_1">
             <a:extLst>
               <a:ext uri="{FF2B5EF4-FFF2-40B4-BE49-F238E27FC236}">
-                <a16:creationId xmlns:a16="http://schemas.microsoft.com/office/drawing/2014/main" id="{1D1D4EB1-0C04-B639-AC0A-67C5621CE257}"/>
+                <a16:creationId xmlns:a16="http://schemas.microsoft.com/office/drawing/2014/main" id="{67FA1E43-0E7E-B582-EF7D-37BA11487987}"/>
               </a:ext>
             </a:extLst>
           </p:cNvPr>
@@ -3138,7 +3138,7 @@
           <p:cNvPr id="11" name="kpi_value_2">
             <a:extLst>
               <a:ext uri="{FF2B5EF4-FFF2-40B4-BE49-F238E27FC236}">
-                <a16:creationId xmlns:a16="http://schemas.microsoft.com/office/drawing/2014/main" id="{19837291-BAB1-5E28-6FEE-333E475049AC}"/>
+                <a16:creationId xmlns:a16="http://schemas.microsoft.com/office/drawing/2014/main" id="{FC35B26F-AA68-AA4D-5CF4-E0F3EFB1ACC6}"/>
               </a:ext>
             </a:extLst>
           </p:cNvPr>
@@ -3191,7 +3191,7 @@
           <p:cNvPr id="12" name="kpi_label_2">
             <a:extLst>
               <a:ext uri="{FF2B5EF4-FFF2-40B4-BE49-F238E27FC236}">
-                <a16:creationId xmlns:a16="http://schemas.microsoft.com/office/drawing/2014/main" id="{15C7F4A1-18FC-A502-E9ED-3C47E766B9DC}"/>
+                <a16:creationId xmlns:a16="http://schemas.microsoft.com/office/drawing/2014/main" id="{FB60969B-9505-428B-66DC-0BAEFB382F8B}"/>
               </a:ext>
             </a:extLst>
           </p:cNvPr>
@@ -3239,7 +3239,7 @@
           <p:cNvPr id="13" name="kpi_value_3">
             <a:extLst>
               <a:ext uri="{FF2B5EF4-FFF2-40B4-BE49-F238E27FC236}">
-                <a16:creationId xmlns:a16="http://schemas.microsoft.com/office/drawing/2014/main" id="{0BEEA4A7-08CB-5582-855A-525379231F97}"/>
+                <a16:creationId xmlns:a16="http://schemas.microsoft.com/office/drawing/2014/main" id="{8A00260D-6C6B-0711-D5C7-23CB43C91311}"/>
               </a:ext>
             </a:extLst>
           </p:cNvPr>
@@ -3292,7 +3292,7 @@
           <p:cNvPr id="14" name="kpi_label_3">
             <a:extLst>
               <a:ext uri="{FF2B5EF4-FFF2-40B4-BE49-F238E27FC236}">
-                <a16:creationId xmlns:a16="http://schemas.microsoft.com/office/drawing/2014/main" id="{AD48B2F9-0FAE-B6CD-99F9-D3D88BFAC395}"/>
+                <a16:creationId xmlns:a16="http://schemas.microsoft.com/office/drawing/2014/main" id="{A0BB2334-0174-246F-DF79-1754A40644F7}"/>
               </a:ext>
             </a:extLst>
           </p:cNvPr>
@@ -3340,7 +3340,7 @@
           <p:cNvPr id="15" name="kpi_value_4">
             <a:extLst>
               <a:ext uri="{FF2B5EF4-FFF2-40B4-BE49-F238E27FC236}">
-                <a16:creationId xmlns:a16="http://schemas.microsoft.com/office/drawing/2014/main" id="{F0EDC857-14ED-42E6-7AF5-155032C99899}"/>
+                <a16:creationId xmlns:a16="http://schemas.microsoft.com/office/drawing/2014/main" id="{11FA1AE6-4E2A-0C03-1204-17C8B2FE4717}"/>
               </a:ext>
             </a:extLst>
           </p:cNvPr>
@@ -3393,7 +3393,7 @@
           <p:cNvPr id="16" name="kpi_label_4">
             <a:extLst>
               <a:ext uri="{FF2B5EF4-FFF2-40B4-BE49-F238E27FC236}">
-                <a16:creationId xmlns:a16="http://schemas.microsoft.com/office/drawing/2014/main" id="{E2FC8525-941F-87B4-533F-DDF409A7F581}"/>
+                <a16:creationId xmlns:a16="http://schemas.microsoft.com/office/drawing/2014/main" id="{29844A7F-F75C-850D-B278-DDA114D2D170}"/>
               </a:ext>
             </a:extLst>
           </p:cNvPr>
@@ -3441,7 +3441,7 @@
           <p:cNvPr id="17" name="source">
             <a:extLst>
               <a:ext uri="{FF2B5EF4-FFF2-40B4-BE49-F238E27FC236}">
-                <a16:creationId xmlns:a16="http://schemas.microsoft.com/office/drawing/2014/main" id="{3E7390DA-2A5D-5C6F-A65E-9AD35420EE8A}"/>
+                <a16:creationId xmlns:a16="http://schemas.microsoft.com/office/drawing/2014/main" id="{1C3363E7-F2FF-85DC-A846-DD1110E73F61}"/>
               </a:ext>
             </a:extLst>
           </p:cNvPr>
@@ -3496,7 +3496,7 @@
     </p:spTree>
     <p:extLst>
       <p:ext uri="{BB962C8B-B14F-4D97-AF65-F5344CB8AC3E}">
-        <p14:creationId xmlns:p14="http://schemas.microsoft.com/office/powerpoint/2010/main" val="1111276497"/>
+        <p14:creationId xmlns:p14="http://schemas.microsoft.com/office/powerpoint/2010/main" val="1143961606"/>
       </p:ext>
     </p:extLst>
   </p:cSld>
@@ -3528,7 +3528,7 @@
           <p:cNvPr id="7" name="creative_background">
             <a:extLst>
               <a:ext uri="{FF2B5EF4-FFF2-40B4-BE49-F238E27FC236}">
-                <a16:creationId xmlns:a16="http://schemas.microsoft.com/office/drawing/2014/main" id="{E479CD58-F7F4-9A4D-C23E-15AC80DE38A5}"/>
+                <a16:creationId xmlns:a16="http://schemas.microsoft.com/office/drawing/2014/main" id="{22CD123D-9740-BEE1-A42C-EC6713F8CA7F}"/>
               </a:ext>
             </a:extLst>
           </p:cNvPr>
@@ -3601,9 +3601,9 @@
           <a:bodyPr/>
           <a:lstStyle/>
           <a:p>
-            <a:fld id="{C5143365-16B3-4FD5-8BF7-F05E2AA1930B}" type="datetimeFigureOut">
+            <a:fld id="{67949D26-9034-4D83-88EA-A31F57F7C9E2}" type="datetimeFigureOut">
               <a:rPr lang="en-US" smtClean="0"/>
-              <a:t>10/3/2026</a:t>
+              <a:t>10/4/2026</a:t>
             </a:fld>
             <a:endParaRPr lang="en-US"/>
           </a:p>
@@ -3643,7 +3643,7 @@
           <a:bodyPr/>
           <a:lstStyle/>
           <a:p>
-            <a:fld id="{4562F234-49D9-48C6-80E0-9B9318BCC5E8}" type="slidenum">
+            <a:fld id="{7212BDF5-4B35-4116-8BB7-2AC3344F768A}" type="slidenum">
               <a:rPr lang="en-US" smtClean="0"/>
               <a:t>‹#›</a:t>
             </a:fld>
@@ -3656,7 +3656,7 @@
           <p:cNvPr id="8" name="body">
             <a:extLst>
               <a:ext uri="{FF2B5EF4-FFF2-40B4-BE49-F238E27FC236}">
-                <a16:creationId xmlns:a16="http://schemas.microsoft.com/office/drawing/2014/main" id="{1F78B3DE-160F-9F37-306C-269AAF1D91B5}"/>
+                <a16:creationId xmlns:a16="http://schemas.microsoft.com/office/drawing/2014/main" id="{F4652956-A4E1-DE1F-AC21-58C802C14558}"/>
               </a:ext>
             </a:extLst>
           </p:cNvPr>
@@ -3696,7 +3696,7 @@
           <p:cNvPr id="9" name="kpi_value_1">
             <a:extLst>
               <a:ext uri="{FF2B5EF4-FFF2-40B4-BE49-F238E27FC236}">
-                <a16:creationId xmlns:a16="http://schemas.microsoft.com/office/drawing/2014/main" id="{6DB6D244-22E2-5EEE-149B-40F08B456373}"/>
+                <a16:creationId xmlns:a16="http://schemas.microsoft.com/office/drawing/2014/main" id="{D99D058D-F6AC-F6BF-2F2C-E60F3C3FBFFF}"/>
               </a:ext>
             </a:extLst>
           </p:cNvPr>
@@ -3749,7 +3749,7 @@
           <p:cNvPr id="10" name="kpi_label_1">
             <a:extLst>
               <a:ext uri="{FF2B5EF4-FFF2-40B4-BE49-F238E27FC236}">
-                <a16:creationId xmlns:a16="http://schemas.microsoft.com/office/drawing/2014/main" id="{121DDE14-9FE6-1EDB-62E6-9FDD5A0DE9E9}"/>
+                <a16:creationId xmlns:a16="http://schemas.microsoft.com/office/drawing/2014/main" id="{21C069D7-222C-CA2B-31B5-2FB40586B0B2}"/>
               </a:ext>
             </a:extLst>
           </p:cNvPr>
@@ -3797,7 +3797,7 @@
           <p:cNvPr id="11" name="kpi_value_2">
             <a:extLst>
               <a:ext uri="{FF2B5EF4-FFF2-40B4-BE49-F238E27FC236}">
-                <a16:creationId xmlns:a16="http://schemas.microsoft.com/office/drawing/2014/main" id="{ACFBABE5-929A-30E7-3E42-D04FA04634B7}"/>
+                <a16:creationId xmlns:a16="http://schemas.microsoft.com/office/drawing/2014/main" id="{F1225A87-9D0E-EF46-A27F-4CB8DAB71D63}"/>
               </a:ext>
             </a:extLst>
           </p:cNvPr>
@@ -3850,7 +3850,7 @@
           <p:cNvPr id="12" name="kpi_label_2">
             <a:extLst>
               <a:ext uri="{FF2B5EF4-FFF2-40B4-BE49-F238E27FC236}">
-                <a16:creationId xmlns:a16="http://schemas.microsoft.com/office/drawing/2014/main" id="{97E0E250-F6F6-CD13-278A-5AB6070AF3A5}"/>
+                <a16:creationId xmlns:a16="http://schemas.microsoft.com/office/drawing/2014/main" id="{0C5FBE8E-F488-44C2-C153-899C2DAA7240}"/>
               </a:ext>
             </a:extLst>
           </p:cNvPr>
@@ -3898,7 +3898,7 @@
           <p:cNvPr id="13" name="source">
             <a:extLst>
               <a:ext uri="{FF2B5EF4-FFF2-40B4-BE49-F238E27FC236}">
-                <a16:creationId xmlns:a16="http://schemas.microsoft.com/office/drawing/2014/main" id="{0D7E8303-FDE9-634D-41A5-4B38114E355C}"/>
+                <a16:creationId xmlns:a16="http://schemas.microsoft.com/office/drawing/2014/main" id="{859BB80A-95A7-E48F-11ED-6D19F78978FD}"/>
               </a:ext>
             </a:extLst>
           </p:cNvPr>
@@ -3953,7 +3953,7 @@
     </p:spTree>
     <p:extLst>
       <p:ext uri="{BB962C8B-B14F-4D97-AF65-F5344CB8AC3E}">
-        <p14:creationId xmlns:p14="http://schemas.microsoft.com/office/powerpoint/2010/main" val="22636889"/>
+        <p14:creationId xmlns:p14="http://schemas.microsoft.com/office/powerpoint/2010/main" val="1334838452"/>
       </p:ext>
     </p:extLst>
   </p:cSld>
@@ -3985,7 +3985,7 @@
           <p:cNvPr id="7" name="creative_background">
             <a:extLst>
               <a:ext uri="{FF2B5EF4-FFF2-40B4-BE49-F238E27FC236}">
-                <a16:creationId xmlns:a16="http://schemas.microsoft.com/office/drawing/2014/main" id="{D8E37D70-2093-5CC2-EBDF-E31DEA2A3067}"/>
+                <a16:creationId xmlns:a16="http://schemas.microsoft.com/office/drawing/2014/main" id="{1DBE06DC-126B-28B4-56C9-CA726C08F135}"/>
               </a:ext>
             </a:extLst>
           </p:cNvPr>
@@ -4058,9 +4058,9 @@
           <a:bodyPr/>
           <a:lstStyle/>
           <a:p>
-            <a:fld id="{C5143365-16B3-4FD5-8BF7-F05E2AA1930B}" type="datetimeFigureOut">
+            <a:fld id="{67949D26-9034-4D83-88EA-A31F57F7C9E2}" type="datetimeFigureOut">
               <a:rPr lang="en-US" smtClean="0"/>
-              <a:t>10/3/2026</a:t>
+              <a:t>10/4/2026</a:t>
             </a:fld>
             <a:endParaRPr lang="en-US"/>
           </a:p>
@@ -4100,7 +4100,7 @@
           <a:bodyPr/>
           <a:lstStyle/>
           <a:p>
-            <a:fld id="{4562F234-49D9-48C6-80E0-9B9318BCC5E8}" type="slidenum">
+            <a:fld id="{7212BDF5-4B35-4116-8BB7-2AC3344F768A}" type="slidenum">
               <a:rPr lang="en-US" smtClean="0"/>
               <a:t>‹#›</a:t>
             </a:fld>
@@ -4113,7 +4113,7 @@
           <p:cNvPr id="8" name="body">
             <a:extLst>
               <a:ext uri="{FF2B5EF4-FFF2-40B4-BE49-F238E27FC236}">
-                <a16:creationId xmlns:a16="http://schemas.microsoft.com/office/drawing/2014/main" id="{66D5BEDE-CC56-80CE-61F5-6D04467D2264}"/>
+                <a16:creationId xmlns:a16="http://schemas.microsoft.com/office/drawing/2014/main" id="{7D4421F2-FF19-8521-F04D-609C03F736C1}"/>
               </a:ext>
             </a:extLst>
           </p:cNvPr>
@@ -4153,7 +4153,7 @@
           <p:cNvPr id="9" name="kpi_value_1">
             <a:extLst>
               <a:ext uri="{FF2B5EF4-FFF2-40B4-BE49-F238E27FC236}">
-                <a16:creationId xmlns:a16="http://schemas.microsoft.com/office/drawing/2014/main" id="{9AB09239-8527-6D1A-44D4-CDF472F2A555}"/>
+                <a16:creationId xmlns:a16="http://schemas.microsoft.com/office/drawing/2014/main" id="{EFA69833-7BA8-5225-4FBC-59B68CE6B2A6}"/>
               </a:ext>
             </a:extLst>
           </p:cNvPr>
@@ -4206,7 +4206,7 @@
           <p:cNvPr id="10" name="kpi_label_1">
             <a:extLst>
               <a:ext uri="{FF2B5EF4-FFF2-40B4-BE49-F238E27FC236}">
-                <a16:creationId xmlns:a16="http://schemas.microsoft.com/office/drawing/2014/main" id="{5105F842-7BE2-9C2F-777C-35F70AE80ABA}"/>
+                <a16:creationId xmlns:a16="http://schemas.microsoft.com/office/drawing/2014/main" id="{F469F3C7-8E97-6DE1-8848-8D25AD736208}"/>
               </a:ext>
             </a:extLst>
           </p:cNvPr>
@@ -4254,7 +4254,7 @@
           <p:cNvPr id="11" name="kpi_value_2">
             <a:extLst>
               <a:ext uri="{FF2B5EF4-FFF2-40B4-BE49-F238E27FC236}">
-                <a16:creationId xmlns:a16="http://schemas.microsoft.com/office/drawing/2014/main" id="{07471D8A-7218-B085-F34B-59854FB8203B}"/>
+                <a16:creationId xmlns:a16="http://schemas.microsoft.com/office/drawing/2014/main" id="{2CF4F47B-B437-62F2-F52C-E79007AD3987}"/>
               </a:ext>
             </a:extLst>
           </p:cNvPr>
@@ -4307,7 +4307,7 @@
           <p:cNvPr id="12" name="kpi_label_2">
             <a:extLst>
               <a:ext uri="{FF2B5EF4-FFF2-40B4-BE49-F238E27FC236}">
-                <a16:creationId xmlns:a16="http://schemas.microsoft.com/office/drawing/2014/main" id="{7064AC60-8D81-5215-CEB2-AE7A834ABB2A}"/>
+                <a16:creationId xmlns:a16="http://schemas.microsoft.com/office/drawing/2014/main" id="{F9B33850-6833-51E7-EC37-637567C8F791}"/>
               </a:ext>
             </a:extLst>
           </p:cNvPr>
@@ -4355,7 +4355,7 @@
           <p:cNvPr id="13" name="kpi_value_3">
             <a:extLst>
               <a:ext uri="{FF2B5EF4-FFF2-40B4-BE49-F238E27FC236}">
-                <a16:creationId xmlns:a16="http://schemas.microsoft.com/office/drawing/2014/main" id="{03AC1CFB-29D3-D8B4-6413-40C52461425F}"/>
+                <a16:creationId xmlns:a16="http://schemas.microsoft.com/office/drawing/2014/main" id="{7ED15BDF-9813-06E5-BC85-DAD2BD211F4D}"/>
               </a:ext>
             </a:extLst>
           </p:cNvPr>
@@ -4408,7 +4408,7 @@
           <p:cNvPr id="14" name="kpi_label_3">
             <a:extLst>
               <a:ext uri="{FF2B5EF4-FFF2-40B4-BE49-F238E27FC236}">
-                <a16:creationId xmlns:a16="http://schemas.microsoft.com/office/drawing/2014/main" id="{06CF670C-4F02-1CE5-88EF-7B71A0CF4721}"/>
+                <a16:creationId xmlns:a16="http://schemas.microsoft.com/office/drawing/2014/main" id="{75007A07-D5EA-05C7-1932-1F81D053FB99}"/>
               </a:ext>
             </a:extLst>
           </p:cNvPr>
@@ -4456,7 +4456,7 @@
           <p:cNvPr id="15" name="kpi_value_4">
             <a:extLst>
               <a:ext uri="{FF2B5EF4-FFF2-40B4-BE49-F238E27FC236}">
-                <a16:creationId xmlns:a16="http://schemas.microsoft.com/office/drawing/2014/main" id="{00ECE3A8-05CD-A4A7-7CB7-0DF84B28EA7A}"/>
+                <a16:creationId xmlns:a16="http://schemas.microsoft.com/office/drawing/2014/main" id="{629584CF-7871-48B2-CF7D-48C4959E5515}"/>
               </a:ext>
             </a:extLst>
           </p:cNvPr>
@@ -4509,7 +4509,7 @@
           <p:cNvPr id="16" name="kpi_label_4">
             <a:extLst>
               <a:ext uri="{FF2B5EF4-FFF2-40B4-BE49-F238E27FC236}">
-                <a16:creationId xmlns:a16="http://schemas.microsoft.com/office/drawing/2014/main" id="{26704887-A677-D37A-5660-C85224E9C2C2}"/>
+                <a16:creationId xmlns:a16="http://schemas.microsoft.com/office/drawing/2014/main" id="{6A5AF92A-7734-D572-17A7-55D956BE2CE5}"/>
               </a:ext>
             </a:extLst>
           </p:cNvPr>
@@ -4557,7 +4557,7 @@
           <p:cNvPr id="17" name="source">
             <a:extLst>
               <a:ext uri="{FF2B5EF4-FFF2-40B4-BE49-F238E27FC236}">
-                <a16:creationId xmlns:a16="http://schemas.microsoft.com/office/drawing/2014/main" id="{ECB2B68F-EE0A-8E53-14CC-DC0145F8A9EB}"/>
+                <a16:creationId xmlns:a16="http://schemas.microsoft.com/office/drawing/2014/main" id="{A272827A-9B93-C0F5-85C0-ECEFFC5D9E36}"/>
               </a:ext>
             </a:extLst>
           </p:cNvPr>
@@ -4612,7 +4612,7 @@
     </p:spTree>
     <p:extLst>
       <p:ext uri="{BB962C8B-B14F-4D97-AF65-F5344CB8AC3E}">
-        <p14:creationId xmlns:p14="http://schemas.microsoft.com/office/powerpoint/2010/main" val="4167156694"/>
+        <p14:creationId xmlns:p14="http://schemas.microsoft.com/office/powerpoint/2010/main" val="2405339307"/>
       </p:ext>
     </p:extLst>
   </p:cSld>
@@ -4644,7 +4644,7 @@
           <p:cNvPr id="7" name="creative_background">
             <a:extLst>
               <a:ext uri="{FF2B5EF4-FFF2-40B4-BE49-F238E27FC236}">
-                <a16:creationId xmlns:a16="http://schemas.microsoft.com/office/drawing/2014/main" id="{FE7735DB-8060-F36B-57B7-1B98ADA4687F}"/>
+                <a16:creationId xmlns:a16="http://schemas.microsoft.com/office/drawing/2014/main" id="{99E70068-2E07-EA42-49B0-B2242E6FA238}"/>
               </a:ext>
             </a:extLst>
           </p:cNvPr>
@@ -4717,9 +4717,9 @@
           <a:bodyPr/>
           <a:lstStyle/>
           <a:p>
-            <a:fld id="{C5143365-16B3-4FD5-8BF7-F05E2AA1930B}" type="datetimeFigureOut">
+            <a:fld id="{67949D26-9034-4D83-88EA-A31F57F7C9E2}" type="datetimeFigureOut">
               <a:rPr lang="en-US" smtClean="0"/>
-              <a:t>10/3/2026</a:t>
+              <a:t>10/4/2026</a:t>
             </a:fld>
             <a:endParaRPr lang="en-US"/>
           </a:p>
@@ -4759,7 +4759,7 @@
           <a:bodyPr/>
           <a:lstStyle/>
           <a:p>
-            <a:fld id="{4562F234-49D9-48C6-80E0-9B9318BCC5E8}" type="slidenum">
+            <a:fld id="{7212BDF5-4B35-4116-8BB7-2AC3344F768A}" type="slidenum">
               <a:rPr lang="en-US" smtClean="0"/>
               <a:t>‹#›</a:t>
             </a:fld>
@@ -4772,7 +4772,7 @@
           <p:cNvPr id="8" name="item_1_title">
             <a:extLst>
               <a:ext uri="{FF2B5EF4-FFF2-40B4-BE49-F238E27FC236}">
-                <a16:creationId xmlns:a16="http://schemas.microsoft.com/office/drawing/2014/main" id="{C1FF28AA-0A0B-2BCC-41F8-EF061BC35C34}"/>
+                <a16:creationId xmlns:a16="http://schemas.microsoft.com/office/drawing/2014/main" id="{72700CFA-8750-D9A9-F5AE-D6240D7C54B2}"/>
               </a:ext>
             </a:extLst>
           </p:cNvPr>
@@ -4822,7 +4822,7 @@
           <p:cNvPr id="9" name="item_1">
             <a:extLst>
               <a:ext uri="{FF2B5EF4-FFF2-40B4-BE49-F238E27FC236}">
-                <a16:creationId xmlns:a16="http://schemas.microsoft.com/office/drawing/2014/main" id="{2E0F4FBB-8337-C603-E257-4044F02F45D3}"/>
+                <a16:creationId xmlns:a16="http://schemas.microsoft.com/office/drawing/2014/main" id="{54945D20-727C-2CAD-2A81-D3CCFBB76886}"/>
               </a:ext>
             </a:extLst>
           </p:cNvPr>
@@ -4870,7 +4870,7 @@
           <p:cNvPr id="10" name="item_2_title">
             <a:extLst>
               <a:ext uri="{FF2B5EF4-FFF2-40B4-BE49-F238E27FC236}">
-                <a16:creationId xmlns:a16="http://schemas.microsoft.com/office/drawing/2014/main" id="{647F38A2-6657-6068-DC0D-19D482DFA784}"/>
+                <a16:creationId xmlns:a16="http://schemas.microsoft.com/office/drawing/2014/main" id="{DFAF47EC-3CC7-A1F4-4D20-35DD2F5729AC}"/>
               </a:ext>
             </a:extLst>
           </p:cNvPr>
@@ -4923,7 +4923,7 @@
           <p:cNvPr id="11" name="item_2">
             <a:extLst>
               <a:ext uri="{FF2B5EF4-FFF2-40B4-BE49-F238E27FC236}">
-                <a16:creationId xmlns:a16="http://schemas.microsoft.com/office/drawing/2014/main" id="{E4D2B2C0-EF97-1A77-0ECD-7DCD317FF9A9}"/>
+                <a16:creationId xmlns:a16="http://schemas.microsoft.com/office/drawing/2014/main" id="{FC21F6CE-BFC0-45B2-8D74-19FF1058AF2C}"/>
               </a:ext>
             </a:extLst>
           </p:cNvPr>
@@ -4971,7 +4971,7 @@
           <p:cNvPr id="12" name="item_3_title">
             <a:extLst>
               <a:ext uri="{FF2B5EF4-FFF2-40B4-BE49-F238E27FC236}">
-                <a16:creationId xmlns:a16="http://schemas.microsoft.com/office/drawing/2014/main" id="{AF86D072-3479-52A8-C0B5-3198928D43EE}"/>
+                <a16:creationId xmlns:a16="http://schemas.microsoft.com/office/drawing/2014/main" id="{718FD690-5657-731B-1B6D-AEDCE2D9E823}"/>
               </a:ext>
             </a:extLst>
           </p:cNvPr>
@@ -5024,7 +5024,7 @@
           <p:cNvPr id="13" name="item_3">
             <a:extLst>
               <a:ext uri="{FF2B5EF4-FFF2-40B4-BE49-F238E27FC236}">
-                <a16:creationId xmlns:a16="http://schemas.microsoft.com/office/drawing/2014/main" id="{9ADCCECD-E032-7BD9-4C15-0EE658B85214}"/>
+                <a16:creationId xmlns:a16="http://schemas.microsoft.com/office/drawing/2014/main" id="{E12F4D24-5CCB-43E8-827B-7BCA3FDF577E}"/>
               </a:ext>
             </a:extLst>
           </p:cNvPr>
@@ -5072,7 +5072,7 @@
           <p:cNvPr id="14" name="item_4_title">
             <a:extLst>
               <a:ext uri="{FF2B5EF4-FFF2-40B4-BE49-F238E27FC236}">
-                <a16:creationId xmlns:a16="http://schemas.microsoft.com/office/drawing/2014/main" id="{0BA8C721-39B2-CAF4-E9CB-F216471C4427}"/>
+                <a16:creationId xmlns:a16="http://schemas.microsoft.com/office/drawing/2014/main" id="{8E57BC7B-8DAA-A246-67A6-E46B73E40CF5}"/>
               </a:ext>
             </a:extLst>
           </p:cNvPr>
@@ -5125,7 +5125,7 @@
           <p:cNvPr id="15" name="item_4">
             <a:extLst>
               <a:ext uri="{FF2B5EF4-FFF2-40B4-BE49-F238E27FC236}">
-                <a16:creationId xmlns:a16="http://schemas.microsoft.com/office/drawing/2014/main" id="{ACF1CCFE-6C4E-FDA3-B235-E8F0862ADEA1}"/>
+                <a16:creationId xmlns:a16="http://schemas.microsoft.com/office/drawing/2014/main" id="{5C337ADD-96D7-A616-E35A-EC5D14E51C72}"/>
               </a:ext>
             </a:extLst>
           </p:cNvPr>
@@ -5173,7 +5173,7 @@
           <p:cNvPr id="16" name="source">
             <a:extLst>
               <a:ext uri="{FF2B5EF4-FFF2-40B4-BE49-F238E27FC236}">
-                <a16:creationId xmlns:a16="http://schemas.microsoft.com/office/drawing/2014/main" id="{2BEC5BE9-3BC5-BB79-943F-6316DDC16045}"/>
+                <a16:creationId xmlns:a16="http://schemas.microsoft.com/office/drawing/2014/main" id="{A769A8ED-5DF3-1D39-2F8C-D79B7C2CCD64}"/>
               </a:ext>
             </a:extLst>
           </p:cNvPr>
@@ -5228,7 +5228,7 @@
     </p:spTree>
     <p:extLst>
       <p:ext uri="{BB962C8B-B14F-4D97-AF65-F5344CB8AC3E}">
-        <p14:creationId xmlns:p14="http://schemas.microsoft.com/office/powerpoint/2010/main" val="805088520"/>
+        <p14:creationId xmlns:p14="http://schemas.microsoft.com/office/powerpoint/2010/main" val="1372403222"/>
       </p:ext>
     </p:extLst>
   </p:cSld>
@@ -5260,7 +5260,7 @@
           <p:cNvPr id="7" name="creative_background">
             <a:extLst>
               <a:ext uri="{FF2B5EF4-FFF2-40B4-BE49-F238E27FC236}">
-                <a16:creationId xmlns:a16="http://schemas.microsoft.com/office/drawing/2014/main" id="{A9CC1909-CF02-DB55-6D23-A8E4BA30AA11}"/>
+                <a16:creationId xmlns:a16="http://schemas.microsoft.com/office/drawing/2014/main" id="{DA5F7152-80BC-D60B-97D6-0CA0418E8D30}"/>
               </a:ext>
             </a:extLst>
           </p:cNvPr>
@@ -5333,9 +5333,9 @@
           <a:bodyPr/>
           <a:lstStyle/>
           <a:p>
-            <a:fld id="{C5143365-16B3-4FD5-8BF7-F05E2AA1930B}" type="datetimeFigureOut">
+            <a:fld id="{67949D26-9034-4D83-88EA-A31F57F7C9E2}" type="datetimeFigureOut">
               <a:rPr lang="en-US" smtClean="0"/>
-              <a:t>10/3/2026</a:t>
+              <a:t>10/4/2026</a:t>
             </a:fld>
             <a:endParaRPr lang="en-US"/>
           </a:p>
@@ -5375,7 +5375,7 @@
           <a:bodyPr/>
           <a:lstStyle/>
           <a:p>
-            <a:fld id="{4562F234-49D9-48C6-80E0-9B9318BCC5E8}" type="slidenum">
+            <a:fld id="{7212BDF5-4B35-4116-8BB7-2AC3344F768A}" type="slidenum">
               <a:rPr lang="en-US" smtClean="0"/>
               <a:t>‹#›</a:t>
             </a:fld>
@@ -5388,7 +5388,7 @@
           <p:cNvPr id="8" name="marker_1">
             <a:extLst>
               <a:ext uri="{FF2B5EF4-FFF2-40B4-BE49-F238E27FC236}">
-                <a16:creationId xmlns:a16="http://schemas.microsoft.com/office/drawing/2014/main" id="{2522AB7F-CC18-D660-B269-C87DC186268D}"/>
+                <a16:creationId xmlns:a16="http://schemas.microsoft.com/office/drawing/2014/main" id="{637EF9D2-191F-BCF6-A2AD-9C1313320B56}"/>
               </a:ext>
             </a:extLst>
           </p:cNvPr>
@@ -5444,7 +5444,7 @@
           <p:cNvPr id="9" name="item_1_title">
             <a:extLst>
               <a:ext uri="{FF2B5EF4-FFF2-40B4-BE49-F238E27FC236}">
-                <a16:creationId xmlns:a16="http://schemas.microsoft.com/office/drawing/2014/main" id="{2602CA2D-5F33-5854-AD01-25419066F1A1}"/>
+                <a16:creationId xmlns:a16="http://schemas.microsoft.com/office/drawing/2014/main" id="{1235881A-B818-4EA8-8459-9C501C7BC963}"/>
               </a:ext>
             </a:extLst>
           </p:cNvPr>
@@ -5497,7 +5497,7 @@
           <p:cNvPr id="10" name="item_1">
             <a:extLst>
               <a:ext uri="{FF2B5EF4-FFF2-40B4-BE49-F238E27FC236}">
-                <a16:creationId xmlns:a16="http://schemas.microsoft.com/office/drawing/2014/main" id="{D97E5A51-AE3F-C4F7-5A5F-994B26BBF9C1}"/>
+                <a16:creationId xmlns:a16="http://schemas.microsoft.com/office/drawing/2014/main" id="{0F120736-34C1-5D41-DC65-8ADBB2603E6C}"/>
               </a:ext>
             </a:extLst>
           </p:cNvPr>
@@ -5545,7 +5545,7 @@
           <p:cNvPr id="11" name="marker_2">
             <a:extLst>
               <a:ext uri="{FF2B5EF4-FFF2-40B4-BE49-F238E27FC236}">
-                <a16:creationId xmlns:a16="http://schemas.microsoft.com/office/drawing/2014/main" id="{DE71D4A6-69AB-2083-88C5-B58567E03FAB}"/>
+                <a16:creationId xmlns:a16="http://schemas.microsoft.com/office/drawing/2014/main" id="{443DFB9D-1917-CDB2-8843-83563D18D88B}"/>
               </a:ext>
             </a:extLst>
           </p:cNvPr>
@@ -5601,7 +5601,7 @@
           <p:cNvPr id="12" name="item_2_title">
             <a:extLst>
               <a:ext uri="{FF2B5EF4-FFF2-40B4-BE49-F238E27FC236}">
-                <a16:creationId xmlns:a16="http://schemas.microsoft.com/office/drawing/2014/main" id="{1BC21F53-9F73-3819-2208-B8D61AC32DDD}"/>
+                <a16:creationId xmlns:a16="http://schemas.microsoft.com/office/drawing/2014/main" id="{9EE32068-02D5-C66A-61F0-B46592EC7934}"/>
               </a:ext>
             </a:extLst>
           </p:cNvPr>
@@ -5654,7 +5654,7 @@
           <p:cNvPr id="13" name="item_2">
             <a:extLst>
               <a:ext uri="{FF2B5EF4-FFF2-40B4-BE49-F238E27FC236}">
-                <a16:creationId xmlns:a16="http://schemas.microsoft.com/office/drawing/2014/main" id="{356DD7D5-3734-9A81-7AA8-91D355C3F1D2}"/>
+                <a16:creationId xmlns:a16="http://schemas.microsoft.com/office/drawing/2014/main" id="{17ECCFC5-AD8C-E0ED-490F-343C206F1823}"/>
               </a:ext>
             </a:extLst>
           </p:cNvPr>
@@ -5702,7 +5702,7 @@
           <p:cNvPr id="14" name="source">
             <a:extLst>
               <a:ext uri="{FF2B5EF4-FFF2-40B4-BE49-F238E27FC236}">
-                <a16:creationId xmlns:a16="http://schemas.microsoft.com/office/drawing/2014/main" id="{26E561F1-9909-3792-BE51-639D24634C1A}"/>
+                <a16:creationId xmlns:a16="http://schemas.microsoft.com/office/drawing/2014/main" id="{CFBD8775-2753-0CD9-8CFF-9FFC4FBF51A4}"/>
               </a:ext>
             </a:extLst>
           </p:cNvPr>
@@ -5757,7 +5757,7 @@
     </p:spTree>
     <p:extLst>
       <p:ext uri="{BB962C8B-B14F-4D97-AF65-F5344CB8AC3E}">
-        <p14:creationId xmlns:p14="http://schemas.microsoft.com/office/powerpoint/2010/main" val="824451990"/>
+        <p14:creationId xmlns:p14="http://schemas.microsoft.com/office/powerpoint/2010/main" val="979150665"/>
       </p:ext>
     </p:extLst>
   </p:cSld>
@@ -5789,7 +5789,7 @@
           <p:cNvPr id="7" name="creative_background">
             <a:extLst>
               <a:ext uri="{FF2B5EF4-FFF2-40B4-BE49-F238E27FC236}">
-                <a16:creationId xmlns:a16="http://schemas.microsoft.com/office/drawing/2014/main" id="{877E1C72-4150-1B57-E44B-1413BE806169}"/>
+                <a16:creationId xmlns:a16="http://schemas.microsoft.com/office/drawing/2014/main" id="{54B5AB76-99CF-BF59-F47D-08E119856592}"/>
               </a:ext>
             </a:extLst>
           </p:cNvPr>
@@ -5862,9 +5862,9 @@
           <a:bodyPr/>
           <a:lstStyle/>
           <a:p>
-            <a:fld id="{C5143365-16B3-4FD5-8BF7-F05E2AA1930B}" type="datetimeFigureOut">
+            <a:fld id="{67949D26-9034-4D83-88EA-A31F57F7C9E2}" type="datetimeFigureOut">
               <a:rPr lang="en-US" smtClean="0"/>
-              <a:t>10/3/2026</a:t>
+              <a:t>10/4/2026</a:t>
             </a:fld>
             <a:endParaRPr lang="en-US"/>
           </a:p>
@@ -5904,7 +5904,7 @@
           <a:bodyPr/>
           <a:lstStyle/>
           <a:p>
-            <a:fld id="{4562F234-49D9-48C6-80E0-9B9318BCC5E8}" type="slidenum">
+            <a:fld id="{7212BDF5-4B35-4116-8BB7-2AC3344F768A}" type="slidenum">
               <a:rPr lang="en-US" smtClean="0"/>
               <a:t>‹#›</a:t>
             </a:fld>
@@ -5917,7 +5917,7 @@
           <p:cNvPr id="8" name="item_1_title">
             <a:extLst>
               <a:ext uri="{FF2B5EF4-FFF2-40B4-BE49-F238E27FC236}">
-                <a16:creationId xmlns:a16="http://schemas.microsoft.com/office/drawing/2014/main" id="{3D6A6C7E-21FC-7851-7D9A-BD2182474FB1}"/>
+                <a16:creationId xmlns:a16="http://schemas.microsoft.com/office/drawing/2014/main" id="{9DAEEA74-E220-EA8F-C87E-EDAC0D8E6591}"/>
               </a:ext>
             </a:extLst>
           </p:cNvPr>
@@ -5967,7 +5967,7 @@
           <p:cNvPr id="9" name="item_1">
             <a:extLst>
               <a:ext uri="{FF2B5EF4-FFF2-40B4-BE49-F238E27FC236}">
-                <a16:creationId xmlns:a16="http://schemas.microsoft.com/office/drawing/2014/main" id="{FF704F08-1EC5-C5B3-A220-A3C22E061C30}"/>
+                <a16:creationId xmlns:a16="http://schemas.microsoft.com/office/drawing/2014/main" id="{759848B7-FC89-A301-60BA-087F7085F28A}"/>
               </a:ext>
             </a:extLst>
           </p:cNvPr>
@@ -6015,7 +6015,7 @@
           <p:cNvPr id="10" name="item_2_title">
             <a:extLst>
               <a:ext uri="{FF2B5EF4-FFF2-40B4-BE49-F238E27FC236}">
-                <a16:creationId xmlns:a16="http://schemas.microsoft.com/office/drawing/2014/main" id="{9C4FED94-6033-50D3-1EDD-7F048A072A6E}"/>
+                <a16:creationId xmlns:a16="http://schemas.microsoft.com/office/drawing/2014/main" id="{FE239D31-C11F-E2E1-3870-3E23936488E4}"/>
               </a:ext>
             </a:extLst>
           </p:cNvPr>
@@ -6068,7 +6068,7 @@
           <p:cNvPr id="11" name="item_2">
             <a:extLst>
               <a:ext uri="{FF2B5EF4-FFF2-40B4-BE49-F238E27FC236}">
-                <a16:creationId xmlns:a16="http://schemas.microsoft.com/office/drawing/2014/main" id="{86D1E923-A02D-E9C6-147D-654364B1E25D}"/>
+                <a16:creationId xmlns:a16="http://schemas.microsoft.com/office/drawing/2014/main" id="{20900D7F-0E25-1EE6-0CE3-893DB63821A4}"/>
               </a:ext>
             </a:extLst>
           </p:cNvPr>
@@ -6116,7 +6116,7 @@
           <p:cNvPr id="12" name="item_3_title">
             <a:extLst>
               <a:ext uri="{FF2B5EF4-FFF2-40B4-BE49-F238E27FC236}">
-                <a16:creationId xmlns:a16="http://schemas.microsoft.com/office/drawing/2014/main" id="{D13B118F-7E01-A649-B52F-90E76F5D662E}"/>
+                <a16:creationId xmlns:a16="http://schemas.microsoft.com/office/drawing/2014/main" id="{D5DA18B9-5346-BEA0-2F13-60702B81126C}"/>
               </a:ext>
             </a:extLst>
           </p:cNvPr>
@@ -6169,7 +6169,7 @@
           <p:cNvPr id="13" name="item_3">
             <a:extLst>
               <a:ext uri="{FF2B5EF4-FFF2-40B4-BE49-F238E27FC236}">
-                <a16:creationId xmlns:a16="http://schemas.microsoft.com/office/drawing/2014/main" id="{EBD7DCE2-E5F5-8CEC-89D5-1F7D7FC6CD48}"/>
+                <a16:creationId xmlns:a16="http://schemas.microsoft.com/office/drawing/2014/main" id="{C4E615FF-E469-BA8E-A940-13D87A3398F9}"/>
               </a:ext>
             </a:extLst>
           </p:cNvPr>
@@ -6217,7 +6217,7 @@
           <p:cNvPr id="14" name="item_4_title">
             <a:extLst>
               <a:ext uri="{FF2B5EF4-FFF2-40B4-BE49-F238E27FC236}">
-                <a16:creationId xmlns:a16="http://schemas.microsoft.com/office/drawing/2014/main" id="{91E73778-1C38-08D9-7484-1185953AC26D}"/>
+                <a16:creationId xmlns:a16="http://schemas.microsoft.com/office/drawing/2014/main" id="{96D64FBB-A99D-0677-E830-D2FB5E0AD6ED}"/>
               </a:ext>
             </a:extLst>
           </p:cNvPr>
@@ -6270,7 +6270,7 @@
           <p:cNvPr id="15" name="item_4">
             <a:extLst>
               <a:ext uri="{FF2B5EF4-FFF2-40B4-BE49-F238E27FC236}">
-                <a16:creationId xmlns:a16="http://schemas.microsoft.com/office/drawing/2014/main" id="{6C3747A6-80D3-50B7-51A5-DE8EE4B16FDC}"/>
+                <a16:creationId xmlns:a16="http://schemas.microsoft.com/office/drawing/2014/main" id="{D43755F6-8F6E-8D29-2195-5F57FBA79F82}"/>
               </a:ext>
             </a:extLst>
           </p:cNvPr>
@@ -6318,7 +6318,7 @@
           <p:cNvPr id="16" name="source">
             <a:extLst>
               <a:ext uri="{FF2B5EF4-FFF2-40B4-BE49-F238E27FC236}">
-                <a16:creationId xmlns:a16="http://schemas.microsoft.com/office/drawing/2014/main" id="{0963D1C3-CE3A-1337-34FE-B294C9D53AB2}"/>
+                <a16:creationId xmlns:a16="http://schemas.microsoft.com/office/drawing/2014/main" id="{20ED9D2E-BF84-9AF5-ABF4-B717B414C97F}"/>
               </a:ext>
             </a:extLst>
           </p:cNvPr>
@@ -6373,7 +6373,7 @@
     </p:spTree>
     <p:extLst>
       <p:ext uri="{BB962C8B-B14F-4D97-AF65-F5344CB8AC3E}">
-        <p14:creationId xmlns:p14="http://schemas.microsoft.com/office/powerpoint/2010/main" val="2753329450"/>
+        <p14:creationId xmlns:p14="http://schemas.microsoft.com/office/powerpoint/2010/main" val="1580944137"/>
       </p:ext>
     </p:extLst>
   </p:cSld>
@@ -6405,7 +6405,7 @@
           <p:cNvPr id="7" name="creative_background">
             <a:extLst>
               <a:ext uri="{FF2B5EF4-FFF2-40B4-BE49-F238E27FC236}">
-                <a16:creationId xmlns:a16="http://schemas.microsoft.com/office/drawing/2014/main" id="{61AED8DC-5866-5022-BDA8-0FBBD1D3A702}"/>
+                <a16:creationId xmlns:a16="http://schemas.microsoft.com/office/drawing/2014/main" id="{4856B1A0-D4A9-8EA2-46C8-8A9037D8A6DB}"/>
               </a:ext>
             </a:extLst>
           </p:cNvPr>
@@ -6478,9 +6478,9 @@
           <a:bodyPr/>
           <a:lstStyle/>
           <a:p>
-            <a:fld id="{C5143365-16B3-4FD5-8BF7-F05E2AA1930B}" type="datetimeFigureOut">
+            <a:fld id="{67949D26-9034-4D83-88EA-A31F57F7C9E2}" type="datetimeFigureOut">
               <a:rPr lang="en-US" smtClean="0"/>
-              <a:t>10/3/2026</a:t>
+              <a:t>10/4/2026</a:t>
             </a:fld>
             <a:endParaRPr lang="en-US"/>
           </a:p>
@@ -6520,7 +6520,7 @@
           <a:bodyPr/>
           <a:lstStyle/>
           <a:p>
-            <a:fld id="{4562F234-49D9-48C6-80E0-9B9318BCC5E8}" type="slidenum">
+            <a:fld id="{7212BDF5-4B35-4116-8BB7-2AC3344F768A}" type="slidenum">
               <a:rPr lang="en-US" smtClean="0"/>
               <a:t>‹#›</a:t>
             </a:fld>
@@ -6533,7 +6533,7 @@
           <p:cNvPr id="8" name="item_1_title">
             <a:extLst>
               <a:ext uri="{FF2B5EF4-FFF2-40B4-BE49-F238E27FC236}">
-                <a16:creationId xmlns:a16="http://schemas.microsoft.com/office/drawing/2014/main" id="{5E215783-639D-E65C-FF1E-4BE449CCA111}"/>
+                <a16:creationId xmlns:a16="http://schemas.microsoft.com/office/drawing/2014/main" id="{C836F276-8C84-CAC5-3609-58042BF2A58C}"/>
               </a:ext>
             </a:extLst>
           </p:cNvPr>
@@ -6583,7 +6583,7 @@
           <p:cNvPr id="9" name="item_1">
             <a:extLst>
               <a:ext uri="{FF2B5EF4-FFF2-40B4-BE49-F238E27FC236}">
-                <a16:creationId xmlns:a16="http://schemas.microsoft.com/office/drawing/2014/main" id="{214E6857-5793-1D5D-F153-F811FD7DCC1F}"/>
+                <a16:creationId xmlns:a16="http://schemas.microsoft.com/office/drawing/2014/main" id="{D91B6521-B52E-BA5D-BE67-A1EAB8D0657B}"/>
               </a:ext>
             </a:extLst>
           </p:cNvPr>
@@ -6631,7 +6631,7 @@
           <p:cNvPr id="10" name="item_2_title">
             <a:extLst>
               <a:ext uri="{FF2B5EF4-FFF2-40B4-BE49-F238E27FC236}">
-                <a16:creationId xmlns:a16="http://schemas.microsoft.com/office/drawing/2014/main" id="{C0E7D55A-AEAB-5EF9-2F91-4461292E652C}"/>
+                <a16:creationId xmlns:a16="http://schemas.microsoft.com/office/drawing/2014/main" id="{62E109F5-E5EC-4E5C-35FE-05A0EEA58483}"/>
               </a:ext>
             </a:extLst>
           </p:cNvPr>
@@ -6684,7 +6684,7 @@
           <p:cNvPr id="11" name="item_2">
             <a:extLst>
               <a:ext uri="{FF2B5EF4-FFF2-40B4-BE49-F238E27FC236}">
-                <a16:creationId xmlns:a16="http://schemas.microsoft.com/office/drawing/2014/main" id="{146ED47B-52D9-B8CD-0DFC-1870AFDAD899}"/>
+                <a16:creationId xmlns:a16="http://schemas.microsoft.com/office/drawing/2014/main" id="{E383339B-D9DB-FB54-AFEB-A2BE4FDD5188}"/>
               </a:ext>
             </a:extLst>
           </p:cNvPr>
@@ -6732,7 +6732,7 @@
           <p:cNvPr id="12" name="item_3_title">
             <a:extLst>
               <a:ext uri="{FF2B5EF4-FFF2-40B4-BE49-F238E27FC236}">
-                <a16:creationId xmlns:a16="http://schemas.microsoft.com/office/drawing/2014/main" id="{00CDF7E8-F069-1587-A8EB-6CAFC0187420}"/>
+                <a16:creationId xmlns:a16="http://schemas.microsoft.com/office/drawing/2014/main" id="{EA0FFBC0-45BA-323C-F359-8089D61F8011}"/>
               </a:ext>
             </a:extLst>
           </p:cNvPr>
@@ -6785,7 +6785,7 @@
           <p:cNvPr id="13" name="item_3">
             <a:extLst>
               <a:ext uri="{FF2B5EF4-FFF2-40B4-BE49-F238E27FC236}">
-                <a16:creationId xmlns:a16="http://schemas.microsoft.com/office/drawing/2014/main" id="{CDAA5693-4858-CEF1-2B3E-567FCD718456}"/>
+                <a16:creationId xmlns:a16="http://schemas.microsoft.com/office/drawing/2014/main" id="{FCDB8E54-97A8-43C2-A149-0105629C36A5}"/>
               </a:ext>
             </a:extLst>
           </p:cNvPr>
@@ -6833,7 +6833,7 @@
           <p:cNvPr id="14" name="item_4_title">
             <a:extLst>
               <a:ext uri="{FF2B5EF4-FFF2-40B4-BE49-F238E27FC236}">
-                <a16:creationId xmlns:a16="http://schemas.microsoft.com/office/drawing/2014/main" id="{A441FCCF-48DA-12A4-C1CE-07B754400292}"/>
+                <a16:creationId xmlns:a16="http://schemas.microsoft.com/office/drawing/2014/main" id="{C7611200-6951-B8B2-3F4D-C4C5FCB002DC}"/>
               </a:ext>
             </a:extLst>
           </p:cNvPr>
@@ -6886,7 +6886,7 @@
           <p:cNvPr id="15" name="item_4">
             <a:extLst>
               <a:ext uri="{FF2B5EF4-FFF2-40B4-BE49-F238E27FC236}">
-                <a16:creationId xmlns:a16="http://schemas.microsoft.com/office/drawing/2014/main" id="{939C1C08-C6CC-6450-A833-953937A9D5B7}"/>
+                <a16:creationId xmlns:a16="http://schemas.microsoft.com/office/drawing/2014/main" id="{2CBA93FD-8B03-C555-98CB-936E40DE99D4}"/>
               </a:ext>
             </a:extLst>
           </p:cNvPr>
@@ -6934,7 +6934,7 @@
           <p:cNvPr id="16" name="source">
             <a:extLst>
               <a:ext uri="{FF2B5EF4-FFF2-40B4-BE49-F238E27FC236}">
-                <a16:creationId xmlns:a16="http://schemas.microsoft.com/office/drawing/2014/main" id="{A6D046B5-C390-702D-A265-8E3954BAEC77}"/>
+                <a16:creationId xmlns:a16="http://schemas.microsoft.com/office/drawing/2014/main" id="{15781354-65B5-F5C8-53A3-CD2E90B15A28}"/>
               </a:ext>
             </a:extLst>
           </p:cNvPr>
@@ -6989,7 +6989,7 @@
     </p:spTree>
     <p:extLst>
       <p:ext uri="{BB962C8B-B14F-4D97-AF65-F5344CB8AC3E}">
-        <p14:creationId xmlns:p14="http://schemas.microsoft.com/office/powerpoint/2010/main" val="957893231"/>
+        <p14:creationId xmlns:p14="http://schemas.microsoft.com/office/powerpoint/2010/main" val="3613576259"/>
       </p:ext>
     </p:extLst>
   </p:cSld>
@@ -7021,7 +7021,7 @@
           <p:cNvPr id="7" name="creative_background">
             <a:extLst>
               <a:ext uri="{FF2B5EF4-FFF2-40B4-BE49-F238E27FC236}">
-                <a16:creationId xmlns:a16="http://schemas.microsoft.com/office/drawing/2014/main" id="{6436F46D-23E3-F1F1-686F-FCB701A58819}"/>
+                <a16:creationId xmlns:a16="http://schemas.microsoft.com/office/drawing/2014/main" id="{FB85D635-5FF2-CDE6-E338-B5BAC5385094}"/>
               </a:ext>
             </a:extLst>
           </p:cNvPr>
@@ -7094,9 +7094,9 @@
           <a:bodyPr/>
           <a:lstStyle/>
           <a:p>
-            <a:fld id="{C5143365-16B3-4FD5-8BF7-F05E2AA1930B}" type="datetimeFigureOut">
+            <a:fld id="{67949D26-9034-4D83-88EA-A31F57F7C9E2}" type="datetimeFigureOut">
               <a:rPr lang="en-US" smtClean="0"/>
-              <a:t>10/3/2026</a:t>
+              <a:t>10/4/2026</a:t>
             </a:fld>
             <a:endParaRPr lang="en-US"/>
           </a:p>
@@ -7136,7 +7136,7 @@
           <a:bodyPr/>
           <a:lstStyle/>
           <a:p>
-            <a:fld id="{4562F234-49D9-48C6-80E0-9B9318BCC5E8}" type="slidenum">
+            <a:fld id="{7212BDF5-4B35-4116-8BB7-2AC3344F768A}" type="slidenum">
               <a:rPr lang="en-US" smtClean="0"/>
               <a:t>‹#›</a:t>
             </a:fld>
@@ -7149,7 +7149,7 @@
           <p:cNvPr id="8" name="kpi_value_1">
             <a:extLst>
               <a:ext uri="{FF2B5EF4-FFF2-40B4-BE49-F238E27FC236}">
-                <a16:creationId xmlns:a16="http://schemas.microsoft.com/office/drawing/2014/main" id="{F44BE2BE-0095-56D0-8E48-8D08DC34E061}"/>
+                <a16:creationId xmlns:a16="http://schemas.microsoft.com/office/drawing/2014/main" id="{02016512-99BA-FB67-B158-69F8347E8480}"/>
               </a:ext>
             </a:extLst>
           </p:cNvPr>
@@ -7199,7 +7199,7 @@
           <p:cNvPr id="9" name="kpi_label_1">
             <a:extLst>
               <a:ext uri="{FF2B5EF4-FFF2-40B4-BE49-F238E27FC236}">
-                <a16:creationId xmlns:a16="http://schemas.microsoft.com/office/drawing/2014/main" id="{7043E81B-15EB-AFCD-8445-1C1EFF372618}"/>
+                <a16:creationId xmlns:a16="http://schemas.microsoft.com/office/drawing/2014/main" id="{C8F9D596-BF75-9A31-A6AE-CB9376AFDCAE}"/>
               </a:ext>
             </a:extLst>
           </p:cNvPr>
@@ -7247,7 +7247,7 @@
           <p:cNvPr id="10" name="quote">
             <a:extLst>
               <a:ext uri="{FF2B5EF4-FFF2-40B4-BE49-F238E27FC236}">
-                <a16:creationId xmlns:a16="http://schemas.microsoft.com/office/drawing/2014/main" id="{6E3CEE9C-5C63-780B-0BA8-B0773505BEE1}"/>
+                <a16:creationId xmlns:a16="http://schemas.microsoft.com/office/drawing/2014/main" id="{09618017-8A44-2CD4-5B7B-13F33CE7B701}"/>
               </a:ext>
             </a:extLst>
           </p:cNvPr>
@@ -7297,7 +7297,7 @@
           <p:cNvPr id="11" name="attribution">
             <a:extLst>
               <a:ext uri="{FF2B5EF4-FFF2-40B4-BE49-F238E27FC236}">
-                <a16:creationId xmlns:a16="http://schemas.microsoft.com/office/drawing/2014/main" id="{05FC4DFB-85C9-7ABE-E607-907D1B5E0DF0}"/>
+                <a16:creationId xmlns:a16="http://schemas.microsoft.com/office/drawing/2014/main" id="{70D34ADB-097D-BD94-AD5B-C0CC6190EEF5}"/>
               </a:ext>
             </a:extLst>
           </p:cNvPr>
@@ -7345,7 +7345,7 @@
           <p:cNvPr id="12" name="item_1_title">
             <a:extLst>
               <a:ext uri="{FF2B5EF4-FFF2-40B4-BE49-F238E27FC236}">
-                <a16:creationId xmlns:a16="http://schemas.microsoft.com/office/drawing/2014/main" id="{F6082473-47B3-16D6-0CE5-A8FE89B46DFA}"/>
+                <a16:creationId xmlns:a16="http://schemas.microsoft.com/office/drawing/2014/main" id="{3037C731-665B-6CCF-3E5F-DFA08663580D}"/>
               </a:ext>
             </a:extLst>
           </p:cNvPr>
@@ -7398,7 +7398,7 @@
           <p:cNvPr id="13" name="item_1">
             <a:extLst>
               <a:ext uri="{FF2B5EF4-FFF2-40B4-BE49-F238E27FC236}">
-                <a16:creationId xmlns:a16="http://schemas.microsoft.com/office/drawing/2014/main" id="{BD1C621C-A577-122F-0B7C-F9A77796F474}"/>
+                <a16:creationId xmlns:a16="http://schemas.microsoft.com/office/drawing/2014/main" id="{04686E41-A68C-EB1F-61C0-B6DF76325658}"/>
               </a:ext>
             </a:extLst>
           </p:cNvPr>
@@ -7446,7 +7446,7 @@
           <p:cNvPr id="14" name="source">
             <a:extLst>
               <a:ext uri="{FF2B5EF4-FFF2-40B4-BE49-F238E27FC236}">
-                <a16:creationId xmlns:a16="http://schemas.microsoft.com/office/drawing/2014/main" id="{828293A3-A4E9-A902-9EED-BA1E9ECD08D0}"/>
+                <a16:creationId xmlns:a16="http://schemas.microsoft.com/office/drawing/2014/main" id="{EC35C72A-51FF-CE1A-F73D-48A4517CA7F1}"/>
               </a:ext>
             </a:extLst>
           </p:cNvPr>
@@ -7501,7 +7501,7 @@
     </p:spTree>
     <p:extLst>
       <p:ext uri="{BB962C8B-B14F-4D97-AF65-F5344CB8AC3E}">
-        <p14:creationId xmlns:p14="http://schemas.microsoft.com/office/powerpoint/2010/main" val="1982738282"/>
+        <p14:creationId xmlns:p14="http://schemas.microsoft.com/office/powerpoint/2010/main" val="3626124997"/>
       </p:ext>
     </p:extLst>
   </p:cSld>
@@ -7533,7 +7533,7 @@
           <p:cNvPr id="7" name="creative_background">
             <a:extLst>
               <a:ext uri="{FF2B5EF4-FFF2-40B4-BE49-F238E27FC236}">
-                <a16:creationId xmlns:a16="http://schemas.microsoft.com/office/drawing/2014/main" id="{E9889BEE-0E9C-5772-B18F-182256C7509F}"/>
+                <a16:creationId xmlns:a16="http://schemas.microsoft.com/office/drawing/2014/main" id="{2E4EFBFA-35E9-19A7-5519-E58A72EE0084}"/>
               </a:ext>
             </a:extLst>
           </p:cNvPr>
@@ -7606,9 +7606,9 @@
           <a:bodyPr/>
           <a:lstStyle/>
           <a:p>
-            <a:fld id="{C5143365-16B3-4FD5-8BF7-F05E2AA1930B}" type="datetimeFigureOut">
+            <a:fld id="{67949D26-9034-4D83-88EA-A31F57F7C9E2}" type="datetimeFigureOut">
               <a:rPr lang="en-US" smtClean="0"/>
-              <a:t>10/3/2026</a:t>
+              <a:t>10/4/2026</a:t>
             </a:fld>
             <a:endParaRPr lang="en-US"/>
           </a:p>
@@ -7648,7 +7648,7 @@
           <a:bodyPr/>
           <a:lstStyle/>
           <a:p>
-            <a:fld id="{4562F234-49D9-48C6-80E0-9B9318BCC5E8}" type="slidenum">
+            <a:fld id="{7212BDF5-4B35-4116-8BB7-2AC3344F768A}" type="slidenum">
               <a:rPr lang="en-US" smtClean="0"/>
               <a:t>‹#›</a:t>
             </a:fld>
@@ -7661,7 +7661,7 @@
           <p:cNvPr id="8" name="item_1_title">
             <a:extLst>
               <a:ext uri="{FF2B5EF4-FFF2-40B4-BE49-F238E27FC236}">
-                <a16:creationId xmlns:a16="http://schemas.microsoft.com/office/drawing/2014/main" id="{F596D009-ECAE-5D45-EA6B-19C13DBEC98A}"/>
+                <a16:creationId xmlns:a16="http://schemas.microsoft.com/office/drawing/2014/main" id="{B661CBFD-D835-1AD8-7B1A-45B3DEB6025A}"/>
               </a:ext>
             </a:extLst>
           </p:cNvPr>
@@ -7711,7 +7711,7 @@
           <p:cNvPr id="9" name="item_1">
             <a:extLst>
               <a:ext uri="{FF2B5EF4-FFF2-40B4-BE49-F238E27FC236}">
-                <a16:creationId xmlns:a16="http://schemas.microsoft.com/office/drawing/2014/main" id="{ADF92BDE-CBB7-6597-04A3-1150EEEE8BF0}"/>
+                <a16:creationId xmlns:a16="http://schemas.microsoft.com/office/drawing/2014/main" id="{4648049A-9F72-9930-1DEF-92F1EA768930}"/>
               </a:ext>
             </a:extLst>
           </p:cNvPr>
@@ -7759,7 +7759,7 @@
           <p:cNvPr id="10" name="item_2_title">
             <a:extLst>
               <a:ext uri="{FF2B5EF4-FFF2-40B4-BE49-F238E27FC236}">
-                <a16:creationId xmlns:a16="http://schemas.microsoft.com/office/drawing/2014/main" id="{5480A446-DE34-11E0-8A3B-B588FD681E16}"/>
+                <a16:creationId xmlns:a16="http://schemas.microsoft.com/office/drawing/2014/main" id="{BB630CA5-A662-914B-EE25-9B117632758F}"/>
               </a:ext>
             </a:extLst>
           </p:cNvPr>
@@ -7812,7 +7812,7 @@
           <p:cNvPr id="11" name="item_2">
             <a:extLst>
               <a:ext uri="{FF2B5EF4-FFF2-40B4-BE49-F238E27FC236}">
-                <a16:creationId xmlns:a16="http://schemas.microsoft.com/office/drawing/2014/main" id="{80BA3747-7BC2-3CE0-6AC1-FC7102CF0BF8}"/>
+                <a16:creationId xmlns:a16="http://schemas.microsoft.com/office/drawing/2014/main" id="{DC21B6E7-1865-C6DD-FD7D-45DF85D1AE5F}"/>
               </a:ext>
             </a:extLst>
           </p:cNvPr>
@@ -7860,7 +7860,7 @@
           <p:cNvPr id="12" name="item_3_title">
             <a:extLst>
               <a:ext uri="{FF2B5EF4-FFF2-40B4-BE49-F238E27FC236}">
-                <a16:creationId xmlns:a16="http://schemas.microsoft.com/office/drawing/2014/main" id="{8BD7B523-6A51-FC26-514F-DBF1E40FF877}"/>
+                <a16:creationId xmlns:a16="http://schemas.microsoft.com/office/drawing/2014/main" id="{DB825088-3B63-4AA3-72B6-36168EFB6C53}"/>
               </a:ext>
             </a:extLst>
           </p:cNvPr>
@@ -7913,7 +7913,7 @@
           <p:cNvPr id="13" name="item_3">
             <a:extLst>
               <a:ext uri="{FF2B5EF4-FFF2-40B4-BE49-F238E27FC236}">
-                <a16:creationId xmlns:a16="http://schemas.microsoft.com/office/drawing/2014/main" id="{1C76B0EF-59C5-2BB8-0152-1AC8760F195C}"/>
+                <a16:creationId xmlns:a16="http://schemas.microsoft.com/office/drawing/2014/main" id="{7ED6F393-1F43-557E-03D5-1D7EA2BDCFFA}"/>
               </a:ext>
             </a:extLst>
           </p:cNvPr>
@@ -7961,7 +7961,7 @@
           <p:cNvPr id="14" name="source">
             <a:extLst>
               <a:ext uri="{FF2B5EF4-FFF2-40B4-BE49-F238E27FC236}">
-                <a16:creationId xmlns:a16="http://schemas.microsoft.com/office/drawing/2014/main" id="{4E0F978F-7BFF-A402-9551-C3C3BF0648F6}"/>
+                <a16:creationId xmlns:a16="http://schemas.microsoft.com/office/drawing/2014/main" id="{350AA1C7-31A1-A2E5-553E-812EEC0CA8B1}"/>
               </a:ext>
             </a:extLst>
           </p:cNvPr>
@@ -8016,7 +8016,7 @@
     </p:spTree>
     <p:extLst>
       <p:ext uri="{BB962C8B-B14F-4D97-AF65-F5344CB8AC3E}">
-        <p14:creationId xmlns:p14="http://schemas.microsoft.com/office/powerpoint/2010/main" val="3458257689"/>
+        <p14:creationId xmlns:p14="http://schemas.microsoft.com/office/powerpoint/2010/main" val="1307598236"/>
       </p:ext>
     </p:extLst>
   </p:cSld>
@@ -8048,7 +8048,7 @@
           <p:cNvPr id="7" name="creative_background">
             <a:extLst>
               <a:ext uri="{FF2B5EF4-FFF2-40B4-BE49-F238E27FC236}">
-                <a16:creationId xmlns:a16="http://schemas.microsoft.com/office/drawing/2014/main" id="{E3FDBDB7-9730-23C8-8168-109A75E2EF66}"/>
+                <a16:creationId xmlns:a16="http://schemas.microsoft.com/office/drawing/2014/main" id="{0241E557-808A-911F-1C1A-582F640A1CE7}"/>
               </a:ext>
             </a:extLst>
           </p:cNvPr>
@@ -8121,9 +8121,9 @@
           <a:bodyPr/>
           <a:lstStyle/>
           <a:p>
-            <a:fld id="{C5143365-16B3-4FD5-8BF7-F05E2AA1930B}" type="datetimeFigureOut">
+            <a:fld id="{67949D26-9034-4D83-88EA-A31F57F7C9E2}" type="datetimeFigureOut">
               <a:rPr lang="en-US" smtClean="0"/>
-              <a:t>10/3/2026</a:t>
+              <a:t>10/4/2026</a:t>
             </a:fld>
             <a:endParaRPr lang="en-US"/>
           </a:p>
@@ -8163,7 +8163,7 @@
           <a:bodyPr/>
           <a:lstStyle/>
           <a:p>
-            <a:fld id="{4562F234-49D9-48C6-80E0-9B9318BCC5E8}" type="slidenum">
+            <a:fld id="{7212BDF5-4B35-4116-8BB7-2AC3344F768A}" type="slidenum">
               <a:rPr lang="en-US" smtClean="0"/>
               <a:t>‹#›</a:t>
             </a:fld>
@@ -8176,7 +8176,7 @@
           <p:cNvPr id="8" name="marker_1">
             <a:extLst>
               <a:ext uri="{FF2B5EF4-FFF2-40B4-BE49-F238E27FC236}">
-                <a16:creationId xmlns:a16="http://schemas.microsoft.com/office/drawing/2014/main" id="{843CC8C8-76F1-AD07-49A4-1EBD5DE00B35}"/>
+                <a16:creationId xmlns:a16="http://schemas.microsoft.com/office/drawing/2014/main" id="{AE545405-1E8A-ACA8-D115-A9C12B0A2E9A}"/>
               </a:ext>
             </a:extLst>
           </p:cNvPr>
@@ -8232,7 +8232,7 @@
           <p:cNvPr id="9" name="item_1_title">
             <a:extLst>
               <a:ext uri="{FF2B5EF4-FFF2-40B4-BE49-F238E27FC236}">
-                <a16:creationId xmlns:a16="http://schemas.microsoft.com/office/drawing/2014/main" id="{6AFDD1C6-781E-FD40-C31D-0FDCCBBA3ECE}"/>
+                <a16:creationId xmlns:a16="http://schemas.microsoft.com/office/drawing/2014/main" id="{30446186-BA41-3CC2-9512-32A1FD1E0630}"/>
               </a:ext>
             </a:extLst>
           </p:cNvPr>
@@ -8285,7 +8285,7 @@
           <p:cNvPr id="10" name="item_1">
             <a:extLst>
               <a:ext uri="{FF2B5EF4-FFF2-40B4-BE49-F238E27FC236}">
-                <a16:creationId xmlns:a16="http://schemas.microsoft.com/office/drawing/2014/main" id="{71CE15EC-6F56-6C05-EACA-1822B1A7EF07}"/>
+                <a16:creationId xmlns:a16="http://schemas.microsoft.com/office/drawing/2014/main" id="{666A964D-96DF-F788-B1B5-A8248FF2952C}"/>
               </a:ext>
             </a:extLst>
           </p:cNvPr>
@@ -8333,7 +8333,7 @@
           <p:cNvPr id="11" name="marker_2">
             <a:extLst>
               <a:ext uri="{FF2B5EF4-FFF2-40B4-BE49-F238E27FC236}">
-                <a16:creationId xmlns:a16="http://schemas.microsoft.com/office/drawing/2014/main" id="{72637AC5-1715-B8A9-08BA-A33C70F78947}"/>
+                <a16:creationId xmlns:a16="http://schemas.microsoft.com/office/drawing/2014/main" id="{AAC39C45-E597-74B0-0366-D7B0FF2081FF}"/>
               </a:ext>
             </a:extLst>
           </p:cNvPr>
@@ -8389,7 +8389,7 @@
           <p:cNvPr id="12" name="item_2_title">
             <a:extLst>
               <a:ext uri="{FF2B5EF4-FFF2-40B4-BE49-F238E27FC236}">
-                <a16:creationId xmlns:a16="http://schemas.microsoft.com/office/drawing/2014/main" id="{E928A87A-511F-D11C-60D1-579248CD6410}"/>
+                <a16:creationId xmlns:a16="http://schemas.microsoft.com/office/drawing/2014/main" id="{FE3FAABD-4989-6F4E-A619-DCD1001D7CBF}"/>
               </a:ext>
             </a:extLst>
           </p:cNvPr>
@@ -8442,7 +8442,7 @@
           <p:cNvPr id="13" name="item_2">
             <a:extLst>
               <a:ext uri="{FF2B5EF4-FFF2-40B4-BE49-F238E27FC236}">
-                <a16:creationId xmlns:a16="http://schemas.microsoft.com/office/drawing/2014/main" id="{6254A0E0-CCA3-E443-6BF5-71C1FD2CC970}"/>
+                <a16:creationId xmlns:a16="http://schemas.microsoft.com/office/drawing/2014/main" id="{9CE5DAED-BA3B-8E0A-FF5B-5B3A58B18DD0}"/>
               </a:ext>
             </a:extLst>
           </p:cNvPr>
@@ -8490,7 +8490,7 @@
           <p:cNvPr id="14" name="source">
             <a:extLst>
               <a:ext uri="{FF2B5EF4-FFF2-40B4-BE49-F238E27FC236}">
-                <a16:creationId xmlns:a16="http://schemas.microsoft.com/office/drawing/2014/main" id="{8D41F04C-CE85-69D7-A0D9-0C3DCBE9A281}"/>
+                <a16:creationId xmlns:a16="http://schemas.microsoft.com/office/drawing/2014/main" id="{352B99D8-34F1-190D-3683-E2684077E262}"/>
               </a:ext>
             </a:extLst>
           </p:cNvPr>
@@ -8545,7 +8545,7 @@
     </p:spTree>
     <p:extLst>
       <p:ext uri="{BB962C8B-B14F-4D97-AF65-F5344CB8AC3E}">
-        <p14:creationId xmlns:p14="http://schemas.microsoft.com/office/powerpoint/2010/main" val="2606595238"/>
+        <p14:creationId xmlns:p14="http://schemas.microsoft.com/office/powerpoint/2010/main" val="1294498210"/>
       </p:ext>
     </p:extLst>
   </p:cSld>
@@ -8577,7 +8577,7 @@
           <p:cNvPr id="7" name="creative_background">
             <a:extLst>
               <a:ext uri="{FF2B5EF4-FFF2-40B4-BE49-F238E27FC236}">
-                <a16:creationId xmlns:a16="http://schemas.microsoft.com/office/drawing/2014/main" id="{938D7BD1-58D0-DEBF-F9AE-359C059A1C74}"/>
+                <a16:creationId xmlns:a16="http://schemas.microsoft.com/office/drawing/2014/main" id="{9781B8B6-0E4B-D520-1C4F-23C0C38EA7F1}"/>
               </a:ext>
             </a:extLst>
           </p:cNvPr>
@@ -8650,9 +8650,9 @@
           <a:bodyPr/>
           <a:lstStyle/>
           <a:p>
-            <a:fld id="{C5143365-16B3-4FD5-8BF7-F05E2AA1930B}" type="datetimeFigureOut">
+            <a:fld id="{67949D26-9034-4D83-88EA-A31F57F7C9E2}" type="datetimeFigureOut">
               <a:rPr lang="en-US" smtClean="0"/>
-              <a:t>10/3/2026</a:t>
+              <a:t>10/4/2026</a:t>
             </a:fld>
             <a:endParaRPr lang="en-US"/>
           </a:p>
@@ -8692,7 +8692,7 @@
           <a:bodyPr/>
           <a:lstStyle/>
           <a:p>
-            <a:fld id="{4562F234-49D9-48C6-80E0-9B9318BCC5E8}" type="slidenum">
+            <a:fld id="{7212BDF5-4B35-4116-8BB7-2AC3344F768A}" type="slidenum">
               <a:rPr lang="en-US" smtClean="0"/>
               <a:t>‹#›</a:t>
             </a:fld>
@@ -8705,7 +8705,7 @@
           <p:cNvPr id="8" name="kpi_value_1">
             <a:extLst>
               <a:ext uri="{FF2B5EF4-FFF2-40B4-BE49-F238E27FC236}">
-                <a16:creationId xmlns:a16="http://schemas.microsoft.com/office/drawing/2014/main" id="{0AAB4ED8-8457-7924-8832-428CA6EF8755}"/>
+                <a16:creationId xmlns:a16="http://schemas.microsoft.com/office/drawing/2014/main" id="{EFE0F807-42FE-E3B1-15A7-8EF31FEA9A42}"/>
               </a:ext>
             </a:extLst>
           </p:cNvPr>
@@ -8755,7 +8755,7 @@
           <p:cNvPr id="9" name="kpi_label_1">
             <a:extLst>
               <a:ext uri="{FF2B5EF4-FFF2-40B4-BE49-F238E27FC236}">
-                <a16:creationId xmlns:a16="http://schemas.microsoft.com/office/drawing/2014/main" id="{D850B7BB-DFA4-18F9-4D08-4110F90C3E9A}"/>
+                <a16:creationId xmlns:a16="http://schemas.microsoft.com/office/drawing/2014/main" id="{6910CE84-99B7-E89E-4B22-7C5F11A2FDDD}"/>
               </a:ext>
             </a:extLst>
           </p:cNvPr>
@@ -8803,7 +8803,7 @@
           <p:cNvPr id="10" name="quote">
             <a:extLst>
               <a:ext uri="{FF2B5EF4-FFF2-40B4-BE49-F238E27FC236}">
-                <a16:creationId xmlns:a16="http://schemas.microsoft.com/office/drawing/2014/main" id="{98F1DFE3-135B-3FC6-28F6-E984DBFEDD4A}"/>
+                <a16:creationId xmlns:a16="http://schemas.microsoft.com/office/drawing/2014/main" id="{CBAD0EF3-187D-56A6-132C-736EC8E89C00}"/>
               </a:ext>
             </a:extLst>
           </p:cNvPr>
@@ -8853,7 +8853,7 @@
           <p:cNvPr id="11" name="attribution">
             <a:extLst>
               <a:ext uri="{FF2B5EF4-FFF2-40B4-BE49-F238E27FC236}">
-                <a16:creationId xmlns:a16="http://schemas.microsoft.com/office/drawing/2014/main" id="{ED386D8E-55F4-0E03-F725-6277EB528152}"/>
+                <a16:creationId xmlns:a16="http://schemas.microsoft.com/office/drawing/2014/main" id="{25AEDBE5-3C81-ACD2-BA18-1B641FF5FC4B}"/>
               </a:ext>
             </a:extLst>
           </p:cNvPr>
@@ -8901,7 +8901,7 @@
           <p:cNvPr id="12" name="item_1_title">
             <a:extLst>
               <a:ext uri="{FF2B5EF4-FFF2-40B4-BE49-F238E27FC236}">
-                <a16:creationId xmlns:a16="http://schemas.microsoft.com/office/drawing/2014/main" id="{44F32971-9A58-D924-84F8-E9284DB28079}"/>
+                <a16:creationId xmlns:a16="http://schemas.microsoft.com/office/drawing/2014/main" id="{4896EF68-E9BE-B345-02F7-46EED792B7D8}"/>
               </a:ext>
             </a:extLst>
           </p:cNvPr>
@@ -8954,7 +8954,7 @@
           <p:cNvPr id="13" name="item_1">
             <a:extLst>
               <a:ext uri="{FF2B5EF4-FFF2-40B4-BE49-F238E27FC236}">
-                <a16:creationId xmlns:a16="http://schemas.microsoft.com/office/drawing/2014/main" id="{D61D3F87-4CC1-7610-6180-1CF61223EE66}"/>
+                <a16:creationId xmlns:a16="http://schemas.microsoft.com/office/drawing/2014/main" id="{7236A420-9BFB-D240-3E36-44658CB826F1}"/>
               </a:ext>
             </a:extLst>
           </p:cNvPr>
@@ -9002,7 +9002,7 @@
           <p:cNvPr id="14" name="source">
             <a:extLst>
               <a:ext uri="{FF2B5EF4-FFF2-40B4-BE49-F238E27FC236}">
-                <a16:creationId xmlns:a16="http://schemas.microsoft.com/office/drawing/2014/main" id="{B41A2310-F1A3-8664-3C84-71388BA6E27D}"/>
+                <a16:creationId xmlns:a16="http://schemas.microsoft.com/office/drawing/2014/main" id="{5F164D1E-ACE4-3B45-30E7-D06C2E61D00B}"/>
               </a:ext>
             </a:extLst>
           </p:cNvPr>
@@ -9057,7 +9057,7 @@
     </p:spTree>
     <p:extLst>
       <p:ext uri="{BB962C8B-B14F-4D97-AF65-F5344CB8AC3E}">
-        <p14:creationId xmlns:p14="http://schemas.microsoft.com/office/powerpoint/2010/main" val="827885556"/>
+        <p14:creationId xmlns:p14="http://schemas.microsoft.com/office/powerpoint/2010/main" val="3756638935"/>
       </p:ext>
     </p:extLst>
   </p:cSld>
@@ -9089,7 +9089,7 @@
           <p:cNvPr id="7" name="creative_background">
             <a:extLst>
               <a:ext uri="{FF2B5EF4-FFF2-40B4-BE49-F238E27FC236}">
-                <a16:creationId xmlns:a16="http://schemas.microsoft.com/office/drawing/2014/main" id="{F02BCF3D-3A80-1148-DFA6-6AB406658B89}"/>
+                <a16:creationId xmlns:a16="http://schemas.microsoft.com/office/drawing/2014/main" id="{B235DE86-BC36-E8BD-13E1-8C0602E291BE}"/>
               </a:ext>
             </a:extLst>
           </p:cNvPr>
@@ -9162,9 +9162,9 @@
           <a:bodyPr/>
           <a:lstStyle/>
           <a:p>
-            <a:fld id="{C5143365-16B3-4FD5-8BF7-F05E2AA1930B}" type="datetimeFigureOut">
+            <a:fld id="{67949D26-9034-4D83-88EA-A31F57F7C9E2}" type="datetimeFigureOut">
               <a:rPr lang="en-US" smtClean="0"/>
-              <a:t>10/3/2026</a:t>
+              <a:t>10/4/2026</a:t>
             </a:fld>
             <a:endParaRPr lang="en-US"/>
           </a:p>
@@ -9204,7 +9204,7 @@
           <a:bodyPr/>
           <a:lstStyle/>
           <a:p>
-            <a:fld id="{4562F234-49D9-48C6-80E0-9B9318BCC5E8}" type="slidenum">
+            <a:fld id="{7212BDF5-4B35-4116-8BB7-2AC3344F768A}" type="slidenum">
               <a:rPr lang="en-US" smtClean="0"/>
               <a:t>‹#›</a:t>
             </a:fld>
@@ -9217,7 +9217,7 @@
           <p:cNvPr id="8" name="marker_1">
             <a:extLst>
               <a:ext uri="{FF2B5EF4-FFF2-40B4-BE49-F238E27FC236}">
-                <a16:creationId xmlns:a16="http://schemas.microsoft.com/office/drawing/2014/main" id="{C0B9AD90-0ECC-9E32-BA81-D337BF0DB2F5}"/>
+                <a16:creationId xmlns:a16="http://schemas.microsoft.com/office/drawing/2014/main" id="{D8EBF6C1-2986-EF6B-C48B-208C08BE26C5}"/>
               </a:ext>
             </a:extLst>
           </p:cNvPr>
@@ -9273,7 +9273,7 @@
           <p:cNvPr id="9" name="item_1">
             <a:extLst>
               <a:ext uri="{FF2B5EF4-FFF2-40B4-BE49-F238E27FC236}">
-                <a16:creationId xmlns:a16="http://schemas.microsoft.com/office/drawing/2014/main" id="{1939C52F-031B-CBEA-BD54-9808CEE58286}"/>
+                <a16:creationId xmlns:a16="http://schemas.microsoft.com/office/drawing/2014/main" id="{7BF09EBE-D7AC-E784-663D-F46925E31163}"/>
               </a:ext>
             </a:extLst>
           </p:cNvPr>
@@ -9321,7 +9321,7 @@
           <p:cNvPr id="10" name="marker_2">
             <a:extLst>
               <a:ext uri="{FF2B5EF4-FFF2-40B4-BE49-F238E27FC236}">
-                <a16:creationId xmlns:a16="http://schemas.microsoft.com/office/drawing/2014/main" id="{5A86973F-8BC6-01F8-C975-687FB9BA0EA2}"/>
+                <a16:creationId xmlns:a16="http://schemas.microsoft.com/office/drawing/2014/main" id="{672D44B2-BED0-547D-86C1-72DABD9E423B}"/>
               </a:ext>
             </a:extLst>
           </p:cNvPr>
@@ -9377,7 +9377,7 @@
           <p:cNvPr id="11" name="item_2">
             <a:extLst>
               <a:ext uri="{FF2B5EF4-FFF2-40B4-BE49-F238E27FC236}">
-                <a16:creationId xmlns:a16="http://schemas.microsoft.com/office/drawing/2014/main" id="{AB66F2D0-F222-032B-D244-406F435BD793}"/>
+                <a16:creationId xmlns:a16="http://schemas.microsoft.com/office/drawing/2014/main" id="{2563F3BC-92B1-A484-DA88-CEE82D26BABA}"/>
               </a:ext>
             </a:extLst>
           </p:cNvPr>
@@ -9425,7 +9425,7 @@
           <p:cNvPr id="12" name="marker_3">
             <a:extLst>
               <a:ext uri="{FF2B5EF4-FFF2-40B4-BE49-F238E27FC236}">
-                <a16:creationId xmlns:a16="http://schemas.microsoft.com/office/drawing/2014/main" id="{D2313508-796C-8FB6-1CEB-A0946C9BB25B}"/>
+                <a16:creationId xmlns:a16="http://schemas.microsoft.com/office/drawing/2014/main" id="{7E26804B-7AAF-4875-E3B9-FD19C3658885}"/>
               </a:ext>
             </a:extLst>
           </p:cNvPr>
@@ -9481,7 +9481,7 @@
           <p:cNvPr id="13" name="item_3">
             <a:extLst>
               <a:ext uri="{FF2B5EF4-FFF2-40B4-BE49-F238E27FC236}">
-                <a16:creationId xmlns:a16="http://schemas.microsoft.com/office/drawing/2014/main" id="{C97566F4-A3D3-0772-8333-76A26E3634D0}"/>
+                <a16:creationId xmlns:a16="http://schemas.microsoft.com/office/drawing/2014/main" id="{BF75C727-5A36-DF27-1F12-9AB29184006F}"/>
               </a:ext>
             </a:extLst>
           </p:cNvPr>
@@ -9529,7 +9529,7 @@
           <p:cNvPr id="14" name="marker_4">
             <a:extLst>
               <a:ext uri="{FF2B5EF4-FFF2-40B4-BE49-F238E27FC236}">
-                <a16:creationId xmlns:a16="http://schemas.microsoft.com/office/drawing/2014/main" id="{000352D9-72BF-5FC0-09A8-FEE0D658C0BD}"/>
+                <a16:creationId xmlns:a16="http://schemas.microsoft.com/office/drawing/2014/main" id="{CD756218-F85C-1BFF-E111-10812AA782BE}"/>
               </a:ext>
             </a:extLst>
           </p:cNvPr>
@@ -9585,7 +9585,7 @@
           <p:cNvPr id="15" name="item_4">
             <a:extLst>
               <a:ext uri="{FF2B5EF4-FFF2-40B4-BE49-F238E27FC236}">
-                <a16:creationId xmlns:a16="http://schemas.microsoft.com/office/drawing/2014/main" id="{8B610A2A-0C65-713F-2EF8-105234AF120C}"/>
+                <a16:creationId xmlns:a16="http://schemas.microsoft.com/office/drawing/2014/main" id="{D3B40F5A-7A8C-6C33-43A6-6336652E0A6D}"/>
               </a:ext>
             </a:extLst>
           </p:cNvPr>
@@ -9633,7 +9633,7 @@
           <p:cNvPr id="16" name="source">
             <a:extLst>
               <a:ext uri="{FF2B5EF4-FFF2-40B4-BE49-F238E27FC236}">
-                <a16:creationId xmlns:a16="http://schemas.microsoft.com/office/drawing/2014/main" id="{019B5795-5CE3-5311-3ED4-572B1DA13145}"/>
+                <a16:creationId xmlns:a16="http://schemas.microsoft.com/office/drawing/2014/main" id="{4AE24C15-3361-2AFD-3AFB-A669BDF40D50}"/>
               </a:ext>
             </a:extLst>
           </p:cNvPr>
@@ -9688,7 +9688,7 @@
     </p:spTree>
     <p:extLst>
       <p:ext uri="{BB962C8B-B14F-4D97-AF65-F5344CB8AC3E}">
-        <p14:creationId xmlns:p14="http://schemas.microsoft.com/office/powerpoint/2010/main" val="308312630"/>
+        <p14:creationId xmlns:p14="http://schemas.microsoft.com/office/powerpoint/2010/main" val="1518552194"/>
       </p:ext>
     </p:extLst>
   </p:cSld>
@@ -9720,7 +9720,7 @@
           <p:cNvPr id="7" name="creative_background">
             <a:extLst>
               <a:ext uri="{FF2B5EF4-FFF2-40B4-BE49-F238E27FC236}">
-                <a16:creationId xmlns:a16="http://schemas.microsoft.com/office/drawing/2014/main" id="{9FAAB64A-3515-1F31-A7CD-3A3E025803CF}"/>
+                <a16:creationId xmlns:a16="http://schemas.microsoft.com/office/drawing/2014/main" id="{779F2B2E-8530-FC32-69DA-46118DB7786C}"/>
               </a:ext>
             </a:extLst>
           </p:cNvPr>
@@ -9793,9 +9793,9 @@
           <a:bodyPr/>
           <a:lstStyle/>
           <a:p>
-            <a:fld id="{C5143365-16B3-4FD5-8BF7-F05E2AA1930B}" type="datetimeFigureOut">
+            <a:fld id="{67949D26-9034-4D83-88EA-A31F57F7C9E2}" type="datetimeFigureOut">
               <a:rPr lang="en-US" smtClean="0"/>
-              <a:t>10/3/2026</a:t>
+              <a:t>10/4/2026</a:t>
             </a:fld>
             <a:endParaRPr lang="en-US"/>
           </a:p>
@@ -9835,7 +9835,7 @@
           <a:bodyPr/>
           <a:lstStyle/>
           <a:p>
-            <a:fld id="{4562F234-49D9-48C6-80E0-9B9318BCC5E8}" type="slidenum">
+            <a:fld id="{7212BDF5-4B35-4116-8BB7-2AC3344F768A}" type="slidenum">
               <a:rPr lang="en-US" smtClean="0"/>
               <a:t>‹#›</a:t>
             </a:fld>
@@ -9848,7 +9848,7 @@
           <p:cNvPr id="8" name="decisions_title">
             <a:extLst>
               <a:ext uri="{FF2B5EF4-FFF2-40B4-BE49-F238E27FC236}">
-                <a16:creationId xmlns:a16="http://schemas.microsoft.com/office/drawing/2014/main" id="{567CED38-3FA3-8A39-0339-F519E3A633C2}"/>
+                <a16:creationId xmlns:a16="http://schemas.microsoft.com/office/drawing/2014/main" id="{529D564B-1BCB-DF5D-FE3B-428A38558A19}"/>
               </a:ext>
             </a:extLst>
           </p:cNvPr>
@@ -9898,7 +9898,7 @@
           <p:cNvPr id="9" name="decisions">
             <a:extLst>
               <a:ext uri="{FF2B5EF4-FFF2-40B4-BE49-F238E27FC236}">
-                <a16:creationId xmlns:a16="http://schemas.microsoft.com/office/drawing/2014/main" id="{ED672CB5-E9F2-E068-996B-184FFBF101CC}"/>
+                <a16:creationId xmlns:a16="http://schemas.microsoft.com/office/drawing/2014/main" id="{78BDF23B-48CF-FCBF-2982-65F29BBBFC6A}"/>
               </a:ext>
             </a:extLst>
           </p:cNvPr>
@@ -9941,7 +9941,7 @@
           <p:cNvPr id="10" name="item_1_title">
             <a:extLst>
               <a:ext uri="{FF2B5EF4-FFF2-40B4-BE49-F238E27FC236}">
-                <a16:creationId xmlns:a16="http://schemas.microsoft.com/office/drawing/2014/main" id="{64C6330E-78D2-CF38-B620-E44634F97162}"/>
+                <a16:creationId xmlns:a16="http://schemas.microsoft.com/office/drawing/2014/main" id="{56B8D4FF-7C82-9800-EB17-76C892C0EC91}"/>
               </a:ext>
             </a:extLst>
           </p:cNvPr>
@@ -9994,7 +9994,7 @@
           <p:cNvPr id="11" name="item_1">
             <a:extLst>
               <a:ext uri="{FF2B5EF4-FFF2-40B4-BE49-F238E27FC236}">
-                <a16:creationId xmlns:a16="http://schemas.microsoft.com/office/drawing/2014/main" id="{68D32054-AC80-2EC9-EAFE-F0E698D3E318}"/>
+                <a16:creationId xmlns:a16="http://schemas.microsoft.com/office/drawing/2014/main" id="{38881EB3-C8C8-E251-17F5-914FFA2BEA57}"/>
               </a:ext>
             </a:extLst>
           </p:cNvPr>
@@ -10042,7 +10042,7 @@
           <p:cNvPr id="12" name="item_2_title">
             <a:extLst>
               <a:ext uri="{FF2B5EF4-FFF2-40B4-BE49-F238E27FC236}">
-                <a16:creationId xmlns:a16="http://schemas.microsoft.com/office/drawing/2014/main" id="{6C61CE00-A9E3-B870-9A55-F711F991ADE6}"/>
+                <a16:creationId xmlns:a16="http://schemas.microsoft.com/office/drawing/2014/main" id="{6FD9B034-1601-36EB-66CE-E2D97E6F0760}"/>
               </a:ext>
             </a:extLst>
           </p:cNvPr>
@@ -10095,7 +10095,7 @@
           <p:cNvPr id="13" name="item_2">
             <a:extLst>
               <a:ext uri="{FF2B5EF4-FFF2-40B4-BE49-F238E27FC236}">
-                <a16:creationId xmlns:a16="http://schemas.microsoft.com/office/drawing/2014/main" id="{FFF2F845-D594-9B20-15AD-79062B409146}"/>
+                <a16:creationId xmlns:a16="http://schemas.microsoft.com/office/drawing/2014/main" id="{B264FDDB-B4EB-D182-79E1-D86C4843512C}"/>
               </a:ext>
             </a:extLst>
           </p:cNvPr>
@@ -10143,7 +10143,7 @@
           <p:cNvPr id="14" name="item_3_title">
             <a:extLst>
               <a:ext uri="{FF2B5EF4-FFF2-40B4-BE49-F238E27FC236}">
-                <a16:creationId xmlns:a16="http://schemas.microsoft.com/office/drawing/2014/main" id="{BCBCD226-0FCB-142A-369F-A46B67F3D191}"/>
+                <a16:creationId xmlns:a16="http://schemas.microsoft.com/office/drawing/2014/main" id="{91766FC0-ECE8-F543-46FF-6F46A1A22300}"/>
               </a:ext>
             </a:extLst>
           </p:cNvPr>
@@ -10196,7 +10196,7 @@
           <p:cNvPr id="15" name="item_3">
             <a:extLst>
               <a:ext uri="{FF2B5EF4-FFF2-40B4-BE49-F238E27FC236}">
-                <a16:creationId xmlns:a16="http://schemas.microsoft.com/office/drawing/2014/main" id="{D02C46EC-596A-6DB7-D665-C61ABDAF9BE6}"/>
+                <a16:creationId xmlns:a16="http://schemas.microsoft.com/office/drawing/2014/main" id="{21A5BE9E-6D08-64E3-E77B-E9718CC87B2F}"/>
               </a:ext>
             </a:extLst>
           </p:cNvPr>
@@ -10244,7 +10244,7 @@
           <p:cNvPr id="16" name="source">
             <a:extLst>
               <a:ext uri="{FF2B5EF4-FFF2-40B4-BE49-F238E27FC236}">
-                <a16:creationId xmlns:a16="http://schemas.microsoft.com/office/drawing/2014/main" id="{7603F477-B4B7-5250-2882-597307BF0FFD}"/>
+                <a16:creationId xmlns:a16="http://schemas.microsoft.com/office/drawing/2014/main" id="{0512006B-76B8-C613-6B13-4D7D2209FFF5}"/>
               </a:ext>
             </a:extLst>
           </p:cNvPr>
@@ -10299,7 +10299,7 @@
     </p:spTree>
     <p:extLst>
       <p:ext uri="{BB962C8B-B14F-4D97-AF65-F5344CB8AC3E}">
-        <p14:creationId xmlns:p14="http://schemas.microsoft.com/office/powerpoint/2010/main" val="918622883"/>
+        <p14:creationId xmlns:p14="http://schemas.microsoft.com/office/powerpoint/2010/main" val="3571107745"/>
       </p:ext>
     </p:extLst>
   </p:cSld>
@@ -10331,7 +10331,7 @@
           <p:cNvPr id="7" name="creative_background">
             <a:extLst>
               <a:ext uri="{FF2B5EF4-FFF2-40B4-BE49-F238E27FC236}">
-                <a16:creationId xmlns:a16="http://schemas.microsoft.com/office/drawing/2014/main" id="{8EEB32D3-BF06-9F93-B936-E15752D82CAF}"/>
+                <a16:creationId xmlns:a16="http://schemas.microsoft.com/office/drawing/2014/main" id="{62B22451-D44A-1E3D-379E-8CABDBC010BE}"/>
               </a:ext>
             </a:extLst>
           </p:cNvPr>
@@ -10404,9 +10404,9 @@
           <a:bodyPr/>
           <a:lstStyle/>
           <a:p>
-            <a:fld id="{C5143365-16B3-4FD5-8BF7-F05E2AA1930B}" type="datetimeFigureOut">
+            <a:fld id="{67949D26-9034-4D83-88EA-A31F57F7C9E2}" type="datetimeFigureOut">
               <a:rPr lang="en-US" smtClean="0"/>
-              <a:t>10/3/2026</a:t>
+              <a:t>10/4/2026</a:t>
             </a:fld>
             <a:endParaRPr lang="en-US"/>
           </a:p>
@@ -10446,7 +10446,7 @@
           <a:bodyPr/>
           <a:lstStyle/>
           <a:p>
-            <a:fld id="{4562F234-49D9-48C6-80E0-9B9318BCC5E8}" type="slidenum">
+            <a:fld id="{7212BDF5-4B35-4116-8BB7-2AC3344F768A}" type="slidenum">
               <a:rPr lang="en-US" smtClean="0"/>
               <a:t>‹#›</a:t>
             </a:fld>
@@ -10459,7 +10459,7 @@
           <p:cNvPr id="8" name="body">
             <a:extLst>
               <a:ext uri="{FF2B5EF4-FFF2-40B4-BE49-F238E27FC236}">
-                <a16:creationId xmlns:a16="http://schemas.microsoft.com/office/drawing/2014/main" id="{16E2C3C1-EEF7-AA0C-9A24-DC536A8A362E}"/>
+                <a16:creationId xmlns:a16="http://schemas.microsoft.com/office/drawing/2014/main" id="{054A3AB4-DAF7-6A2A-9A55-AF096AB705DC}"/>
               </a:ext>
             </a:extLst>
           </p:cNvPr>
@@ -10499,7 +10499,7 @@
           <p:cNvPr id="9" name="kpi_value_1">
             <a:extLst>
               <a:ext uri="{FF2B5EF4-FFF2-40B4-BE49-F238E27FC236}">
-                <a16:creationId xmlns:a16="http://schemas.microsoft.com/office/drawing/2014/main" id="{1F32D3ED-0EF4-9C75-30BB-1EF5F36357C1}"/>
+                <a16:creationId xmlns:a16="http://schemas.microsoft.com/office/drawing/2014/main" id="{80504315-8D79-C353-C877-8B8B166AA9C1}"/>
               </a:ext>
             </a:extLst>
           </p:cNvPr>
@@ -10552,7 +10552,7 @@
           <p:cNvPr id="10" name="kpi_label_1">
             <a:extLst>
               <a:ext uri="{FF2B5EF4-FFF2-40B4-BE49-F238E27FC236}">
-                <a16:creationId xmlns:a16="http://schemas.microsoft.com/office/drawing/2014/main" id="{82DBB217-28EF-2E3F-E205-F163B005C2D9}"/>
+                <a16:creationId xmlns:a16="http://schemas.microsoft.com/office/drawing/2014/main" id="{4E71F8F9-40F1-FFAC-D0E9-1A38BD689494}"/>
               </a:ext>
             </a:extLst>
           </p:cNvPr>
@@ -10600,7 +10600,7 @@
           <p:cNvPr id="11" name="kpi_value_2">
             <a:extLst>
               <a:ext uri="{FF2B5EF4-FFF2-40B4-BE49-F238E27FC236}">
-                <a16:creationId xmlns:a16="http://schemas.microsoft.com/office/drawing/2014/main" id="{29DC681B-D985-10AE-AB4E-D0AF987C50CA}"/>
+                <a16:creationId xmlns:a16="http://schemas.microsoft.com/office/drawing/2014/main" id="{779A1657-B297-AE0A-A6DB-35485E64E43C}"/>
               </a:ext>
             </a:extLst>
           </p:cNvPr>
@@ -10653,7 +10653,7 @@
           <p:cNvPr id="12" name="kpi_label_2">
             <a:extLst>
               <a:ext uri="{FF2B5EF4-FFF2-40B4-BE49-F238E27FC236}">
-                <a16:creationId xmlns:a16="http://schemas.microsoft.com/office/drawing/2014/main" id="{F8D2996B-52CD-69FF-67AD-A90E61D44E0E}"/>
+                <a16:creationId xmlns:a16="http://schemas.microsoft.com/office/drawing/2014/main" id="{5DF6176F-A1A5-7CE2-53FD-1E153043EAF2}"/>
               </a:ext>
             </a:extLst>
           </p:cNvPr>
@@ -10701,7 +10701,7 @@
           <p:cNvPr id="13" name="source">
             <a:extLst>
               <a:ext uri="{FF2B5EF4-FFF2-40B4-BE49-F238E27FC236}">
-                <a16:creationId xmlns:a16="http://schemas.microsoft.com/office/drawing/2014/main" id="{84B817FE-0A43-2424-55E5-4901D925C8BE}"/>
+                <a16:creationId xmlns:a16="http://schemas.microsoft.com/office/drawing/2014/main" id="{6E13E8AF-B741-86D9-2174-81AE2A35D676}"/>
               </a:ext>
             </a:extLst>
           </p:cNvPr>
@@ -10756,7 +10756,7 @@
     </p:spTree>
     <p:extLst>
       <p:ext uri="{BB962C8B-B14F-4D97-AF65-F5344CB8AC3E}">
-        <p14:creationId xmlns:p14="http://schemas.microsoft.com/office/powerpoint/2010/main" val="2802228996"/>
+        <p14:creationId xmlns:p14="http://schemas.microsoft.com/office/powerpoint/2010/main" val="3064612718"/>
       </p:ext>
     </p:extLst>
   </p:cSld>
@@ -10788,7 +10788,7 @@
           <p:cNvPr id="7" name="creative_background">
             <a:extLst>
               <a:ext uri="{FF2B5EF4-FFF2-40B4-BE49-F238E27FC236}">
-                <a16:creationId xmlns:a16="http://schemas.microsoft.com/office/drawing/2014/main" id="{2AAEC7AE-FE07-ED65-8D8B-6A9944E389F2}"/>
+                <a16:creationId xmlns:a16="http://schemas.microsoft.com/office/drawing/2014/main" id="{CEC012D3-278F-F15A-B95B-2383CEE1A3C8}"/>
               </a:ext>
             </a:extLst>
           </p:cNvPr>
@@ -10861,9 +10861,9 @@
           <a:bodyPr/>
           <a:lstStyle/>
           <a:p>
-            <a:fld id="{C5143365-16B3-4FD5-8BF7-F05E2AA1930B}" type="datetimeFigureOut">
+            <a:fld id="{67949D26-9034-4D83-88EA-A31F57F7C9E2}" type="datetimeFigureOut">
               <a:rPr lang="en-US" smtClean="0"/>
-              <a:t>10/3/2026</a:t>
+              <a:t>10/4/2026</a:t>
             </a:fld>
             <a:endParaRPr lang="en-US"/>
           </a:p>
@@ -10903,7 +10903,7 @@
           <a:bodyPr/>
           <a:lstStyle/>
           <a:p>
-            <a:fld id="{4562F234-49D9-48C6-80E0-9B9318BCC5E8}" type="slidenum">
+            <a:fld id="{7212BDF5-4B35-4116-8BB7-2AC3344F768A}" type="slidenum">
               <a:rPr lang="en-US" smtClean="0"/>
               <a:t>‹#›</a:t>
             </a:fld>
@@ -10916,7 +10916,7 @@
           <p:cNvPr id="8" name="body">
             <a:extLst>
               <a:ext uri="{FF2B5EF4-FFF2-40B4-BE49-F238E27FC236}">
-                <a16:creationId xmlns:a16="http://schemas.microsoft.com/office/drawing/2014/main" id="{67A27D39-3845-7ADE-C589-4D56ED845F77}"/>
+                <a16:creationId xmlns:a16="http://schemas.microsoft.com/office/drawing/2014/main" id="{9A94BE4F-AF19-F9A9-53F8-8DAA83A3ED12}"/>
               </a:ext>
             </a:extLst>
           </p:cNvPr>
@@ -10956,7 +10956,7 @@
           <p:cNvPr id="9" name="kpi_value_1">
             <a:extLst>
               <a:ext uri="{FF2B5EF4-FFF2-40B4-BE49-F238E27FC236}">
-                <a16:creationId xmlns:a16="http://schemas.microsoft.com/office/drawing/2014/main" id="{0F03BC35-E399-BFAF-C0EE-6249EABBE9D2}"/>
+                <a16:creationId xmlns:a16="http://schemas.microsoft.com/office/drawing/2014/main" id="{21CDFC9E-1439-D2A2-A495-0CC3C67BCDA6}"/>
               </a:ext>
             </a:extLst>
           </p:cNvPr>
@@ -11009,7 +11009,7 @@
           <p:cNvPr id="10" name="kpi_label_1">
             <a:extLst>
               <a:ext uri="{FF2B5EF4-FFF2-40B4-BE49-F238E27FC236}">
-                <a16:creationId xmlns:a16="http://schemas.microsoft.com/office/drawing/2014/main" id="{25DC097A-2D72-AF12-2251-56537428D13A}"/>
+                <a16:creationId xmlns:a16="http://schemas.microsoft.com/office/drawing/2014/main" id="{5A3EA7A0-B023-48A0-4E3F-771B8F1DCA3B}"/>
               </a:ext>
             </a:extLst>
           </p:cNvPr>
@@ -11057,7 +11057,7 @@
           <p:cNvPr id="11" name="kpi_value_2">
             <a:extLst>
               <a:ext uri="{FF2B5EF4-FFF2-40B4-BE49-F238E27FC236}">
-                <a16:creationId xmlns:a16="http://schemas.microsoft.com/office/drawing/2014/main" id="{D278D625-7A8A-0496-F7CE-61C2275C84C8}"/>
+                <a16:creationId xmlns:a16="http://schemas.microsoft.com/office/drawing/2014/main" id="{B30DFE79-D643-CE65-2996-9D7F34938D77}"/>
               </a:ext>
             </a:extLst>
           </p:cNvPr>
@@ -11110,7 +11110,7 @@
           <p:cNvPr id="12" name="kpi_label_2">
             <a:extLst>
               <a:ext uri="{FF2B5EF4-FFF2-40B4-BE49-F238E27FC236}">
-                <a16:creationId xmlns:a16="http://schemas.microsoft.com/office/drawing/2014/main" id="{CFE32785-381E-63F3-EFA5-A1CCAB83F9C2}"/>
+                <a16:creationId xmlns:a16="http://schemas.microsoft.com/office/drawing/2014/main" id="{753582BB-FFB3-1AB4-3597-41421F07EE33}"/>
               </a:ext>
             </a:extLst>
           </p:cNvPr>
@@ -11158,7 +11158,7 @@
           <p:cNvPr id="13" name="kpi_value_3">
             <a:extLst>
               <a:ext uri="{FF2B5EF4-FFF2-40B4-BE49-F238E27FC236}">
-                <a16:creationId xmlns:a16="http://schemas.microsoft.com/office/drawing/2014/main" id="{37285405-63D0-AC1C-DB50-E17EDEE55AF2}"/>
+                <a16:creationId xmlns:a16="http://schemas.microsoft.com/office/drawing/2014/main" id="{8BD5E403-11B6-8510-5BF7-DCEE7D16C8B7}"/>
               </a:ext>
             </a:extLst>
           </p:cNvPr>
@@ -11211,7 +11211,7 @@
           <p:cNvPr id="14" name="kpi_label_3">
             <a:extLst>
               <a:ext uri="{FF2B5EF4-FFF2-40B4-BE49-F238E27FC236}">
-                <a16:creationId xmlns:a16="http://schemas.microsoft.com/office/drawing/2014/main" id="{78822D12-A9E7-217D-050F-FDF944C0726A}"/>
+                <a16:creationId xmlns:a16="http://schemas.microsoft.com/office/drawing/2014/main" id="{0C63011A-55A8-CBAA-B875-E0AABFED0CE2}"/>
               </a:ext>
             </a:extLst>
           </p:cNvPr>
@@ -11259,7 +11259,7 @@
           <p:cNvPr id="15" name="kpi_value_4">
             <a:extLst>
               <a:ext uri="{FF2B5EF4-FFF2-40B4-BE49-F238E27FC236}">
-                <a16:creationId xmlns:a16="http://schemas.microsoft.com/office/drawing/2014/main" id="{AE2C5296-E2C6-CB6A-5AF7-893510E618E2}"/>
+                <a16:creationId xmlns:a16="http://schemas.microsoft.com/office/drawing/2014/main" id="{A0B51245-D6EB-F4EA-94B7-96DE61936E89}"/>
               </a:ext>
             </a:extLst>
           </p:cNvPr>
@@ -11312,7 +11312,7 @@
           <p:cNvPr id="16" name="kpi_label_4">
             <a:extLst>
               <a:ext uri="{FF2B5EF4-FFF2-40B4-BE49-F238E27FC236}">
-                <a16:creationId xmlns:a16="http://schemas.microsoft.com/office/drawing/2014/main" id="{90DC6C12-9C42-5E68-7474-214838BA41CA}"/>
+                <a16:creationId xmlns:a16="http://schemas.microsoft.com/office/drawing/2014/main" id="{FB167ADA-AA48-FE65-CE19-337602F9899C}"/>
               </a:ext>
             </a:extLst>
           </p:cNvPr>
@@ -11360,7 +11360,7 @@
           <p:cNvPr id="17" name="source">
             <a:extLst>
               <a:ext uri="{FF2B5EF4-FFF2-40B4-BE49-F238E27FC236}">
-                <a16:creationId xmlns:a16="http://schemas.microsoft.com/office/drawing/2014/main" id="{C7EE5A61-ACFF-BF59-DD57-7DB54AEFE843}"/>
+                <a16:creationId xmlns:a16="http://schemas.microsoft.com/office/drawing/2014/main" id="{726C8961-FC0A-FD12-D8D6-CC5E54CADDBA}"/>
               </a:ext>
             </a:extLst>
           </p:cNvPr>
@@ -11415,7 +11415,7 @@
     </p:spTree>
     <p:extLst>
       <p:ext uri="{BB962C8B-B14F-4D97-AF65-F5344CB8AC3E}">
-        <p14:creationId xmlns:p14="http://schemas.microsoft.com/office/powerpoint/2010/main" val="1819556731"/>
+        <p14:creationId xmlns:p14="http://schemas.microsoft.com/office/powerpoint/2010/main" val="833793640"/>
       </p:ext>
     </p:extLst>
   </p:cSld>
@@ -11447,7 +11447,7 @@
           <p:cNvPr id="7" name="creative_background">
             <a:extLst>
               <a:ext uri="{FF2B5EF4-FFF2-40B4-BE49-F238E27FC236}">
-                <a16:creationId xmlns:a16="http://schemas.microsoft.com/office/drawing/2014/main" id="{7AEE068B-E9DC-6250-95E5-F98FA862C928}"/>
+                <a16:creationId xmlns:a16="http://schemas.microsoft.com/office/drawing/2014/main" id="{1EE042FD-34D5-6943-654A-E02C150F4721}"/>
               </a:ext>
             </a:extLst>
           </p:cNvPr>
@@ -11520,9 +11520,9 @@
           <a:bodyPr/>
           <a:lstStyle/>
           <a:p>
-            <a:fld id="{C5143365-16B3-4FD5-8BF7-F05E2AA1930B}" type="datetimeFigureOut">
+            <a:fld id="{67949D26-9034-4D83-88EA-A31F57F7C9E2}" type="datetimeFigureOut">
               <a:rPr lang="en-US" smtClean="0"/>
-              <a:t>10/3/2026</a:t>
+              <a:t>10/4/2026</a:t>
             </a:fld>
             <a:endParaRPr lang="en-US"/>
           </a:p>
@@ -11562,7 +11562,7 @@
           <a:bodyPr/>
           <a:lstStyle/>
           <a:p>
-            <a:fld id="{4562F234-49D9-48C6-80E0-9B9318BCC5E8}" type="slidenum">
+            <a:fld id="{7212BDF5-4B35-4116-8BB7-2AC3344F768A}" type="slidenum">
               <a:rPr lang="en-US" smtClean="0"/>
               <a:t>‹#›</a:t>
             </a:fld>
@@ -11575,7 +11575,7 @@
           <p:cNvPr id="8" name="body">
             <a:extLst>
               <a:ext uri="{FF2B5EF4-FFF2-40B4-BE49-F238E27FC236}">
-                <a16:creationId xmlns:a16="http://schemas.microsoft.com/office/drawing/2014/main" id="{66D6FE21-E1EE-C45A-677D-018B4D4957CE}"/>
+                <a16:creationId xmlns:a16="http://schemas.microsoft.com/office/drawing/2014/main" id="{E6B8C9E4-B2D3-23E7-C9C1-CD26DBEF6523}"/>
               </a:ext>
             </a:extLst>
           </p:cNvPr>
@@ -11615,7 +11615,7 @@
           <p:cNvPr id="9" name="quote">
             <a:extLst>
               <a:ext uri="{FF2B5EF4-FFF2-40B4-BE49-F238E27FC236}">
-                <a16:creationId xmlns:a16="http://schemas.microsoft.com/office/drawing/2014/main" id="{F66F4FD4-47BE-F58F-2267-B0D30F3BFEC0}"/>
+                <a16:creationId xmlns:a16="http://schemas.microsoft.com/office/drawing/2014/main" id="{27E3ACFC-97F9-F7AF-44C8-65FAD726523F}"/>
               </a:ext>
             </a:extLst>
           </p:cNvPr>
@@ -11665,7 +11665,7 @@
           <p:cNvPr id="10" name="attribution">
             <a:extLst>
               <a:ext uri="{FF2B5EF4-FFF2-40B4-BE49-F238E27FC236}">
-                <a16:creationId xmlns:a16="http://schemas.microsoft.com/office/drawing/2014/main" id="{DAEBACF1-8253-ABDD-1A4E-7A0ED9EA0428}"/>
+                <a16:creationId xmlns:a16="http://schemas.microsoft.com/office/drawing/2014/main" id="{0CAAEACB-4905-7487-436E-178168B6E963}"/>
               </a:ext>
             </a:extLst>
           </p:cNvPr>
@@ -11713,7 +11713,7 @@
           <p:cNvPr id="11" name="source">
             <a:extLst>
               <a:ext uri="{FF2B5EF4-FFF2-40B4-BE49-F238E27FC236}">
-                <a16:creationId xmlns:a16="http://schemas.microsoft.com/office/drawing/2014/main" id="{A1572442-133E-E6D6-C1B8-687F81578C86}"/>
+                <a16:creationId xmlns:a16="http://schemas.microsoft.com/office/drawing/2014/main" id="{82BA5931-2E20-9915-8B26-5730AFA19DFA}"/>
               </a:ext>
             </a:extLst>
           </p:cNvPr>
@@ -11768,7 +11768,7 @@
     </p:spTree>
     <p:extLst>
       <p:ext uri="{BB962C8B-B14F-4D97-AF65-F5344CB8AC3E}">
-        <p14:creationId xmlns:p14="http://schemas.microsoft.com/office/powerpoint/2010/main" val="2816106941"/>
+        <p14:creationId xmlns:p14="http://schemas.microsoft.com/office/powerpoint/2010/main" val="74631163"/>
       </p:ext>
     </p:extLst>
   </p:cSld>
@@ -11800,7 +11800,7 @@
           <p:cNvPr id="7" name="creative_background">
             <a:extLst>
               <a:ext uri="{FF2B5EF4-FFF2-40B4-BE49-F238E27FC236}">
-                <a16:creationId xmlns:a16="http://schemas.microsoft.com/office/drawing/2014/main" id="{F7DD51C4-4B97-4292-DF2D-AEB2D1646ACC}"/>
+                <a16:creationId xmlns:a16="http://schemas.microsoft.com/office/drawing/2014/main" id="{7261E466-47E7-D997-F803-AAE32DD41C72}"/>
               </a:ext>
             </a:extLst>
           </p:cNvPr>
@@ -11873,9 +11873,9 @@
           <a:bodyPr/>
           <a:lstStyle/>
           <a:p>
-            <a:fld id="{C5143365-16B3-4FD5-8BF7-F05E2AA1930B}" type="datetimeFigureOut">
+            <a:fld id="{67949D26-9034-4D83-88EA-A31F57F7C9E2}" type="datetimeFigureOut">
               <a:rPr lang="en-US" smtClean="0"/>
-              <a:t>10/3/2026</a:t>
+              <a:t>10/4/2026</a:t>
             </a:fld>
             <a:endParaRPr lang="en-US"/>
           </a:p>
@@ -11915,7 +11915,7 @@
           <a:bodyPr/>
           <a:lstStyle/>
           <a:p>
-            <a:fld id="{4562F234-49D9-48C6-80E0-9B9318BCC5E8}" type="slidenum">
+            <a:fld id="{7212BDF5-4B35-4116-8BB7-2AC3344F768A}" type="slidenum">
               <a:rPr lang="en-US" smtClean="0"/>
               <a:t>‹#›</a:t>
             </a:fld>
@@ -11928,7 +11928,7 @@
           <p:cNvPr id="8" name="item_1_title">
             <a:extLst>
               <a:ext uri="{FF2B5EF4-FFF2-40B4-BE49-F238E27FC236}">
-                <a16:creationId xmlns:a16="http://schemas.microsoft.com/office/drawing/2014/main" id="{E1C32A14-F63E-5E73-6903-B72D6F3E5072}"/>
+                <a16:creationId xmlns:a16="http://schemas.microsoft.com/office/drawing/2014/main" id="{871EFE60-8C3A-2406-B94C-F7B0ED02040F}"/>
               </a:ext>
             </a:extLst>
           </p:cNvPr>
@@ -11978,7 +11978,7 @@
           <p:cNvPr id="9" name="item_1">
             <a:extLst>
               <a:ext uri="{FF2B5EF4-FFF2-40B4-BE49-F238E27FC236}">
-                <a16:creationId xmlns:a16="http://schemas.microsoft.com/office/drawing/2014/main" id="{606F0FAC-B414-F765-2EB4-ED02C951C54B}"/>
+                <a16:creationId xmlns:a16="http://schemas.microsoft.com/office/drawing/2014/main" id="{9879F3EF-6DFB-FF8F-5624-881F1C62ED10}"/>
               </a:ext>
             </a:extLst>
           </p:cNvPr>
@@ -12026,7 +12026,7 @@
           <p:cNvPr id="10" name="item_2_title">
             <a:extLst>
               <a:ext uri="{FF2B5EF4-FFF2-40B4-BE49-F238E27FC236}">
-                <a16:creationId xmlns:a16="http://schemas.microsoft.com/office/drawing/2014/main" id="{366F39D2-D8D8-AD92-D0C1-B32E07A7F46B}"/>
+                <a16:creationId xmlns:a16="http://schemas.microsoft.com/office/drawing/2014/main" id="{A6AF7B4C-CF40-F15C-4126-902C8C278FE7}"/>
               </a:ext>
             </a:extLst>
           </p:cNvPr>
@@ -12079,7 +12079,7 @@
           <p:cNvPr id="11" name="item_2">
             <a:extLst>
               <a:ext uri="{FF2B5EF4-FFF2-40B4-BE49-F238E27FC236}">
-                <a16:creationId xmlns:a16="http://schemas.microsoft.com/office/drawing/2014/main" id="{F0ABEC10-E977-4FE4-67A0-BCDB0F4FAF93}"/>
+                <a16:creationId xmlns:a16="http://schemas.microsoft.com/office/drawing/2014/main" id="{D31FCD84-5B66-B2B7-03F2-1C356A3A255F}"/>
               </a:ext>
             </a:extLst>
           </p:cNvPr>
@@ -12127,7 +12127,7 @@
           <p:cNvPr id="12" name="item_3_title">
             <a:extLst>
               <a:ext uri="{FF2B5EF4-FFF2-40B4-BE49-F238E27FC236}">
-                <a16:creationId xmlns:a16="http://schemas.microsoft.com/office/drawing/2014/main" id="{C3681101-C70F-DB4D-4116-1CB0EDEEA051}"/>
+                <a16:creationId xmlns:a16="http://schemas.microsoft.com/office/drawing/2014/main" id="{6A89C5AE-88B0-97A6-BB7C-DF6FC123F503}"/>
               </a:ext>
             </a:extLst>
           </p:cNvPr>
@@ -12180,7 +12180,7 @@
           <p:cNvPr id="13" name="item_3">
             <a:extLst>
               <a:ext uri="{FF2B5EF4-FFF2-40B4-BE49-F238E27FC236}">
-                <a16:creationId xmlns:a16="http://schemas.microsoft.com/office/drawing/2014/main" id="{DCD3C534-B37B-19A8-A299-4F12D4B8CBC0}"/>
+                <a16:creationId xmlns:a16="http://schemas.microsoft.com/office/drawing/2014/main" id="{304225C7-2A6E-7E31-CB6E-5C9478BDE9D3}"/>
               </a:ext>
             </a:extLst>
           </p:cNvPr>
@@ -12228,7 +12228,7 @@
           <p:cNvPr id="14" name="source">
             <a:extLst>
               <a:ext uri="{FF2B5EF4-FFF2-40B4-BE49-F238E27FC236}">
-                <a16:creationId xmlns:a16="http://schemas.microsoft.com/office/drawing/2014/main" id="{82EC865A-A8A5-C330-0C0F-6035D7D17F86}"/>
+                <a16:creationId xmlns:a16="http://schemas.microsoft.com/office/drawing/2014/main" id="{D29F1C9C-B0D6-EFA5-BB39-76316C5614FA}"/>
               </a:ext>
             </a:extLst>
           </p:cNvPr>
@@ -12283,7 +12283,7 @@
     </p:spTree>
     <p:extLst>
       <p:ext uri="{BB962C8B-B14F-4D97-AF65-F5344CB8AC3E}">
-        <p14:creationId xmlns:p14="http://schemas.microsoft.com/office/powerpoint/2010/main" val="1782534178"/>
+        <p14:creationId xmlns:p14="http://schemas.microsoft.com/office/powerpoint/2010/main" val="647656016"/>
       </p:ext>
     </p:extLst>
   </p:cSld>
@@ -12315,7 +12315,7 @@
           <p:cNvPr id="7" name="creative_background">
             <a:extLst>
               <a:ext uri="{FF2B5EF4-FFF2-40B4-BE49-F238E27FC236}">
-                <a16:creationId xmlns:a16="http://schemas.microsoft.com/office/drawing/2014/main" id="{75689574-D724-4FBA-37E5-EDD7CC188BAB}"/>
+                <a16:creationId xmlns:a16="http://schemas.microsoft.com/office/drawing/2014/main" id="{A71FD3B2-08AC-2DF3-5D37-6A002BEE4A61}"/>
               </a:ext>
             </a:extLst>
           </p:cNvPr>
@@ -12388,9 +12388,9 @@
           <a:bodyPr/>
           <a:lstStyle/>
           <a:p>
-            <a:fld id="{C5143365-16B3-4FD5-8BF7-F05E2AA1930B}" type="datetimeFigureOut">
+            <a:fld id="{67949D26-9034-4D83-88EA-A31F57F7C9E2}" type="datetimeFigureOut">
               <a:rPr lang="en-US" smtClean="0"/>
-              <a:t>10/3/2026</a:t>
+              <a:t>10/4/2026</a:t>
             </a:fld>
             <a:endParaRPr lang="en-US"/>
           </a:p>
@@ -12430,7 +12430,7 @@
           <a:bodyPr/>
           <a:lstStyle/>
           <a:p>
-            <a:fld id="{4562F234-49D9-48C6-80E0-9B9318BCC5E8}" type="slidenum">
+            <a:fld id="{7212BDF5-4B35-4116-8BB7-2AC3344F768A}" type="slidenum">
               <a:rPr lang="en-US" smtClean="0"/>
               <a:t>‹#›</a:t>
             </a:fld>
@@ -12443,7 +12443,7 @@
           <p:cNvPr id="8" name="item_1_title">
             <a:extLst>
               <a:ext uri="{FF2B5EF4-FFF2-40B4-BE49-F238E27FC236}">
-                <a16:creationId xmlns:a16="http://schemas.microsoft.com/office/drawing/2014/main" id="{805BE4B2-12E9-14A8-8941-1308C0295949}"/>
+                <a16:creationId xmlns:a16="http://schemas.microsoft.com/office/drawing/2014/main" id="{187BB912-B730-35D5-CD3C-342C3B369673}"/>
               </a:ext>
             </a:extLst>
           </p:cNvPr>
@@ -12493,7 +12493,7 @@
           <p:cNvPr id="9" name="item_1">
             <a:extLst>
               <a:ext uri="{FF2B5EF4-FFF2-40B4-BE49-F238E27FC236}">
-                <a16:creationId xmlns:a16="http://schemas.microsoft.com/office/drawing/2014/main" id="{90B4F4CD-D251-8926-5B22-460A2EDC5008}"/>
+                <a16:creationId xmlns:a16="http://schemas.microsoft.com/office/drawing/2014/main" id="{AB2EE22C-E497-BD6B-C43B-F9B008C0DBCF}"/>
               </a:ext>
             </a:extLst>
           </p:cNvPr>
@@ -12541,7 +12541,7 @@
           <p:cNvPr id="10" name="item_2_title">
             <a:extLst>
               <a:ext uri="{FF2B5EF4-FFF2-40B4-BE49-F238E27FC236}">
-                <a16:creationId xmlns:a16="http://schemas.microsoft.com/office/drawing/2014/main" id="{345FF389-2F4E-034B-A25B-D3346C5627A7}"/>
+                <a16:creationId xmlns:a16="http://schemas.microsoft.com/office/drawing/2014/main" id="{6A301F4D-9D7C-4ABF-ED6E-3146C92E1ACD}"/>
               </a:ext>
             </a:extLst>
           </p:cNvPr>
@@ -12594,7 +12594,7 @@
           <p:cNvPr id="11" name="item_2">
             <a:extLst>
               <a:ext uri="{FF2B5EF4-FFF2-40B4-BE49-F238E27FC236}">
-                <a16:creationId xmlns:a16="http://schemas.microsoft.com/office/drawing/2014/main" id="{1FBC510A-0A32-4030-6370-9BB5F1EAE36D}"/>
+                <a16:creationId xmlns:a16="http://schemas.microsoft.com/office/drawing/2014/main" id="{F6E88E74-38AE-08FC-6797-3FECB2F764EE}"/>
               </a:ext>
             </a:extLst>
           </p:cNvPr>
@@ -12642,7 +12642,7 @@
           <p:cNvPr id="12" name="source">
             <a:extLst>
               <a:ext uri="{FF2B5EF4-FFF2-40B4-BE49-F238E27FC236}">
-                <a16:creationId xmlns:a16="http://schemas.microsoft.com/office/drawing/2014/main" id="{638B585B-C1C6-9AD9-46B4-0A2FF0E9966B}"/>
+                <a16:creationId xmlns:a16="http://schemas.microsoft.com/office/drawing/2014/main" id="{D6AE497A-F90E-96BB-2199-7335A8D6747F}"/>
               </a:ext>
             </a:extLst>
           </p:cNvPr>
@@ -12697,7 +12697,7 @@
     </p:spTree>
     <p:extLst>
       <p:ext uri="{BB962C8B-B14F-4D97-AF65-F5344CB8AC3E}">
-        <p14:creationId xmlns:p14="http://schemas.microsoft.com/office/powerpoint/2010/main" val="3750105403"/>
+        <p14:creationId xmlns:p14="http://schemas.microsoft.com/office/powerpoint/2010/main" val="664286722"/>
       </p:ext>
     </p:extLst>
   </p:cSld>
@@ -12729,7 +12729,7 @@
           <p:cNvPr id="7" name="creative_background">
             <a:extLst>
               <a:ext uri="{FF2B5EF4-FFF2-40B4-BE49-F238E27FC236}">
-                <a16:creationId xmlns:a16="http://schemas.microsoft.com/office/drawing/2014/main" id="{E60A5BB7-AAB8-C830-0F7D-B5966C71C201}"/>
+                <a16:creationId xmlns:a16="http://schemas.microsoft.com/office/drawing/2014/main" id="{B0E8AFB0-D26A-586E-7D2E-A2ADE8D829AE}"/>
               </a:ext>
             </a:extLst>
           </p:cNvPr>
@@ -12802,9 +12802,9 @@
           <a:bodyPr/>
           <a:lstStyle/>
           <a:p>
-            <a:fld id="{C5143365-16B3-4FD5-8BF7-F05E2AA1930B}" type="datetimeFigureOut">
+            <a:fld id="{67949D26-9034-4D83-88EA-A31F57F7C9E2}" type="datetimeFigureOut">
               <a:rPr lang="en-US" smtClean="0"/>
-              <a:t>10/3/2026</a:t>
+              <a:t>10/4/2026</a:t>
             </a:fld>
             <a:endParaRPr lang="en-US"/>
           </a:p>
@@ -12844,7 +12844,7 @@
           <a:bodyPr/>
           <a:lstStyle/>
           <a:p>
-            <a:fld id="{4562F234-49D9-48C6-80E0-9B9318BCC5E8}" type="slidenum">
+            <a:fld id="{7212BDF5-4B35-4116-8BB7-2AC3344F768A}" type="slidenum">
               <a:rPr lang="en-US" smtClean="0"/>
               <a:t>‹#›</a:t>
             </a:fld>
@@ -12857,7 +12857,7 @@
           <p:cNvPr id="8" name="chart">
             <a:extLst>
               <a:ext uri="{FF2B5EF4-FFF2-40B4-BE49-F238E27FC236}">
-                <a16:creationId xmlns:a16="http://schemas.microsoft.com/office/drawing/2014/main" id="{E5BA243A-8F90-99C4-6CE7-D300A02EA4CD}"/>
+                <a16:creationId xmlns:a16="http://schemas.microsoft.com/office/drawing/2014/main" id="{957C9A22-2A50-CE8C-D7E6-5CBC9FE1382E}"/>
               </a:ext>
             </a:extLst>
           </p:cNvPr>
@@ -12887,7 +12887,7 @@
           <p:cNvPr id="9" name="body">
             <a:extLst>
               <a:ext uri="{FF2B5EF4-FFF2-40B4-BE49-F238E27FC236}">
-                <a16:creationId xmlns:a16="http://schemas.microsoft.com/office/drawing/2014/main" id="{9FAC5691-30DC-A6DF-068B-257DC59F8A51}"/>
+                <a16:creationId xmlns:a16="http://schemas.microsoft.com/office/drawing/2014/main" id="{4C03856D-30AB-E799-658C-D131431E6383}"/>
               </a:ext>
             </a:extLst>
           </p:cNvPr>
@@ -12930,7 +12930,7 @@
           <p:cNvPr id="10" name="source">
             <a:extLst>
               <a:ext uri="{FF2B5EF4-FFF2-40B4-BE49-F238E27FC236}">
-                <a16:creationId xmlns:a16="http://schemas.microsoft.com/office/drawing/2014/main" id="{97000CB8-D0EC-1F5A-38F6-0A08695ABB18}"/>
+                <a16:creationId xmlns:a16="http://schemas.microsoft.com/office/drawing/2014/main" id="{789ADC1C-857E-A266-A94F-BD697016DAD0}"/>
               </a:ext>
             </a:extLst>
           </p:cNvPr>
@@ -12985,7 +12985,7 @@
     </p:spTree>
     <p:extLst>
       <p:ext uri="{BB962C8B-B14F-4D97-AF65-F5344CB8AC3E}">
-        <p14:creationId xmlns:p14="http://schemas.microsoft.com/office/powerpoint/2010/main" val="4174584309"/>
+        <p14:creationId xmlns:p14="http://schemas.microsoft.com/office/powerpoint/2010/main" val="3141868147"/>
       </p:ext>
     </p:extLst>
   </p:cSld>
@@ -13017,7 +13017,7 @@
           <p:cNvPr id="7" name="creative_background">
             <a:extLst>
               <a:ext uri="{FF2B5EF4-FFF2-40B4-BE49-F238E27FC236}">
-                <a16:creationId xmlns:a16="http://schemas.microsoft.com/office/drawing/2014/main" id="{64897D8F-4D89-5256-1B79-0ED00ECE5BC1}"/>
+                <a16:creationId xmlns:a16="http://schemas.microsoft.com/office/drawing/2014/main" id="{B7C34579-F311-C6C5-1248-14F05C980324}"/>
               </a:ext>
             </a:extLst>
           </p:cNvPr>
@@ -13090,9 +13090,9 @@
           <a:bodyPr/>
           <a:lstStyle/>
           <a:p>
-            <a:fld id="{C5143365-16B3-4FD5-8BF7-F05E2AA1930B}" type="datetimeFigureOut">
+            <a:fld id="{67949D26-9034-4D83-88EA-A31F57F7C9E2}" type="datetimeFigureOut">
               <a:rPr lang="en-US" smtClean="0"/>
-              <a:t>10/3/2026</a:t>
+              <a:t>10/4/2026</a:t>
             </a:fld>
             <a:endParaRPr lang="en-US"/>
           </a:p>
@@ -13132,7 +13132,7 @@
           <a:bodyPr/>
           <a:lstStyle/>
           <a:p>
-            <a:fld id="{4562F234-49D9-48C6-80E0-9B9318BCC5E8}" type="slidenum">
+            <a:fld id="{7212BDF5-4B35-4116-8BB7-2AC3344F768A}" type="slidenum">
               <a:rPr lang="en-US" smtClean="0"/>
               <a:t>‹#›</a:t>
             </a:fld>
@@ -13145,7 +13145,7 @@
           <p:cNvPr id="8" name="item_1_title">
             <a:extLst>
               <a:ext uri="{FF2B5EF4-FFF2-40B4-BE49-F238E27FC236}">
-                <a16:creationId xmlns:a16="http://schemas.microsoft.com/office/drawing/2014/main" id="{51EEBEBC-A472-E501-173C-E912780A9098}"/>
+                <a16:creationId xmlns:a16="http://schemas.microsoft.com/office/drawing/2014/main" id="{2139027B-A782-B224-0303-099B7EB21C1B}"/>
               </a:ext>
             </a:extLst>
           </p:cNvPr>
@@ -13195,7 +13195,7 @@
           <p:cNvPr id="9" name="item_1">
             <a:extLst>
               <a:ext uri="{FF2B5EF4-FFF2-40B4-BE49-F238E27FC236}">
-                <a16:creationId xmlns:a16="http://schemas.microsoft.com/office/drawing/2014/main" id="{A114E4DF-2D15-FAD1-3E6E-3107E2A656E4}"/>
+                <a16:creationId xmlns:a16="http://schemas.microsoft.com/office/drawing/2014/main" id="{31A0B62C-F7F9-5420-83BC-06CC53C2B2CB}"/>
               </a:ext>
             </a:extLst>
           </p:cNvPr>
@@ -13243,7 +13243,7 @@
           <p:cNvPr id="10" name="item_2_title">
             <a:extLst>
               <a:ext uri="{FF2B5EF4-FFF2-40B4-BE49-F238E27FC236}">
-                <a16:creationId xmlns:a16="http://schemas.microsoft.com/office/drawing/2014/main" id="{6FF0FB9D-ABC7-CEE4-B106-8C0943EB21AE}"/>
+                <a16:creationId xmlns:a16="http://schemas.microsoft.com/office/drawing/2014/main" id="{A9BA6248-1BD8-76F0-0747-31CA242F4771}"/>
               </a:ext>
             </a:extLst>
           </p:cNvPr>
@@ -13296,7 +13296,7 @@
           <p:cNvPr id="11" name="item_2">
             <a:extLst>
               <a:ext uri="{FF2B5EF4-FFF2-40B4-BE49-F238E27FC236}">
-                <a16:creationId xmlns:a16="http://schemas.microsoft.com/office/drawing/2014/main" id="{F460772A-C50D-CBC4-D77A-E88DF87B077B}"/>
+                <a16:creationId xmlns:a16="http://schemas.microsoft.com/office/drawing/2014/main" id="{45766578-422C-34AC-4723-6F851E80DD0C}"/>
               </a:ext>
             </a:extLst>
           </p:cNvPr>
@@ -13344,7 +13344,7 @@
           <p:cNvPr id="12" name="item_3_title">
             <a:extLst>
               <a:ext uri="{FF2B5EF4-FFF2-40B4-BE49-F238E27FC236}">
-                <a16:creationId xmlns:a16="http://schemas.microsoft.com/office/drawing/2014/main" id="{D3412035-139B-F8C8-CC3F-8F362D51005A}"/>
+                <a16:creationId xmlns:a16="http://schemas.microsoft.com/office/drawing/2014/main" id="{BAAC60F0-C5C3-231D-E40A-9CCDD820D8D9}"/>
               </a:ext>
             </a:extLst>
           </p:cNvPr>
@@ -13397,7 +13397,7 @@
           <p:cNvPr id="13" name="item_3">
             <a:extLst>
               <a:ext uri="{FF2B5EF4-FFF2-40B4-BE49-F238E27FC236}">
-                <a16:creationId xmlns:a16="http://schemas.microsoft.com/office/drawing/2014/main" id="{9563F8EA-C6D9-6787-E95A-CCFF27BA75B7}"/>
+                <a16:creationId xmlns:a16="http://schemas.microsoft.com/office/drawing/2014/main" id="{82EA4FA3-AE3E-CE93-B9E0-0ADF3CA02725}"/>
               </a:ext>
             </a:extLst>
           </p:cNvPr>
@@ -13445,7 +13445,7 @@
           <p:cNvPr id="14" name="item_4_title">
             <a:extLst>
               <a:ext uri="{FF2B5EF4-FFF2-40B4-BE49-F238E27FC236}">
-                <a16:creationId xmlns:a16="http://schemas.microsoft.com/office/drawing/2014/main" id="{B7114EB9-424C-0A11-622E-2B7BBAD97BF3}"/>
+                <a16:creationId xmlns:a16="http://schemas.microsoft.com/office/drawing/2014/main" id="{21CFA55C-12BC-2A03-6694-1A6E90D9B8FB}"/>
               </a:ext>
             </a:extLst>
           </p:cNvPr>
@@ -13498,7 +13498,7 @@
           <p:cNvPr id="15" name="item_4">
             <a:extLst>
               <a:ext uri="{FF2B5EF4-FFF2-40B4-BE49-F238E27FC236}">
-                <a16:creationId xmlns:a16="http://schemas.microsoft.com/office/drawing/2014/main" id="{A9525656-81A2-51A1-1DCA-4E7AFE1DFEF9}"/>
+                <a16:creationId xmlns:a16="http://schemas.microsoft.com/office/drawing/2014/main" id="{1BEED6FA-49E6-358C-2811-A355EA336C47}"/>
               </a:ext>
             </a:extLst>
           </p:cNvPr>
@@ -13546,7 +13546,7 @@
           <p:cNvPr id="16" name="source">
             <a:extLst>
               <a:ext uri="{FF2B5EF4-FFF2-40B4-BE49-F238E27FC236}">
-                <a16:creationId xmlns:a16="http://schemas.microsoft.com/office/drawing/2014/main" id="{CE405513-8258-608A-DB06-046B4D0C8479}"/>
+                <a16:creationId xmlns:a16="http://schemas.microsoft.com/office/drawing/2014/main" id="{C2F74E13-1BCB-D5B9-D087-2388C9525472}"/>
               </a:ext>
             </a:extLst>
           </p:cNvPr>
@@ -13601,7 +13601,7 @@
     </p:spTree>
     <p:extLst>
       <p:ext uri="{BB962C8B-B14F-4D97-AF65-F5344CB8AC3E}">
-        <p14:creationId xmlns:p14="http://schemas.microsoft.com/office/powerpoint/2010/main" val="1446664874"/>
+        <p14:creationId xmlns:p14="http://schemas.microsoft.com/office/powerpoint/2010/main" val="2292706215"/>
       </p:ext>
     </p:extLst>
   </p:cSld>
@@ -13638,7 +13638,7 @@
           <p:cNvPr id="9" name="creative_background_master">
             <a:extLst>
               <a:ext uri="{FF2B5EF4-FFF2-40B4-BE49-F238E27FC236}">
-                <a16:creationId xmlns:a16="http://schemas.microsoft.com/office/drawing/2014/main" id="{BD367781-A461-2CEE-56A0-2287445CC8C6}"/>
+                <a16:creationId xmlns:a16="http://schemas.microsoft.com/office/drawing/2014/main" id="{F9751356-C773-01E9-B791-658A047BA0D4}"/>
               </a:ext>
             </a:extLst>
           </p:cNvPr>
@@ -13799,9 +13799,9 @@
             </a:lvl1pPr>
           </a:lstStyle>
           <a:p>
-            <a:fld id="{C5143365-16B3-4FD5-8BF7-F05E2AA1930B}" type="datetimeFigureOut">
+            <a:fld id="{67949D26-9034-4D83-88EA-A31F57F7C9E2}" type="datetimeFigureOut">
               <a:rPr lang="en-US" smtClean="0"/>
-              <a:t>10/3/2026</a:t>
+              <a:t>10/4/2026</a:t>
             </a:fld>
             <a:endParaRPr lang="en-US"/>
           </a:p>
@@ -13881,7 +13881,7 @@
             </a:lvl1pPr>
           </a:lstStyle>
           <a:p>
-            <a:fld id="{4562F234-49D9-48C6-80E0-9B9318BCC5E8}" type="slidenum">
+            <a:fld id="{7212BDF5-4B35-4116-8BB7-2AC3344F768A}" type="slidenum">
               <a:rPr lang="en-US" smtClean="0"/>
               <a:t>‹#›</a:t>
             </a:fld>
@@ -13892,7 +13892,7 @@
     </p:spTree>
     <p:extLst>
       <p:ext uri="{BB962C8B-B14F-4D97-AF65-F5344CB8AC3E}">
-        <p14:creationId xmlns:p14="http://schemas.microsoft.com/office/powerpoint/2010/main" val="1772243547"/>
+        <p14:creationId xmlns:p14="http://schemas.microsoft.com/office/powerpoint/2010/main" val="3025073993"/>
       </p:ext>
     </p:extLst>
   </p:cSld>
@@ -14273,13 +14273,13 @@
   <a:themeElements>
     <a:clrScheme name="Integral">
       <a:dk1>
-        <a:srgbClr val="4B82D8"/>
+        <a:srgbClr val="A2C4FA"/>
       </a:dk1>
       <a:lt1>
         <a:srgbClr val="05070B"/>
       </a:lt1>
       <a:dk2>
-        <a:srgbClr val="99A6B9"/>
+        <a:srgbClr val="B6C3D7"/>
       </a:dk2>
       <a:lt2>
         <a:srgbClr val="141619"/>
@@ -14291,22 +14291,22 @@
         <a:srgbClr val="D6A84B"/>
       </a:accent2>
       <a:accent3>
-        <a:srgbClr val="99A6B9"/>
+        <a:srgbClr val="B6C3D7"/>
       </a:accent3>
       <a:accent4>
-        <a:srgbClr val="4077CC"/>
+        <a:srgbClr val="76AAFA"/>
       </a:accent4>
       <a:accent5>
         <a:srgbClr val="D6A84B"/>
       </a:accent5>
       <a:accent6>
-        <a:srgbClr val="99A6B9"/>
+        <a:srgbClr val="B6C3D7"/>
       </a:accent6>
       <a:hlink>
-        <a:srgbClr val="4077CC"/>
+        <a:srgbClr val="76AAFA"/>
       </a:hlink>
       <a:folHlink>
-        <a:srgbClr val="99A6B9"/>
+        <a:srgbClr val="B6C3D7"/>
       </a:folHlink>
     </a:clrScheme>
     <a:fontScheme name="Integral">
